--- a/docs/epi/presentations/j3/RDC_Ajustement de la taille des populations cibles du PEV_2025_Final (1).pptx
+++ b/docs/epi/presentations/j3/RDC_Ajustement de la taille des populations cibles du PEV_2025_Final (1).pptx
@@ -1,9 +1,9 @@
 
 <file path=ppt/presentation.xml><?xml version="1.0" encoding="utf-8"?>
-<p:presentation xmlns:a="http://schemas.openxmlformats.org/drawingml/2006/main" xmlns:r="http://schemas.openxmlformats.org/officeDocument/2006/relationships" xmlns:p="http://schemas.openxmlformats.org/presentationml/2006/main" saveSubsetFonts="1">
+<p:presentation xmlns:a="http://schemas.openxmlformats.org/drawingml/2006/main" xmlns:r="http://schemas.openxmlformats.org/officeDocument/2006/relationships" xmlns:p="http://schemas.openxmlformats.org/presentationml/2006/main">
   <p:sldMasterIdLst>
-    <p:sldMasterId id="2147483660" r:id="rId1"/>
-    <p:sldMasterId id="2147483672" r:id="rId2"/>
+    <p:sldMasterId id="2147483648" r:id="rId1"/>
+    <p:sldMasterId id="2147483660" r:id="rId2"/>
   </p:sldMasterIdLst>
   <p:notesMasterIdLst>
     <p:notesMasterId r:id="rId22"/>
@@ -129,12 +129,12 @@
   <p:extLst>
     <p:ext uri="{EFAFB233-063F-42B5-8137-9DF3F51BA10A}">
       <p15:sldGuideLst xmlns:p15="http://schemas.microsoft.com/office/powerpoint/2012/main">
-        <p15:guide id="1" orient="horz" pos="2160">
+        <p15:guide id="1" orient="horz" pos="2160" userDrawn="1">
           <p15:clr>
             <a:srgbClr val="A4A3A4"/>
           </p15:clr>
         </p15:guide>
-        <p15:guide id="2" pos="3840">
+        <p15:guide id="2" pos="3840" userDrawn="1">
           <p15:clr>
             <a:srgbClr val="A4A3A4"/>
           </p15:clr>
@@ -149,112 +149,6 @@
 <p188:authorLst xmlns:a="http://schemas.openxmlformats.org/drawingml/2006/main" xmlns:r="http://schemas.openxmlformats.org/officeDocument/2006/relationships" xmlns:p188="http://schemas.microsoft.com/office/powerpoint/2018/8/main">
   <p188:author id="{9F6F3F68-0D6E-C36E-9479-1ED2DC05523C}" name="NIMPA MENGOUO, Marcellin" initials="NMM" userId="S::nimpamengouom@who.int::cb4c7e70-d9af-4057-816a-3f9ff3da9723" providerId="AD"/>
 </p188:authorLst>
-</file>
-
-<file path=ppt/changesInfos/changesInfo1.xml><?xml version="1.0" encoding="utf-8"?>
-<pc:chgInfo xmlns:a="http://schemas.openxmlformats.org/drawingml/2006/main" xmlns:r="http://schemas.openxmlformats.org/officeDocument/2006/relationships" xmlns:ac="http://schemas.microsoft.com/office/drawing/2013/main/command" xmlns:pc="http://schemas.microsoft.com/office/powerpoint/2013/main/command">
-  <pc:docChgLst>
-    <pc:chgData name="MWANGA, Cedric" userId="721c01b3-afc0-4c7c-852d-72588a3043f2" providerId="ADAL" clId="{3B8516EC-9079-4863-8A58-782ACA0A73CA}"/>
-    <pc:docChg chg="custSel modSld">
-      <pc:chgData name="MWANGA, Cedric" userId="721c01b3-afc0-4c7c-852d-72588a3043f2" providerId="ADAL" clId="{3B8516EC-9079-4863-8A58-782ACA0A73CA}" dt="2025-02-20T13:12:31.638" v="33" actId="20577"/>
-      <pc:docMkLst>
-        <pc:docMk/>
-      </pc:docMkLst>
-      <pc:sldChg chg="modSp mod">
-        <pc:chgData name="MWANGA, Cedric" userId="721c01b3-afc0-4c7c-852d-72588a3043f2" providerId="ADAL" clId="{3B8516EC-9079-4863-8A58-782ACA0A73CA}" dt="2025-02-20T12:34:32.797" v="13" actId="20577"/>
-        <pc:sldMkLst>
-          <pc:docMk/>
-          <pc:sldMk cId="115884726" sldId="257"/>
-        </pc:sldMkLst>
-        <pc:spChg chg="mod">
-          <ac:chgData name="MWANGA, Cedric" userId="721c01b3-afc0-4c7c-852d-72588a3043f2" providerId="ADAL" clId="{3B8516EC-9079-4863-8A58-782ACA0A73CA}" dt="2025-02-20T12:34:32.797" v="13" actId="20577"/>
-          <ac:spMkLst>
-            <pc:docMk/>
-            <pc:sldMk cId="115884726" sldId="257"/>
-            <ac:spMk id="5" creationId="{683B44C2-FA59-4A22-936C-6C1B0CD162EA}"/>
-          </ac:spMkLst>
-        </pc:spChg>
-      </pc:sldChg>
-      <pc:sldChg chg="modSp mod">
-        <pc:chgData name="MWANGA, Cedric" userId="721c01b3-afc0-4c7c-852d-72588a3043f2" providerId="ADAL" clId="{3B8516EC-9079-4863-8A58-782ACA0A73CA}" dt="2025-02-20T12:36:58.365" v="31" actId="20577"/>
-        <pc:sldMkLst>
-          <pc:docMk/>
-          <pc:sldMk cId="465089167" sldId="259"/>
-        </pc:sldMkLst>
-        <pc:spChg chg="mod">
-          <ac:chgData name="MWANGA, Cedric" userId="721c01b3-afc0-4c7c-852d-72588a3043f2" providerId="ADAL" clId="{3B8516EC-9079-4863-8A58-782ACA0A73CA}" dt="2025-02-20T12:36:58.365" v="31" actId="20577"/>
-          <ac:spMkLst>
-            <pc:docMk/>
-            <pc:sldMk cId="465089167" sldId="259"/>
-            <ac:spMk id="5" creationId="{683B44C2-FA59-4A22-936C-6C1B0CD162EA}"/>
-          </ac:spMkLst>
-        </pc:spChg>
-      </pc:sldChg>
-      <pc:sldChg chg="modSp mod">
-        <pc:chgData name="MWANGA, Cedric" userId="721c01b3-afc0-4c7c-852d-72588a3043f2" providerId="ADAL" clId="{3B8516EC-9079-4863-8A58-782ACA0A73CA}" dt="2025-02-20T12:35:44.421" v="18" actId="20577"/>
-        <pc:sldMkLst>
-          <pc:docMk/>
-          <pc:sldMk cId="3605824073" sldId="260"/>
-        </pc:sldMkLst>
-        <pc:spChg chg="mod">
-          <ac:chgData name="MWANGA, Cedric" userId="721c01b3-afc0-4c7c-852d-72588a3043f2" providerId="ADAL" clId="{3B8516EC-9079-4863-8A58-782ACA0A73CA}" dt="2025-02-20T12:34:46.969" v="16" actId="33524"/>
-          <ac:spMkLst>
-            <pc:docMk/>
-            <pc:sldMk cId="3605824073" sldId="260"/>
-            <ac:spMk id="2" creationId="{8487084C-31A5-4472-8BF7-8EE2508FD9FD}"/>
-          </ac:spMkLst>
-        </pc:spChg>
-        <pc:spChg chg="mod">
-          <ac:chgData name="MWANGA, Cedric" userId="721c01b3-afc0-4c7c-852d-72588a3043f2" providerId="ADAL" clId="{3B8516EC-9079-4863-8A58-782ACA0A73CA}" dt="2025-02-20T12:35:44.421" v="18" actId="20577"/>
-          <ac:spMkLst>
-            <pc:docMk/>
-            <pc:sldMk cId="3605824073" sldId="260"/>
-            <ac:spMk id="3" creationId="{5B7A9EC5-FCCF-4EBA-9181-20303A2677C1}"/>
-          </ac:spMkLst>
-        </pc:spChg>
-      </pc:sldChg>
-      <pc:sldChg chg="modSp mod">
-        <pc:chgData name="MWANGA, Cedric" userId="721c01b3-afc0-4c7c-852d-72588a3043f2" providerId="ADAL" clId="{3B8516EC-9079-4863-8A58-782ACA0A73CA}" dt="2025-02-20T13:12:31.638" v="33" actId="20577"/>
-        <pc:sldMkLst>
-          <pc:docMk/>
-          <pc:sldMk cId="1806927491" sldId="2182"/>
-        </pc:sldMkLst>
-        <pc:spChg chg="mod">
-          <ac:chgData name="MWANGA, Cedric" userId="721c01b3-afc0-4c7c-852d-72588a3043f2" providerId="ADAL" clId="{3B8516EC-9079-4863-8A58-782ACA0A73CA}" dt="2025-02-20T13:12:31.638" v="33" actId="20577"/>
-          <ac:spMkLst>
-            <pc:docMk/>
-            <pc:sldMk cId="1806927491" sldId="2182"/>
-            <ac:spMk id="5" creationId="{683B44C2-FA59-4A22-936C-6C1B0CD162EA}"/>
-          </ac:spMkLst>
-        </pc:spChg>
-      </pc:sldChg>
-    </pc:docChg>
-  </pc:docChgLst>
-  <pc:docChgLst>
-    <pc:chgData name="MWANGA, Cedric" userId="721c01b3-afc0-4c7c-852d-72588a3043f2" providerId="ADAL" clId="{B12E47BB-4E30-48D8-A0C6-874D084003E3}"/>
-    <pc:docChg chg="modSld">
-      <pc:chgData name="MWANGA, Cedric" userId="721c01b3-afc0-4c7c-852d-72588a3043f2" providerId="ADAL" clId="{B12E47BB-4E30-48D8-A0C6-874D084003E3}" dt="2025-02-18T09:14:23.560" v="0"/>
-      <pc:docMkLst>
-        <pc:docMk/>
-      </pc:docMkLst>
-      <pc:sldChg chg="modSp">
-        <pc:chgData name="MWANGA, Cedric" userId="721c01b3-afc0-4c7c-852d-72588a3043f2" providerId="ADAL" clId="{B12E47BB-4E30-48D8-A0C6-874D084003E3}" dt="2025-02-18T09:14:23.560" v="0"/>
-        <pc:sldMkLst>
-          <pc:docMk/>
-          <pc:sldMk cId="600383615" sldId="262"/>
-        </pc:sldMkLst>
-        <pc:graphicFrameChg chg="mod">
-          <ac:chgData name="MWANGA, Cedric" userId="721c01b3-afc0-4c7c-852d-72588a3043f2" providerId="ADAL" clId="{B12E47BB-4E30-48D8-A0C6-874D084003E3}" dt="2025-02-18T09:14:23.560" v="0"/>
-          <ac:graphicFrameMkLst>
-            <pc:docMk/>
-            <pc:sldMk cId="600383615" sldId="262"/>
-            <ac:graphicFrameMk id="2" creationId="{5FE0C9C7-7251-A4D3-24FF-13004EF174DD}"/>
-          </ac:graphicFrameMkLst>
-        </pc:graphicFrameChg>
-      </pc:sldChg>
-    </pc:docChg>
-  </pc:docChgLst>
-</pc:chgInfo>
 </file>
 
 <file path=ppt/notesMasters/notesMaster1.xml><?xml version="1.0" encoding="utf-8"?>
@@ -339,7 +233,7 @@
           <a:p>
             <a:fld id="{9827BBAE-A262-4095-BC6E-BE8B600A77C1}" type="datetimeFigureOut">
               <a:rPr lang="en-US" smtClean="0"/>
-              <a:t>12/16/2025</a:t>
+              <a:t>12/17/2025</a:t>
             </a:fld>
             <a:endParaRPr lang="en-US"/>
           </a:p>
@@ -497,18 +391,13 @@
           <a:p>
             <a:fld id="{30BE6EF9-8ED8-40C8-9CDD-7446378D20FB}" type="slidenum">
               <a:rPr lang="en-US" smtClean="0"/>
-              <a:t>‹N°›</a:t>
+              <a:t>‹#›</a:t>
             </a:fld>
             <a:endParaRPr lang="en-US"/>
           </a:p>
         </p:txBody>
       </p:sp>
     </p:spTree>
-    <p:extLst>
-      <p:ext uri="{BB962C8B-B14F-4D97-AF65-F5344CB8AC3E}">
-        <p14:creationId xmlns:p14="http://schemas.microsoft.com/office/powerpoint/2010/main" val="3369893073"/>
-      </p:ext>
-    </p:extLst>
   </p:cSld>
   <p:clrMap bg1="lt1" tx1="dk1" bg2="lt2" tx2="dk2" accent1="accent1" accent2="accent2" accent3="accent3" accent4="accent4" accent5="accent5" accent6="accent6" hlink="hlink" folHlink="folHlink"/>
   <p:notesStyle>
@@ -625,13 +514,7 @@
       </p:grpSpPr>
       <p:sp>
         <p:nvSpPr>
-          <p:cNvPr id="22530" name="Slide Image Placeholder 1">
-            <a:extLst>
-              <a:ext uri="{FF2B5EF4-FFF2-40B4-BE49-F238E27FC236}">
-                <a16:creationId xmlns="" xmlns:a16="http://schemas.microsoft.com/office/drawing/2014/main" id="{CE720700-6DCE-4403-9393-0E7AD176CA90}"/>
-              </a:ext>
-            </a:extLst>
-          </p:cNvPr>
+          <p:cNvPr id="22530" name="Slide Image Placeholder 1"/>
           <p:cNvSpPr>
             <a:spLocks noGrp="1" noRot="1" noChangeAspect="1" noTextEdit="1"/>
           </p:cNvSpPr>
@@ -650,8 +533,6 @@
               <a:srgbClr val="000000"/>
             </a:solidFill>
             <a:miter lim="800000"/>
-            <a:headEnd/>
-            <a:tailEnd/>
           </a:ln>
           <a:extLst>
             <a:ext uri="{909E8E84-426E-40DD-AFC4-6F175D3DCCD1}">
@@ -666,13 +547,7 @@
       </p:sp>
       <p:sp>
         <p:nvSpPr>
-          <p:cNvPr id="22531" name="Notes Placeholder 2">
-            <a:extLst>
-              <a:ext uri="{FF2B5EF4-FFF2-40B4-BE49-F238E27FC236}">
-                <a16:creationId xmlns="" xmlns:a16="http://schemas.microsoft.com/office/drawing/2014/main" id="{F88417B1-1280-4925-9505-73680753A218}"/>
-              </a:ext>
-            </a:extLst>
-          </p:cNvPr>
+          <p:cNvPr id="22531" name="Notes Placeholder 2"/>
           <p:cNvSpPr>
             <a:spLocks noGrp="1"/>
           </p:cNvSpPr>
@@ -689,7 +564,6 @@
             <a:avLst/>
           </a:prstGeom>
           <a:noFill/>
-          <a:ln/>
           <a:extLst>
             <a:ext uri="{909E8E84-426E-40DD-AFC4-6F175D3DCCD1}">
               <a14:hiddenFill xmlns:a14="http://schemas.microsoft.com/office/drawing/2010/main">
@@ -719,11 +593,6 @@
         </p:txBody>
       </p:sp>
     </p:spTree>
-    <p:extLst>
-      <p:ext uri="{BB962C8B-B14F-4D97-AF65-F5344CB8AC3E}">
-        <p14:creationId xmlns:p14="http://schemas.microsoft.com/office/powerpoint/2010/main" val="3859500255"/>
-      </p:ext>
-    </p:extLst>
   </p:cSld>
   <p:clrMapOvr>
     <a:masterClrMapping/>
@@ -801,6 +670,13 @@
             <a:schemeClr val="lt1"/>
           </a:fontRef>
         </p:style>
+        <p:txBody>
+          <a:bodyPr/>
+          <a:lstStyle/>
+          <a:p>
+            <a:endParaRPr lang="en-GB"/>
+          </a:p>
+        </p:txBody>
       </p:sp>
       <p:sp>
         <p:nvSpPr>
@@ -832,6 +708,13 @@
             <a:softEdge rad="0"/>
           </a:effectLst>
         </p:spPr>
+        <p:txBody>
+          <a:bodyPr/>
+          <a:lstStyle/>
+          <a:p>
+            <a:endParaRPr lang="en-GB"/>
+          </a:p>
+        </p:txBody>
       </p:sp>
       <p:sp>
         <p:nvSpPr>
@@ -860,6 +743,13 @@
           </a:ln>
           <a:effectLst/>
         </p:spPr>
+        <p:txBody>
+          <a:bodyPr/>
+          <a:lstStyle/>
+          <a:p>
+            <a:endParaRPr lang="en-GB"/>
+          </a:p>
+        </p:txBody>
       </p:sp>
       <p:sp>
         <p:nvSpPr>
@@ -898,6 +788,13 @@
             <a:schemeClr val="lt1"/>
           </a:fontRef>
         </p:style>
+        <p:txBody>
+          <a:bodyPr/>
+          <a:lstStyle/>
+          <a:p>
+            <a:endParaRPr lang="en-GB"/>
+          </a:p>
+        </p:txBody>
       </p:sp>
       <p:grpSp>
         <p:nvGrpSpPr>
@@ -1193,7 +1090,7 @@
           <a:p>
             <a:fld id="{28F692FF-03A7-4027-ADFE-44E691358618}" type="datetimeFigureOut">
               <a:rPr lang="fr-FR" smtClean="0"/>
-              <a:t>16/12/2025</a:t>
+              <a:t>17/12/2025</a:t>
             </a:fld>
             <a:endParaRPr lang="fr-FR"/>
           </a:p>
@@ -1267,18 +1164,13 @@
           <a:p>
             <a:fld id="{F13CA12D-4510-440A-A164-A3C2A0711BAD}" type="slidenum">
               <a:rPr lang="fr-FR" smtClean="0"/>
-              <a:t>‹N°›</a:t>
+              <a:t>‹#›</a:t>
             </a:fld>
             <a:endParaRPr lang="fr-FR"/>
           </a:p>
         </p:txBody>
       </p:sp>
     </p:spTree>
-    <p:extLst>
-      <p:ext uri="{BB962C8B-B14F-4D97-AF65-F5344CB8AC3E}">
-        <p14:creationId xmlns:p14="http://schemas.microsoft.com/office/powerpoint/2010/main" val="314138040"/>
-      </p:ext>
-    </p:extLst>
   </p:cSld>
   <p:clrMapOvr>
     <a:overrideClrMapping bg1="lt1" tx1="dk1" bg2="lt2" tx2="dk2" accent1="accent1" accent2="accent2" accent3="accent3" accent4="accent4" accent5="accent5" accent6="accent6" hlink="hlink" folHlink="folHlink"/>
@@ -1395,7 +1287,7 @@
           <a:p>
             <a:fld id="{28F692FF-03A7-4027-ADFE-44E691358618}" type="datetimeFigureOut">
               <a:rPr lang="fr-FR" smtClean="0"/>
-              <a:t>16/12/2025</a:t>
+              <a:t>17/12/2025</a:t>
             </a:fld>
             <a:endParaRPr lang="fr-FR"/>
           </a:p>
@@ -1437,18 +1329,13 @@
           <a:p>
             <a:fld id="{F13CA12D-4510-440A-A164-A3C2A0711BAD}" type="slidenum">
               <a:rPr lang="fr-FR" smtClean="0"/>
-              <a:t>‹N°›</a:t>
+              <a:t>‹#›</a:t>
             </a:fld>
             <a:endParaRPr lang="fr-FR"/>
           </a:p>
         </p:txBody>
       </p:sp>
     </p:spTree>
-    <p:extLst>
-      <p:ext uri="{BB962C8B-B14F-4D97-AF65-F5344CB8AC3E}">
-        <p14:creationId xmlns:p14="http://schemas.microsoft.com/office/powerpoint/2010/main" val="2113018122"/>
-      </p:ext>
-    </p:extLst>
   </p:cSld>
   <p:clrMapOvr>
     <a:masterClrMapping/>
@@ -1575,7 +1462,7 @@
           <a:p>
             <a:fld id="{28F692FF-03A7-4027-ADFE-44E691358618}" type="datetimeFigureOut">
               <a:rPr lang="fr-FR" smtClean="0"/>
-              <a:t>16/12/2025</a:t>
+              <a:t>17/12/2025</a:t>
             </a:fld>
             <a:endParaRPr lang="fr-FR"/>
           </a:p>
@@ -1617,18 +1504,13 @@
           <a:p>
             <a:fld id="{F13CA12D-4510-440A-A164-A3C2A0711BAD}" type="slidenum">
               <a:rPr lang="fr-FR" smtClean="0"/>
-              <a:t>‹N°›</a:t>
+              <a:t>‹#›</a:t>
             </a:fld>
             <a:endParaRPr lang="fr-FR"/>
           </a:p>
         </p:txBody>
       </p:sp>
     </p:spTree>
-    <p:extLst>
-      <p:ext uri="{BB962C8B-B14F-4D97-AF65-F5344CB8AC3E}">
-        <p14:creationId xmlns:p14="http://schemas.microsoft.com/office/powerpoint/2010/main" val="2532265214"/>
-      </p:ext>
-    </p:extLst>
   </p:cSld>
   <p:clrMapOvr>
     <a:masterClrMapping/>
@@ -1655,13 +1537,7 @@
       </p:grpSpPr>
       <p:sp>
         <p:nvSpPr>
-          <p:cNvPr id="2" name="Title 1">
-            <a:extLst>
-              <a:ext uri="{FF2B5EF4-FFF2-40B4-BE49-F238E27FC236}">
-                <a16:creationId xmlns="" xmlns:a16="http://schemas.microsoft.com/office/drawing/2014/main" id="{A31D32E6-157C-23F0-EA5E-B344483391C2}"/>
-              </a:ext>
-            </a:extLst>
-          </p:cNvPr>
+          <p:cNvPr id="2" name="Title 1"/>
           <p:cNvSpPr>
             <a:spLocks noGrp="1"/>
           </p:cNvSpPr>
@@ -1692,13 +1568,7 @@
       </p:sp>
       <p:sp>
         <p:nvSpPr>
-          <p:cNvPr id="3" name="Subtitle 2">
-            <a:extLst>
-              <a:ext uri="{FF2B5EF4-FFF2-40B4-BE49-F238E27FC236}">
-                <a16:creationId xmlns="" xmlns:a16="http://schemas.microsoft.com/office/drawing/2014/main" id="{46760B33-88DE-7CF5-AB74-92417737EA41}"/>
-              </a:ext>
-            </a:extLst>
-          </p:cNvPr>
+          <p:cNvPr id="3" name="Subtitle 2"/>
           <p:cNvSpPr>
             <a:spLocks noGrp="1"/>
           </p:cNvSpPr>
@@ -1762,13 +1632,7 @@
       </p:sp>
       <p:sp>
         <p:nvSpPr>
-          <p:cNvPr id="4" name="Date Placeholder 3">
-            <a:extLst>
-              <a:ext uri="{FF2B5EF4-FFF2-40B4-BE49-F238E27FC236}">
-                <a16:creationId xmlns="" xmlns:a16="http://schemas.microsoft.com/office/drawing/2014/main" id="{B30D6108-FADD-B30D-DCC9-0ECD81371980}"/>
-              </a:ext>
-            </a:extLst>
-          </p:cNvPr>
+          <p:cNvPr id="4" name="Date Placeholder 3"/>
           <p:cNvSpPr>
             <a:spLocks noGrp="1"/>
           </p:cNvSpPr>
@@ -1783,7 +1647,7 @@
           <a:p>
             <a:fld id="{37F56924-F9DA-4FFB-BB0A-49F438EC028A}" type="datetimeFigureOut">
               <a:rPr lang="en-US" smtClean="0"/>
-              <a:t>12/16/2025</a:t>
+              <a:t>12/17/2025</a:t>
             </a:fld>
             <a:endParaRPr lang="en-US"/>
           </a:p>
@@ -1791,13 +1655,7 @@
       </p:sp>
       <p:sp>
         <p:nvSpPr>
-          <p:cNvPr id="5" name="Footer Placeholder 4">
-            <a:extLst>
-              <a:ext uri="{FF2B5EF4-FFF2-40B4-BE49-F238E27FC236}">
-                <a16:creationId xmlns="" xmlns:a16="http://schemas.microsoft.com/office/drawing/2014/main" id="{F23548E3-CEB8-8BDC-B3A7-9DED88E3648D}"/>
-              </a:ext>
-            </a:extLst>
-          </p:cNvPr>
+          <p:cNvPr id="5" name="Footer Placeholder 4"/>
           <p:cNvSpPr>
             <a:spLocks noGrp="1"/>
           </p:cNvSpPr>
@@ -1816,13 +1674,7 @@
       </p:sp>
       <p:sp>
         <p:nvSpPr>
-          <p:cNvPr id="6" name="Slide Number Placeholder 5">
-            <a:extLst>
-              <a:ext uri="{FF2B5EF4-FFF2-40B4-BE49-F238E27FC236}">
-                <a16:creationId xmlns="" xmlns:a16="http://schemas.microsoft.com/office/drawing/2014/main" id="{A1AB8C36-4E76-4855-DF93-9F3FC37F6439}"/>
-              </a:ext>
-            </a:extLst>
-          </p:cNvPr>
+          <p:cNvPr id="6" name="Slide Number Placeholder 5"/>
           <p:cNvSpPr>
             <a:spLocks noGrp="1"/>
           </p:cNvSpPr>
@@ -1837,18 +1689,13 @@
           <a:p>
             <a:fld id="{FFEBDC2A-1B28-4739-94E8-53CDF1A4BB68}" type="slidenum">
               <a:rPr lang="en-US" smtClean="0"/>
-              <a:t>‹N°›</a:t>
+              <a:t>‹#›</a:t>
             </a:fld>
             <a:endParaRPr lang="en-US"/>
           </a:p>
         </p:txBody>
       </p:sp>
     </p:spTree>
-    <p:extLst>
-      <p:ext uri="{BB962C8B-B14F-4D97-AF65-F5344CB8AC3E}">
-        <p14:creationId xmlns:p14="http://schemas.microsoft.com/office/powerpoint/2010/main" val="1041915984"/>
-      </p:ext>
-    </p:extLst>
   </p:cSld>
   <p:clrMapOvr>
     <a:masterClrMapping/>
@@ -1875,13 +1722,7 @@
       </p:grpSpPr>
       <p:sp>
         <p:nvSpPr>
-          <p:cNvPr id="2" name="Title 1">
-            <a:extLst>
-              <a:ext uri="{FF2B5EF4-FFF2-40B4-BE49-F238E27FC236}">
-                <a16:creationId xmlns="" xmlns:a16="http://schemas.microsoft.com/office/drawing/2014/main" id="{2607910F-5F37-4B3B-1C70-232F042A5E44}"/>
-              </a:ext>
-            </a:extLst>
-          </p:cNvPr>
+          <p:cNvPr id="2" name="Title 1"/>
           <p:cNvSpPr>
             <a:spLocks noGrp="1"/>
           </p:cNvSpPr>
@@ -1903,13 +1744,7 @@
       </p:sp>
       <p:sp>
         <p:nvSpPr>
-          <p:cNvPr id="3" name="Content Placeholder 2">
-            <a:extLst>
-              <a:ext uri="{FF2B5EF4-FFF2-40B4-BE49-F238E27FC236}">
-                <a16:creationId xmlns="" xmlns:a16="http://schemas.microsoft.com/office/drawing/2014/main" id="{EF6D3E9B-FFC1-2E05-BE3A-6D66646B3CE1}"/>
-              </a:ext>
-            </a:extLst>
-          </p:cNvPr>
+          <p:cNvPr id="3" name="Content Placeholder 2"/>
           <p:cNvSpPr>
             <a:spLocks noGrp="1"/>
           </p:cNvSpPr>
@@ -1960,13 +1795,7 @@
       </p:sp>
       <p:sp>
         <p:nvSpPr>
-          <p:cNvPr id="4" name="Date Placeholder 3">
-            <a:extLst>
-              <a:ext uri="{FF2B5EF4-FFF2-40B4-BE49-F238E27FC236}">
-                <a16:creationId xmlns="" xmlns:a16="http://schemas.microsoft.com/office/drawing/2014/main" id="{FA355BF7-2878-8235-84FF-CCB2EC17BB18}"/>
-              </a:ext>
-            </a:extLst>
-          </p:cNvPr>
+          <p:cNvPr id="4" name="Date Placeholder 3"/>
           <p:cNvSpPr>
             <a:spLocks noGrp="1"/>
           </p:cNvSpPr>
@@ -1981,7 +1810,7 @@
           <a:p>
             <a:fld id="{37F56924-F9DA-4FFB-BB0A-49F438EC028A}" type="datetimeFigureOut">
               <a:rPr lang="en-US" smtClean="0"/>
-              <a:t>12/16/2025</a:t>
+              <a:t>12/17/2025</a:t>
             </a:fld>
             <a:endParaRPr lang="en-US"/>
           </a:p>
@@ -1989,13 +1818,7 @@
       </p:sp>
       <p:sp>
         <p:nvSpPr>
-          <p:cNvPr id="5" name="Footer Placeholder 4">
-            <a:extLst>
-              <a:ext uri="{FF2B5EF4-FFF2-40B4-BE49-F238E27FC236}">
-                <a16:creationId xmlns="" xmlns:a16="http://schemas.microsoft.com/office/drawing/2014/main" id="{CAB4E131-3760-C961-80D7-D5BF481523A6}"/>
-              </a:ext>
-            </a:extLst>
-          </p:cNvPr>
+          <p:cNvPr id="5" name="Footer Placeholder 4"/>
           <p:cNvSpPr>
             <a:spLocks noGrp="1"/>
           </p:cNvSpPr>
@@ -2014,13 +1837,7 @@
       </p:sp>
       <p:sp>
         <p:nvSpPr>
-          <p:cNvPr id="6" name="Slide Number Placeholder 5">
-            <a:extLst>
-              <a:ext uri="{FF2B5EF4-FFF2-40B4-BE49-F238E27FC236}">
-                <a16:creationId xmlns="" xmlns:a16="http://schemas.microsoft.com/office/drawing/2014/main" id="{9D524B3E-1B44-EBA6-4FAA-7184CE126341}"/>
-              </a:ext>
-            </a:extLst>
-          </p:cNvPr>
+          <p:cNvPr id="6" name="Slide Number Placeholder 5"/>
           <p:cNvSpPr>
             <a:spLocks noGrp="1"/>
           </p:cNvSpPr>
@@ -2035,18 +1852,13 @@
           <a:p>
             <a:fld id="{FFEBDC2A-1B28-4739-94E8-53CDF1A4BB68}" type="slidenum">
               <a:rPr lang="en-US" smtClean="0"/>
-              <a:t>‹N°›</a:t>
+              <a:t>‹#›</a:t>
             </a:fld>
             <a:endParaRPr lang="en-US"/>
           </a:p>
         </p:txBody>
       </p:sp>
     </p:spTree>
-    <p:extLst>
-      <p:ext uri="{BB962C8B-B14F-4D97-AF65-F5344CB8AC3E}">
-        <p14:creationId xmlns:p14="http://schemas.microsoft.com/office/powerpoint/2010/main" val="3176217637"/>
-      </p:ext>
-    </p:extLst>
   </p:cSld>
   <p:clrMapOvr>
     <a:masterClrMapping/>
@@ -2073,13 +1885,7 @@
       </p:grpSpPr>
       <p:sp>
         <p:nvSpPr>
-          <p:cNvPr id="2" name="Title 1">
-            <a:extLst>
-              <a:ext uri="{FF2B5EF4-FFF2-40B4-BE49-F238E27FC236}">
-                <a16:creationId xmlns="" xmlns:a16="http://schemas.microsoft.com/office/drawing/2014/main" id="{39977A56-E770-16C3-1013-AED9B4F16908}"/>
-              </a:ext>
-            </a:extLst>
-          </p:cNvPr>
+          <p:cNvPr id="2" name="Title 1"/>
           <p:cNvSpPr>
             <a:spLocks noGrp="1"/>
           </p:cNvSpPr>
@@ -2110,13 +1916,7 @@
       </p:sp>
       <p:sp>
         <p:nvSpPr>
-          <p:cNvPr id="3" name="Text Placeholder 2">
-            <a:extLst>
-              <a:ext uri="{FF2B5EF4-FFF2-40B4-BE49-F238E27FC236}">
-                <a16:creationId xmlns="" xmlns:a16="http://schemas.microsoft.com/office/drawing/2014/main" id="{B6A3123D-A054-23C9-47D6-51E627DE1D00}"/>
-              </a:ext>
-            </a:extLst>
-          </p:cNvPr>
+          <p:cNvPr id="3" name="Text Placeholder 2"/>
           <p:cNvSpPr>
             <a:spLocks noGrp="1"/>
           </p:cNvSpPr>
@@ -2235,13 +2035,7 @@
       </p:sp>
       <p:sp>
         <p:nvSpPr>
-          <p:cNvPr id="4" name="Date Placeholder 3">
-            <a:extLst>
-              <a:ext uri="{FF2B5EF4-FFF2-40B4-BE49-F238E27FC236}">
-                <a16:creationId xmlns="" xmlns:a16="http://schemas.microsoft.com/office/drawing/2014/main" id="{EC2A76FD-6F52-5A61-1DA3-DD11234190CF}"/>
-              </a:ext>
-            </a:extLst>
-          </p:cNvPr>
+          <p:cNvPr id="4" name="Date Placeholder 3"/>
           <p:cNvSpPr>
             <a:spLocks noGrp="1"/>
           </p:cNvSpPr>
@@ -2256,7 +2050,7 @@
           <a:p>
             <a:fld id="{37F56924-F9DA-4FFB-BB0A-49F438EC028A}" type="datetimeFigureOut">
               <a:rPr lang="en-US" smtClean="0"/>
-              <a:t>12/16/2025</a:t>
+              <a:t>12/17/2025</a:t>
             </a:fld>
             <a:endParaRPr lang="en-US"/>
           </a:p>
@@ -2264,13 +2058,7 @@
       </p:sp>
       <p:sp>
         <p:nvSpPr>
-          <p:cNvPr id="5" name="Footer Placeholder 4">
-            <a:extLst>
-              <a:ext uri="{FF2B5EF4-FFF2-40B4-BE49-F238E27FC236}">
-                <a16:creationId xmlns="" xmlns:a16="http://schemas.microsoft.com/office/drawing/2014/main" id="{2D99CB9E-8549-1952-1029-7B6B8388C279}"/>
-              </a:ext>
-            </a:extLst>
-          </p:cNvPr>
+          <p:cNvPr id="5" name="Footer Placeholder 4"/>
           <p:cNvSpPr>
             <a:spLocks noGrp="1"/>
           </p:cNvSpPr>
@@ -2289,13 +2077,7 @@
       </p:sp>
       <p:sp>
         <p:nvSpPr>
-          <p:cNvPr id="6" name="Slide Number Placeholder 5">
-            <a:extLst>
-              <a:ext uri="{FF2B5EF4-FFF2-40B4-BE49-F238E27FC236}">
-                <a16:creationId xmlns="" xmlns:a16="http://schemas.microsoft.com/office/drawing/2014/main" id="{964AB1D7-419D-1CB0-AC1D-6034426AECE9}"/>
-              </a:ext>
-            </a:extLst>
-          </p:cNvPr>
+          <p:cNvPr id="6" name="Slide Number Placeholder 5"/>
           <p:cNvSpPr>
             <a:spLocks noGrp="1"/>
           </p:cNvSpPr>
@@ -2310,18 +2092,13 @@
           <a:p>
             <a:fld id="{FFEBDC2A-1B28-4739-94E8-53CDF1A4BB68}" type="slidenum">
               <a:rPr lang="en-US" smtClean="0"/>
-              <a:t>‹N°›</a:t>
+              <a:t>‹#›</a:t>
             </a:fld>
             <a:endParaRPr lang="en-US"/>
           </a:p>
         </p:txBody>
       </p:sp>
     </p:spTree>
-    <p:extLst>
-      <p:ext uri="{BB962C8B-B14F-4D97-AF65-F5344CB8AC3E}">
-        <p14:creationId xmlns:p14="http://schemas.microsoft.com/office/powerpoint/2010/main" val="377194844"/>
-      </p:ext>
-    </p:extLst>
   </p:cSld>
   <p:clrMapOvr>
     <a:masterClrMapping/>
@@ -2348,13 +2125,7 @@
       </p:grpSpPr>
       <p:sp>
         <p:nvSpPr>
-          <p:cNvPr id="2" name="Title 1">
-            <a:extLst>
-              <a:ext uri="{FF2B5EF4-FFF2-40B4-BE49-F238E27FC236}">
-                <a16:creationId xmlns="" xmlns:a16="http://schemas.microsoft.com/office/drawing/2014/main" id="{D61AB598-F240-2C0A-4783-510ECFD6DD86}"/>
-              </a:ext>
-            </a:extLst>
-          </p:cNvPr>
+          <p:cNvPr id="2" name="Title 1"/>
           <p:cNvSpPr>
             <a:spLocks noGrp="1"/>
           </p:cNvSpPr>
@@ -2376,13 +2147,7 @@
       </p:sp>
       <p:sp>
         <p:nvSpPr>
-          <p:cNvPr id="3" name="Content Placeholder 2">
-            <a:extLst>
-              <a:ext uri="{FF2B5EF4-FFF2-40B4-BE49-F238E27FC236}">
-                <a16:creationId xmlns="" xmlns:a16="http://schemas.microsoft.com/office/drawing/2014/main" id="{1C47E4A2-7B9B-6C47-695A-8240A3315883}"/>
-              </a:ext>
-            </a:extLst>
-          </p:cNvPr>
+          <p:cNvPr id="3" name="Content Placeholder 2"/>
           <p:cNvSpPr>
             <a:spLocks noGrp="1"/>
           </p:cNvSpPr>
@@ -2438,13 +2203,7 @@
       </p:sp>
       <p:sp>
         <p:nvSpPr>
-          <p:cNvPr id="4" name="Content Placeholder 3">
-            <a:extLst>
-              <a:ext uri="{FF2B5EF4-FFF2-40B4-BE49-F238E27FC236}">
-                <a16:creationId xmlns="" xmlns:a16="http://schemas.microsoft.com/office/drawing/2014/main" id="{F35798F2-43E5-0ADF-5BA5-0A7DB89A6B0B}"/>
-              </a:ext>
-            </a:extLst>
-          </p:cNvPr>
+          <p:cNvPr id="4" name="Content Placeholder 3"/>
           <p:cNvSpPr>
             <a:spLocks noGrp="1"/>
           </p:cNvSpPr>
@@ -2500,13 +2259,7 @@
       </p:sp>
       <p:sp>
         <p:nvSpPr>
-          <p:cNvPr id="5" name="Date Placeholder 4">
-            <a:extLst>
-              <a:ext uri="{FF2B5EF4-FFF2-40B4-BE49-F238E27FC236}">
-                <a16:creationId xmlns="" xmlns:a16="http://schemas.microsoft.com/office/drawing/2014/main" id="{15ED5E06-138E-0049-6256-671ECCB592EA}"/>
-              </a:ext>
-            </a:extLst>
-          </p:cNvPr>
+          <p:cNvPr id="5" name="Date Placeholder 4"/>
           <p:cNvSpPr>
             <a:spLocks noGrp="1"/>
           </p:cNvSpPr>
@@ -2521,7 +2274,7 @@
           <a:p>
             <a:fld id="{37F56924-F9DA-4FFB-BB0A-49F438EC028A}" type="datetimeFigureOut">
               <a:rPr lang="en-US" smtClean="0"/>
-              <a:t>12/16/2025</a:t>
+              <a:t>12/17/2025</a:t>
             </a:fld>
             <a:endParaRPr lang="en-US"/>
           </a:p>
@@ -2529,13 +2282,7 @@
       </p:sp>
       <p:sp>
         <p:nvSpPr>
-          <p:cNvPr id="6" name="Footer Placeholder 5">
-            <a:extLst>
-              <a:ext uri="{FF2B5EF4-FFF2-40B4-BE49-F238E27FC236}">
-                <a16:creationId xmlns="" xmlns:a16="http://schemas.microsoft.com/office/drawing/2014/main" id="{5721B34B-D49F-FA0F-5D00-3C96560FA124}"/>
-              </a:ext>
-            </a:extLst>
-          </p:cNvPr>
+          <p:cNvPr id="6" name="Footer Placeholder 5"/>
           <p:cNvSpPr>
             <a:spLocks noGrp="1"/>
           </p:cNvSpPr>
@@ -2554,13 +2301,7 @@
       </p:sp>
       <p:sp>
         <p:nvSpPr>
-          <p:cNvPr id="7" name="Slide Number Placeholder 6">
-            <a:extLst>
-              <a:ext uri="{FF2B5EF4-FFF2-40B4-BE49-F238E27FC236}">
-                <a16:creationId xmlns="" xmlns:a16="http://schemas.microsoft.com/office/drawing/2014/main" id="{8AEEFE7E-852F-7621-5304-789A756D3CCC}"/>
-              </a:ext>
-            </a:extLst>
-          </p:cNvPr>
+          <p:cNvPr id="7" name="Slide Number Placeholder 6"/>
           <p:cNvSpPr>
             <a:spLocks noGrp="1"/>
           </p:cNvSpPr>
@@ -2575,18 +2316,13 @@
           <a:p>
             <a:fld id="{FFEBDC2A-1B28-4739-94E8-53CDF1A4BB68}" type="slidenum">
               <a:rPr lang="en-US" smtClean="0"/>
-              <a:t>‹N°›</a:t>
+              <a:t>‹#›</a:t>
             </a:fld>
             <a:endParaRPr lang="en-US"/>
           </a:p>
         </p:txBody>
       </p:sp>
     </p:spTree>
-    <p:extLst>
-      <p:ext uri="{BB962C8B-B14F-4D97-AF65-F5344CB8AC3E}">
-        <p14:creationId xmlns:p14="http://schemas.microsoft.com/office/powerpoint/2010/main" val="1689235125"/>
-      </p:ext>
-    </p:extLst>
   </p:cSld>
   <p:clrMapOvr>
     <a:masterClrMapping/>
@@ -2613,13 +2349,7 @@
       </p:grpSpPr>
       <p:sp>
         <p:nvSpPr>
-          <p:cNvPr id="2" name="Title 1">
-            <a:extLst>
-              <a:ext uri="{FF2B5EF4-FFF2-40B4-BE49-F238E27FC236}">
-                <a16:creationId xmlns="" xmlns:a16="http://schemas.microsoft.com/office/drawing/2014/main" id="{8B9CFBCA-D583-634B-9B65-20924E3804C4}"/>
-              </a:ext>
-            </a:extLst>
-          </p:cNvPr>
+          <p:cNvPr id="2" name="Title 1"/>
           <p:cNvSpPr>
             <a:spLocks noGrp="1"/>
           </p:cNvSpPr>
@@ -2646,13 +2376,7 @@
       </p:sp>
       <p:sp>
         <p:nvSpPr>
-          <p:cNvPr id="3" name="Text Placeholder 2">
-            <a:extLst>
-              <a:ext uri="{FF2B5EF4-FFF2-40B4-BE49-F238E27FC236}">
-                <a16:creationId xmlns="" xmlns:a16="http://schemas.microsoft.com/office/drawing/2014/main" id="{22A9A6EF-1E4C-83CE-0A7C-1ACF4CC1B6C3}"/>
-              </a:ext>
-            </a:extLst>
-          </p:cNvPr>
+          <p:cNvPr id="3" name="Text Placeholder 2"/>
           <p:cNvSpPr>
             <a:spLocks noGrp="1"/>
           </p:cNvSpPr>
@@ -2717,13 +2441,7 @@
       </p:sp>
       <p:sp>
         <p:nvSpPr>
-          <p:cNvPr id="4" name="Content Placeholder 3">
-            <a:extLst>
-              <a:ext uri="{FF2B5EF4-FFF2-40B4-BE49-F238E27FC236}">
-                <a16:creationId xmlns="" xmlns:a16="http://schemas.microsoft.com/office/drawing/2014/main" id="{C141A090-0A28-95E6-D903-B5DAA5C78F76}"/>
-              </a:ext>
-            </a:extLst>
-          </p:cNvPr>
+          <p:cNvPr id="4" name="Content Placeholder 3"/>
           <p:cNvSpPr>
             <a:spLocks noGrp="1"/>
           </p:cNvSpPr>
@@ -2779,13 +2497,7 @@
       </p:sp>
       <p:sp>
         <p:nvSpPr>
-          <p:cNvPr id="5" name="Text Placeholder 4">
-            <a:extLst>
-              <a:ext uri="{FF2B5EF4-FFF2-40B4-BE49-F238E27FC236}">
-                <a16:creationId xmlns="" xmlns:a16="http://schemas.microsoft.com/office/drawing/2014/main" id="{117E50F7-AA12-55B8-4DA9-C154C62F0CBE}"/>
-              </a:ext>
-            </a:extLst>
-          </p:cNvPr>
+          <p:cNvPr id="5" name="Text Placeholder 4"/>
           <p:cNvSpPr>
             <a:spLocks noGrp="1"/>
           </p:cNvSpPr>
@@ -2850,13 +2562,7 @@
       </p:sp>
       <p:sp>
         <p:nvSpPr>
-          <p:cNvPr id="6" name="Content Placeholder 5">
-            <a:extLst>
-              <a:ext uri="{FF2B5EF4-FFF2-40B4-BE49-F238E27FC236}">
-                <a16:creationId xmlns="" xmlns:a16="http://schemas.microsoft.com/office/drawing/2014/main" id="{9684BB27-E1F7-A26D-B0DE-D9F8F9EF03A6}"/>
-              </a:ext>
-            </a:extLst>
-          </p:cNvPr>
+          <p:cNvPr id="6" name="Content Placeholder 5"/>
           <p:cNvSpPr>
             <a:spLocks noGrp="1"/>
           </p:cNvSpPr>
@@ -2912,13 +2618,7 @@
       </p:sp>
       <p:sp>
         <p:nvSpPr>
-          <p:cNvPr id="7" name="Date Placeholder 6">
-            <a:extLst>
-              <a:ext uri="{FF2B5EF4-FFF2-40B4-BE49-F238E27FC236}">
-                <a16:creationId xmlns="" xmlns:a16="http://schemas.microsoft.com/office/drawing/2014/main" id="{22D53845-BB2B-1AD6-5CEB-DC4D97AD28A1}"/>
-              </a:ext>
-            </a:extLst>
-          </p:cNvPr>
+          <p:cNvPr id="7" name="Date Placeholder 6"/>
           <p:cNvSpPr>
             <a:spLocks noGrp="1"/>
           </p:cNvSpPr>
@@ -2933,7 +2633,7 @@
           <a:p>
             <a:fld id="{37F56924-F9DA-4FFB-BB0A-49F438EC028A}" type="datetimeFigureOut">
               <a:rPr lang="en-US" smtClean="0"/>
-              <a:t>12/16/2025</a:t>
+              <a:t>12/17/2025</a:t>
             </a:fld>
             <a:endParaRPr lang="en-US"/>
           </a:p>
@@ -2941,13 +2641,7 @@
       </p:sp>
       <p:sp>
         <p:nvSpPr>
-          <p:cNvPr id="8" name="Footer Placeholder 7">
-            <a:extLst>
-              <a:ext uri="{FF2B5EF4-FFF2-40B4-BE49-F238E27FC236}">
-                <a16:creationId xmlns="" xmlns:a16="http://schemas.microsoft.com/office/drawing/2014/main" id="{D0686CD3-45B3-25F3-DA10-0EC782A42F8C}"/>
-              </a:ext>
-            </a:extLst>
-          </p:cNvPr>
+          <p:cNvPr id="8" name="Footer Placeholder 7"/>
           <p:cNvSpPr>
             <a:spLocks noGrp="1"/>
           </p:cNvSpPr>
@@ -2966,13 +2660,7 @@
       </p:sp>
       <p:sp>
         <p:nvSpPr>
-          <p:cNvPr id="9" name="Slide Number Placeholder 8">
-            <a:extLst>
-              <a:ext uri="{FF2B5EF4-FFF2-40B4-BE49-F238E27FC236}">
-                <a16:creationId xmlns="" xmlns:a16="http://schemas.microsoft.com/office/drawing/2014/main" id="{169F86AF-38DD-D1E1-72B0-10C22C0B3A74}"/>
-              </a:ext>
-            </a:extLst>
-          </p:cNvPr>
+          <p:cNvPr id="9" name="Slide Number Placeholder 8"/>
           <p:cNvSpPr>
             <a:spLocks noGrp="1"/>
           </p:cNvSpPr>
@@ -2987,18 +2675,13 @@
           <a:p>
             <a:fld id="{FFEBDC2A-1B28-4739-94E8-53CDF1A4BB68}" type="slidenum">
               <a:rPr lang="en-US" smtClean="0"/>
-              <a:t>‹N°›</a:t>
+              <a:t>‹#›</a:t>
             </a:fld>
             <a:endParaRPr lang="en-US"/>
           </a:p>
         </p:txBody>
       </p:sp>
     </p:spTree>
-    <p:extLst>
-      <p:ext uri="{BB962C8B-B14F-4D97-AF65-F5344CB8AC3E}">
-        <p14:creationId xmlns:p14="http://schemas.microsoft.com/office/powerpoint/2010/main" val="2296111489"/>
-      </p:ext>
-    </p:extLst>
   </p:cSld>
   <p:clrMapOvr>
     <a:masterClrMapping/>
@@ -3025,13 +2708,7 @@
       </p:grpSpPr>
       <p:sp>
         <p:nvSpPr>
-          <p:cNvPr id="2" name="Title 1">
-            <a:extLst>
-              <a:ext uri="{FF2B5EF4-FFF2-40B4-BE49-F238E27FC236}">
-                <a16:creationId xmlns="" xmlns:a16="http://schemas.microsoft.com/office/drawing/2014/main" id="{8CD09D1B-65D8-265B-49FA-66243A97FE5F}"/>
-              </a:ext>
-            </a:extLst>
-          </p:cNvPr>
+          <p:cNvPr id="2" name="Title 1"/>
           <p:cNvSpPr>
             <a:spLocks noGrp="1"/>
           </p:cNvSpPr>
@@ -3053,13 +2730,7 @@
       </p:sp>
       <p:sp>
         <p:nvSpPr>
-          <p:cNvPr id="3" name="Date Placeholder 2">
-            <a:extLst>
-              <a:ext uri="{FF2B5EF4-FFF2-40B4-BE49-F238E27FC236}">
-                <a16:creationId xmlns="" xmlns:a16="http://schemas.microsoft.com/office/drawing/2014/main" id="{B66D099D-5F84-E78D-1C9C-EEED423C1075}"/>
-              </a:ext>
-            </a:extLst>
-          </p:cNvPr>
+          <p:cNvPr id="3" name="Date Placeholder 2"/>
           <p:cNvSpPr>
             <a:spLocks noGrp="1"/>
           </p:cNvSpPr>
@@ -3074,7 +2745,7 @@
           <a:p>
             <a:fld id="{37F56924-F9DA-4FFB-BB0A-49F438EC028A}" type="datetimeFigureOut">
               <a:rPr lang="en-US" smtClean="0"/>
-              <a:t>12/16/2025</a:t>
+              <a:t>12/17/2025</a:t>
             </a:fld>
             <a:endParaRPr lang="en-US"/>
           </a:p>
@@ -3082,13 +2753,7 @@
       </p:sp>
       <p:sp>
         <p:nvSpPr>
-          <p:cNvPr id="4" name="Footer Placeholder 3">
-            <a:extLst>
-              <a:ext uri="{FF2B5EF4-FFF2-40B4-BE49-F238E27FC236}">
-                <a16:creationId xmlns="" xmlns:a16="http://schemas.microsoft.com/office/drawing/2014/main" id="{6307DB71-62A0-65E8-2CA1-887C04C962A8}"/>
-              </a:ext>
-            </a:extLst>
-          </p:cNvPr>
+          <p:cNvPr id="4" name="Footer Placeholder 3"/>
           <p:cNvSpPr>
             <a:spLocks noGrp="1"/>
           </p:cNvSpPr>
@@ -3107,13 +2772,7 @@
       </p:sp>
       <p:sp>
         <p:nvSpPr>
-          <p:cNvPr id="5" name="Slide Number Placeholder 4">
-            <a:extLst>
-              <a:ext uri="{FF2B5EF4-FFF2-40B4-BE49-F238E27FC236}">
-                <a16:creationId xmlns="" xmlns:a16="http://schemas.microsoft.com/office/drawing/2014/main" id="{0050A542-EAD9-33E5-5D20-4207CC0EFE88}"/>
-              </a:ext>
-            </a:extLst>
-          </p:cNvPr>
+          <p:cNvPr id="5" name="Slide Number Placeholder 4"/>
           <p:cNvSpPr>
             <a:spLocks noGrp="1"/>
           </p:cNvSpPr>
@@ -3128,18 +2787,13 @@
           <a:p>
             <a:fld id="{FFEBDC2A-1B28-4739-94E8-53CDF1A4BB68}" type="slidenum">
               <a:rPr lang="en-US" smtClean="0"/>
-              <a:t>‹N°›</a:t>
+              <a:t>‹#›</a:t>
             </a:fld>
             <a:endParaRPr lang="en-US"/>
           </a:p>
         </p:txBody>
       </p:sp>
     </p:spTree>
-    <p:extLst>
-      <p:ext uri="{BB962C8B-B14F-4D97-AF65-F5344CB8AC3E}">
-        <p14:creationId xmlns:p14="http://schemas.microsoft.com/office/powerpoint/2010/main" val="95609083"/>
-      </p:ext>
-    </p:extLst>
   </p:cSld>
   <p:clrMapOvr>
     <a:masterClrMapping/>
@@ -3166,13 +2820,7 @@
       </p:grpSpPr>
       <p:sp>
         <p:nvSpPr>
-          <p:cNvPr id="2" name="Date Placeholder 1">
-            <a:extLst>
-              <a:ext uri="{FF2B5EF4-FFF2-40B4-BE49-F238E27FC236}">
-                <a16:creationId xmlns="" xmlns:a16="http://schemas.microsoft.com/office/drawing/2014/main" id="{F5FDEA37-7B90-56F5-F785-685B53C84AAA}"/>
-              </a:ext>
-            </a:extLst>
-          </p:cNvPr>
+          <p:cNvPr id="2" name="Date Placeholder 1"/>
           <p:cNvSpPr>
             <a:spLocks noGrp="1"/>
           </p:cNvSpPr>
@@ -3187,7 +2835,7 @@
           <a:p>
             <a:fld id="{37F56924-F9DA-4FFB-BB0A-49F438EC028A}" type="datetimeFigureOut">
               <a:rPr lang="en-US" smtClean="0"/>
-              <a:t>12/16/2025</a:t>
+              <a:t>12/17/2025</a:t>
             </a:fld>
             <a:endParaRPr lang="en-US"/>
           </a:p>
@@ -3195,13 +2843,7 @@
       </p:sp>
       <p:sp>
         <p:nvSpPr>
-          <p:cNvPr id="3" name="Footer Placeholder 2">
-            <a:extLst>
-              <a:ext uri="{FF2B5EF4-FFF2-40B4-BE49-F238E27FC236}">
-                <a16:creationId xmlns="" xmlns:a16="http://schemas.microsoft.com/office/drawing/2014/main" id="{2ACC1AB4-1DC5-21C0-61E6-E284B4234A40}"/>
-              </a:ext>
-            </a:extLst>
-          </p:cNvPr>
+          <p:cNvPr id="3" name="Footer Placeholder 2"/>
           <p:cNvSpPr>
             <a:spLocks noGrp="1"/>
           </p:cNvSpPr>
@@ -3220,13 +2862,7 @@
       </p:sp>
       <p:sp>
         <p:nvSpPr>
-          <p:cNvPr id="4" name="Slide Number Placeholder 3">
-            <a:extLst>
-              <a:ext uri="{FF2B5EF4-FFF2-40B4-BE49-F238E27FC236}">
-                <a16:creationId xmlns="" xmlns:a16="http://schemas.microsoft.com/office/drawing/2014/main" id="{2B81DFEA-6A56-E417-DE72-77D805CEF14E}"/>
-              </a:ext>
-            </a:extLst>
-          </p:cNvPr>
+          <p:cNvPr id="4" name="Slide Number Placeholder 3"/>
           <p:cNvSpPr>
             <a:spLocks noGrp="1"/>
           </p:cNvSpPr>
@@ -3241,18 +2877,13 @@
           <a:p>
             <a:fld id="{FFEBDC2A-1B28-4739-94E8-53CDF1A4BB68}" type="slidenum">
               <a:rPr lang="en-US" smtClean="0"/>
-              <a:t>‹N°›</a:t>
+              <a:t>‹#›</a:t>
             </a:fld>
             <a:endParaRPr lang="en-US"/>
           </a:p>
         </p:txBody>
       </p:sp>
     </p:spTree>
-    <p:extLst>
-      <p:ext uri="{BB962C8B-B14F-4D97-AF65-F5344CB8AC3E}">
-        <p14:creationId xmlns:p14="http://schemas.microsoft.com/office/powerpoint/2010/main" val="2374312393"/>
-      </p:ext>
-    </p:extLst>
   </p:cSld>
   <p:clrMapOvr>
     <a:masterClrMapping/>
@@ -3279,13 +2910,7 @@
       </p:grpSpPr>
       <p:sp>
         <p:nvSpPr>
-          <p:cNvPr id="2" name="Title 1">
-            <a:extLst>
-              <a:ext uri="{FF2B5EF4-FFF2-40B4-BE49-F238E27FC236}">
-                <a16:creationId xmlns="" xmlns:a16="http://schemas.microsoft.com/office/drawing/2014/main" id="{FBE2802E-F0EF-C2B5-9569-46C603C8B229}"/>
-              </a:ext>
-            </a:extLst>
-          </p:cNvPr>
+          <p:cNvPr id="2" name="Title 1"/>
           <p:cNvSpPr>
             <a:spLocks noGrp="1"/>
           </p:cNvSpPr>
@@ -3316,13 +2941,7 @@
       </p:sp>
       <p:sp>
         <p:nvSpPr>
-          <p:cNvPr id="3" name="Content Placeholder 2">
-            <a:extLst>
-              <a:ext uri="{FF2B5EF4-FFF2-40B4-BE49-F238E27FC236}">
-                <a16:creationId xmlns="" xmlns:a16="http://schemas.microsoft.com/office/drawing/2014/main" id="{462E938C-91CC-0C33-5571-5A48E8EC7679}"/>
-              </a:ext>
-            </a:extLst>
-          </p:cNvPr>
+          <p:cNvPr id="3" name="Content Placeholder 2"/>
           <p:cNvSpPr>
             <a:spLocks noGrp="1"/>
           </p:cNvSpPr>
@@ -3406,13 +3025,7 @@
       </p:sp>
       <p:sp>
         <p:nvSpPr>
-          <p:cNvPr id="4" name="Text Placeholder 3">
-            <a:extLst>
-              <a:ext uri="{FF2B5EF4-FFF2-40B4-BE49-F238E27FC236}">
-                <a16:creationId xmlns="" xmlns:a16="http://schemas.microsoft.com/office/drawing/2014/main" id="{437D8E66-7832-1441-C05E-F9B79384768F}"/>
-              </a:ext>
-            </a:extLst>
-          </p:cNvPr>
+          <p:cNvPr id="4" name="Text Placeholder 3"/>
           <p:cNvSpPr>
             <a:spLocks noGrp="1"/>
           </p:cNvSpPr>
@@ -3477,13 +3090,7 @@
       </p:sp>
       <p:sp>
         <p:nvSpPr>
-          <p:cNvPr id="5" name="Date Placeholder 4">
-            <a:extLst>
-              <a:ext uri="{FF2B5EF4-FFF2-40B4-BE49-F238E27FC236}">
-                <a16:creationId xmlns="" xmlns:a16="http://schemas.microsoft.com/office/drawing/2014/main" id="{40968700-31EC-3F99-4DF4-FEEB31DACB3F}"/>
-              </a:ext>
-            </a:extLst>
-          </p:cNvPr>
+          <p:cNvPr id="5" name="Date Placeholder 4"/>
           <p:cNvSpPr>
             <a:spLocks noGrp="1"/>
           </p:cNvSpPr>
@@ -3498,7 +3105,7 @@
           <a:p>
             <a:fld id="{37F56924-F9DA-4FFB-BB0A-49F438EC028A}" type="datetimeFigureOut">
               <a:rPr lang="en-US" smtClean="0"/>
-              <a:t>12/16/2025</a:t>
+              <a:t>12/17/2025</a:t>
             </a:fld>
             <a:endParaRPr lang="en-US"/>
           </a:p>
@@ -3506,13 +3113,7 @@
       </p:sp>
       <p:sp>
         <p:nvSpPr>
-          <p:cNvPr id="6" name="Footer Placeholder 5">
-            <a:extLst>
-              <a:ext uri="{FF2B5EF4-FFF2-40B4-BE49-F238E27FC236}">
-                <a16:creationId xmlns="" xmlns:a16="http://schemas.microsoft.com/office/drawing/2014/main" id="{A3F06C71-C579-5383-8843-12A104BA1461}"/>
-              </a:ext>
-            </a:extLst>
-          </p:cNvPr>
+          <p:cNvPr id="6" name="Footer Placeholder 5"/>
           <p:cNvSpPr>
             <a:spLocks noGrp="1"/>
           </p:cNvSpPr>
@@ -3531,13 +3132,7 @@
       </p:sp>
       <p:sp>
         <p:nvSpPr>
-          <p:cNvPr id="7" name="Slide Number Placeholder 6">
-            <a:extLst>
-              <a:ext uri="{FF2B5EF4-FFF2-40B4-BE49-F238E27FC236}">
-                <a16:creationId xmlns="" xmlns:a16="http://schemas.microsoft.com/office/drawing/2014/main" id="{73A0D16E-D6FF-65C9-75A7-DF735E1564B2}"/>
-              </a:ext>
-            </a:extLst>
-          </p:cNvPr>
+          <p:cNvPr id="7" name="Slide Number Placeholder 6"/>
           <p:cNvSpPr>
             <a:spLocks noGrp="1"/>
           </p:cNvSpPr>
@@ -3552,18 +3147,13 @@
           <a:p>
             <a:fld id="{FFEBDC2A-1B28-4739-94E8-53CDF1A4BB68}" type="slidenum">
               <a:rPr lang="en-US" smtClean="0"/>
-              <a:t>‹N°›</a:t>
+              <a:t>‹#›</a:t>
             </a:fld>
             <a:endParaRPr lang="en-US"/>
           </a:p>
         </p:txBody>
       </p:sp>
     </p:spTree>
-    <p:extLst>
-      <p:ext uri="{BB962C8B-B14F-4D97-AF65-F5344CB8AC3E}">
-        <p14:creationId xmlns:p14="http://schemas.microsoft.com/office/powerpoint/2010/main" val="1297037288"/>
-      </p:ext>
-    </p:extLst>
   </p:cSld>
   <p:clrMapOvr>
     <a:masterClrMapping/>
@@ -3680,7 +3270,7 @@
           <a:p>
             <a:fld id="{28F692FF-03A7-4027-ADFE-44E691358618}" type="datetimeFigureOut">
               <a:rPr lang="fr-FR" smtClean="0"/>
-              <a:t>16/12/2025</a:t>
+              <a:t>17/12/2025</a:t>
             </a:fld>
             <a:endParaRPr lang="fr-FR"/>
           </a:p>
@@ -3722,18 +3312,13 @@
           <a:p>
             <a:fld id="{F13CA12D-4510-440A-A164-A3C2A0711BAD}" type="slidenum">
               <a:rPr lang="fr-FR" smtClean="0"/>
-              <a:t>‹N°›</a:t>
+              <a:t>‹#›</a:t>
             </a:fld>
             <a:endParaRPr lang="fr-FR"/>
           </a:p>
         </p:txBody>
       </p:sp>
     </p:spTree>
-    <p:extLst>
-      <p:ext uri="{BB962C8B-B14F-4D97-AF65-F5344CB8AC3E}">
-        <p14:creationId xmlns:p14="http://schemas.microsoft.com/office/powerpoint/2010/main" val="1898859649"/>
-      </p:ext>
-    </p:extLst>
   </p:cSld>
   <p:clrMapOvr>
     <a:masterClrMapping/>
@@ -3760,13 +3345,7 @@
       </p:grpSpPr>
       <p:sp>
         <p:nvSpPr>
-          <p:cNvPr id="2" name="Title 1">
-            <a:extLst>
-              <a:ext uri="{FF2B5EF4-FFF2-40B4-BE49-F238E27FC236}">
-                <a16:creationId xmlns="" xmlns:a16="http://schemas.microsoft.com/office/drawing/2014/main" id="{486E28E7-D8D0-0BE1-7408-64DDBE62A690}"/>
-              </a:ext>
-            </a:extLst>
-          </p:cNvPr>
+          <p:cNvPr id="2" name="Title 1"/>
           <p:cNvSpPr>
             <a:spLocks noGrp="1"/>
           </p:cNvSpPr>
@@ -3797,13 +3376,7 @@
       </p:sp>
       <p:sp>
         <p:nvSpPr>
-          <p:cNvPr id="3" name="Picture Placeholder 2">
-            <a:extLst>
-              <a:ext uri="{FF2B5EF4-FFF2-40B4-BE49-F238E27FC236}">
-                <a16:creationId xmlns="" xmlns:a16="http://schemas.microsoft.com/office/drawing/2014/main" id="{3137F361-8A13-ED78-830F-F219F4153CBB}"/>
-              </a:ext>
-            </a:extLst>
-          </p:cNvPr>
+          <p:cNvPr id="3" name="Picture Placeholder 2"/>
           <p:cNvSpPr>
             <a:spLocks noGrp="1"/>
           </p:cNvSpPr>
@@ -3864,13 +3437,7 @@
       </p:sp>
       <p:sp>
         <p:nvSpPr>
-          <p:cNvPr id="4" name="Text Placeholder 3">
-            <a:extLst>
-              <a:ext uri="{FF2B5EF4-FFF2-40B4-BE49-F238E27FC236}">
-                <a16:creationId xmlns="" xmlns:a16="http://schemas.microsoft.com/office/drawing/2014/main" id="{D09E3F04-4AEE-C654-5194-D12123CF154A}"/>
-              </a:ext>
-            </a:extLst>
-          </p:cNvPr>
+          <p:cNvPr id="4" name="Text Placeholder 3"/>
           <p:cNvSpPr>
             <a:spLocks noGrp="1"/>
           </p:cNvSpPr>
@@ -3935,13 +3502,7 @@
       </p:sp>
       <p:sp>
         <p:nvSpPr>
-          <p:cNvPr id="5" name="Date Placeholder 4">
-            <a:extLst>
-              <a:ext uri="{FF2B5EF4-FFF2-40B4-BE49-F238E27FC236}">
-                <a16:creationId xmlns="" xmlns:a16="http://schemas.microsoft.com/office/drawing/2014/main" id="{CE7C51F0-C5FE-37D6-7A98-EEA524FBF612}"/>
-              </a:ext>
-            </a:extLst>
-          </p:cNvPr>
+          <p:cNvPr id="5" name="Date Placeholder 4"/>
           <p:cNvSpPr>
             <a:spLocks noGrp="1"/>
           </p:cNvSpPr>
@@ -3956,7 +3517,7 @@
           <a:p>
             <a:fld id="{37F56924-F9DA-4FFB-BB0A-49F438EC028A}" type="datetimeFigureOut">
               <a:rPr lang="en-US" smtClean="0"/>
-              <a:t>12/16/2025</a:t>
+              <a:t>12/17/2025</a:t>
             </a:fld>
             <a:endParaRPr lang="en-US"/>
           </a:p>
@@ -3964,13 +3525,7 @@
       </p:sp>
       <p:sp>
         <p:nvSpPr>
-          <p:cNvPr id="6" name="Footer Placeholder 5">
-            <a:extLst>
-              <a:ext uri="{FF2B5EF4-FFF2-40B4-BE49-F238E27FC236}">
-                <a16:creationId xmlns="" xmlns:a16="http://schemas.microsoft.com/office/drawing/2014/main" id="{1E466029-B4AF-BAAA-094C-CAFF7A5B222D}"/>
-              </a:ext>
-            </a:extLst>
-          </p:cNvPr>
+          <p:cNvPr id="6" name="Footer Placeholder 5"/>
           <p:cNvSpPr>
             <a:spLocks noGrp="1"/>
           </p:cNvSpPr>
@@ -3989,13 +3544,7 @@
       </p:sp>
       <p:sp>
         <p:nvSpPr>
-          <p:cNvPr id="7" name="Slide Number Placeholder 6">
-            <a:extLst>
-              <a:ext uri="{FF2B5EF4-FFF2-40B4-BE49-F238E27FC236}">
-                <a16:creationId xmlns="" xmlns:a16="http://schemas.microsoft.com/office/drawing/2014/main" id="{94A79549-F9B2-D821-F594-5FAA0A0F934B}"/>
-              </a:ext>
-            </a:extLst>
-          </p:cNvPr>
+          <p:cNvPr id="7" name="Slide Number Placeholder 6"/>
           <p:cNvSpPr>
             <a:spLocks noGrp="1"/>
           </p:cNvSpPr>
@@ -4010,18 +3559,13 @@
           <a:p>
             <a:fld id="{FFEBDC2A-1B28-4739-94E8-53CDF1A4BB68}" type="slidenum">
               <a:rPr lang="en-US" smtClean="0"/>
-              <a:t>‹N°›</a:t>
+              <a:t>‹#›</a:t>
             </a:fld>
             <a:endParaRPr lang="en-US"/>
           </a:p>
         </p:txBody>
       </p:sp>
     </p:spTree>
-    <p:extLst>
-      <p:ext uri="{BB962C8B-B14F-4D97-AF65-F5344CB8AC3E}">
-        <p14:creationId xmlns:p14="http://schemas.microsoft.com/office/powerpoint/2010/main" val="2611687886"/>
-      </p:ext>
-    </p:extLst>
   </p:cSld>
   <p:clrMapOvr>
     <a:masterClrMapping/>
@@ -4048,13 +3592,7 @@
       </p:grpSpPr>
       <p:sp>
         <p:nvSpPr>
-          <p:cNvPr id="2" name="Title 1">
-            <a:extLst>
-              <a:ext uri="{FF2B5EF4-FFF2-40B4-BE49-F238E27FC236}">
-                <a16:creationId xmlns="" xmlns:a16="http://schemas.microsoft.com/office/drawing/2014/main" id="{FE87F28C-4F2C-0B5F-298D-A493F16A616F}"/>
-              </a:ext>
-            </a:extLst>
-          </p:cNvPr>
+          <p:cNvPr id="2" name="Title 1"/>
           <p:cNvSpPr>
             <a:spLocks noGrp="1"/>
           </p:cNvSpPr>
@@ -4076,13 +3614,7 @@
       </p:sp>
       <p:sp>
         <p:nvSpPr>
-          <p:cNvPr id="3" name="Vertical Text Placeholder 2">
-            <a:extLst>
-              <a:ext uri="{FF2B5EF4-FFF2-40B4-BE49-F238E27FC236}">
-                <a16:creationId xmlns="" xmlns:a16="http://schemas.microsoft.com/office/drawing/2014/main" id="{D36A2B7C-51B7-106D-71D5-3882BB08D42C}"/>
-              </a:ext>
-            </a:extLst>
-          </p:cNvPr>
+          <p:cNvPr id="3" name="Vertical Text Placeholder 2"/>
           <p:cNvSpPr>
             <a:spLocks noGrp="1"/>
           </p:cNvSpPr>
@@ -4133,13 +3665,7 @@
       </p:sp>
       <p:sp>
         <p:nvSpPr>
-          <p:cNvPr id="4" name="Date Placeholder 3">
-            <a:extLst>
-              <a:ext uri="{FF2B5EF4-FFF2-40B4-BE49-F238E27FC236}">
-                <a16:creationId xmlns="" xmlns:a16="http://schemas.microsoft.com/office/drawing/2014/main" id="{D19F3E36-F8C6-E38C-0F2C-A52E61096F5C}"/>
-              </a:ext>
-            </a:extLst>
-          </p:cNvPr>
+          <p:cNvPr id="4" name="Date Placeholder 3"/>
           <p:cNvSpPr>
             <a:spLocks noGrp="1"/>
           </p:cNvSpPr>
@@ -4154,7 +3680,7 @@
           <a:p>
             <a:fld id="{37F56924-F9DA-4FFB-BB0A-49F438EC028A}" type="datetimeFigureOut">
               <a:rPr lang="en-US" smtClean="0"/>
-              <a:t>12/16/2025</a:t>
+              <a:t>12/17/2025</a:t>
             </a:fld>
             <a:endParaRPr lang="en-US"/>
           </a:p>
@@ -4162,13 +3688,7 @@
       </p:sp>
       <p:sp>
         <p:nvSpPr>
-          <p:cNvPr id="5" name="Footer Placeholder 4">
-            <a:extLst>
-              <a:ext uri="{FF2B5EF4-FFF2-40B4-BE49-F238E27FC236}">
-                <a16:creationId xmlns="" xmlns:a16="http://schemas.microsoft.com/office/drawing/2014/main" id="{4BEB4C59-1CF0-8C18-BCBD-AB7F47E0A679}"/>
-              </a:ext>
-            </a:extLst>
-          </p:cNvPr>
+          <p:cNvPr id="5" name="Footer Placeholder 4"/>
           <p:cNvSpPr>
             <a:spLocks noGrp="1"/>
           </p:cNvSpPr>
@@ -4187,13 +3707,7 @@
       </p:sp>
       <p:sp>
         <p:nvSpPr>
-          <p:cNvPr id="6" name="Slide Number Placeholder 5">
-            <a:extLst>
-              <a:ext uri="{FF2B5EF4-FFF2-40B4-BE49-F238E27FC236}">
-                <a16:creationId xmlns="" xmlns:a16="http://schemas.microsoft.com/office/drawing/2014/main" id="{B59EAC27-1E24-A35B-56EB-BD2E2811F646}"/>
-              </a:ext>
-            </a:extLst>
-          </p:cNvPr>
+          <p:cNvPr id="6" name="Slide Number Placeholder 5"/>
           <p:cNvSpPr>
             <a:spLocks noGrp="1"/>
           </p:cNvSpPr>
@@ -4208,18 +3722,13 @@
           <a:p>
             <a:fld id="{FFEBDC2A-1B28-4739-94E8-53CDF1A4BB68}" type="slidenum">
               <a:rPr lang="en-US" smtClean="0"/>
-              <a:t>‹N°›</a:t>
+              <a:t>‹#›</a:t>
             </a:fld>
             <a:endParaRPr lang="en-US"/>
           </a:p>
         </p:txBody>
       </p:sp>
     </p:spTree>
-    <p:extLst>
-      <p:ext uri="{BB962C8B-B14F-4D97-AF65-F5344CB8AC3E}">
-        <p14:creationId xmlns:p14="http://schemas.microsoft.com/office/powerpoint/2010/main" val="1257546832"/>
-      </p:ext>
-    </p:extLst>
   </p:cSld>
   <p:clrMapOvr>
     <a:masterClrMapping/>
@@ -4246,13 +3755,7 @@
       </p:grpSpPr>
       <p:sp>
         <p:nvSpPr>
-          <p:cNvPr id="2" name="Vertical Title 1">
-            <a:extLst>
-              <a:ext uri="{FF2B5EF4-FFF2-40B4-BE49-F238E27FC236}">
-                <a16:creationId xmlns="" xmlns:a16="http://schemas.microsoft.com/office/drawing/2014/main" id="{DDF3504D-859E-2EEC-B8F1-686E962A9A93}"/>
-              </a:ext>
-            </a:extLst>
-          </p:cNvPr>
+          <p:cNvPr id="2" name="Vertical Title 1"/>
           <p:cNvSpPr>
             <a:spLocks noGrp="1"/>
           </p:cNvSpPr>
@@ -4279,13 +3782,7 @@
       </p:sp>
       <p:sp>
         <p:nvSpPr>
-          <p:cNvPr id="3" name="Vertical Text Placeholder 2">
-            <a:extLst>
-              <a:ext uri="{FF2B5EF4-FFF2-40B4-BE49-F238E27FC236}">
-                <a16:creationId xmlns="" xmlns:a16="http://schemas.microsoft.com/office/drawing/2014/main" id="{69B355A6-4670-2C43-56A6-07FEAF3F2B1D}"/>
-              </a:ext>
-            </a:extLst>
-          </p:cNvPr>
+          <p:cNvPr id="3" name="Vertical Text Placeholder 2"/>
           <p:cNvSpPr>
             <a:spLocks noGrp="1"/>
           </p:cNvSpPr>
@@ -4341,13 +3838,7 @@
       </p:sp>
       <p:sp>
         <p:nvSpPr>
-          <p:cNvPr id="4" name="Date Placeholder 3">
-            <a:extLst>
-              <a:ext uri="{FF2B5EF4-FFF2-40B4-BE49-F238E27FC236}">
-                <a16:creationId xmlns="" xmlns:a16="http://schemas.microsoft.com/office/drawing/2014/main" id="{FA202CA6-E23F-DAC0-6CE3-9FF4469A65B1}"/>
-              </a:ext>
-            </a:extLst>
-          </p:cNvPr>
+          <p:cNvPr id="4" name="Date Placeholder 3"/>
           <p:cNvSpPr>
             <a:spLocks noGrp="1"/>
           </p:cNvSpPr>
@@ -4362,7 +3853,7 @@
           <a:p>
             <a:fld id="{37F56924-F9DA-4FFB-BB0A-49F438EC028A}" type="datetimeFigureOut">
               <a:rPr lang="en-US" smtClean="0"/>
-              <a:t>12/16/2025</a:t>
+              <a:t>12/17/2025</a:t>
             </a:fld>
             <a:endParaRPr lang="en-US"/>
           </a:p>
@@ -4370,13 +3861,7 @@
       </p:sp>
       <p:sp>
         <p:nvSpPr>
-          <p:cNvPr id="5" name="Footer Placeholder 4">
-            <a:extLst>
-              <a:ext uri="{FF2B5EF4-FFF2-40B4-BE49-F238E27FC236}">
-                <a16:creationId xmlns="" xmlns:a16="http://schemas.microsoft.com/office/drawing/2014/main" id="{F65CEAAD-FA08-AA2E-D29C-E822E556F6CC}"/>
-              </a:ext>
-            </a:extLst>
-          </p:cNvPr>
+          <p:cNvPr id="5" name="Footer Placeholder 4"/>
           <p:cNvSpPr>
             <a:spLocks noGrp="1"/>
           </p:cNvSpPr>
@@ -4395,13 +3880,7 @@
       </p:sp>
       <p:sp>
         <p:nvSpPr>
-          <p:cNvPr id="6" name="Slide Number Placeholder 5">
-            <a:extLst>
-              <a:ext uri="{FF2B5EF4-FFF2-40B4-BE49-F238E27FC236}">
-                <a16:creationId xmlns="" xmlns:a16="http://schemas.microsoft.com/office/drawing/2014/main" id="{4EEEEBEA-FFA4-0E13-E3A7-DC4D123BDEEA}"/>
-              </a:ext>
-            </a:extLst>
-          </p:cNvPr>
+          <p:cNvPr id="6" name="Slide Number Placeholder 5"/>
           <p:cNvSpPr>
             <a:spLocks noGrp="1"/>
           </p:cNvSpPr>
@@ -4416,18 +3895,13 @@
           <a:p>
             <a:fld id="{FFEBDC2A-1B28-4739-94E8-53CDF1A4BB68}" type="slidenum">
               <a:rPr lang="en-US" smtClean="0"/>
-              <a:t>‹N°›</a:t>
+              <a:t>‹#›</a:t>
             </a:fld>
             <a:endParaRPr lang="en-US"/>
           </a:p>
         </p:txBody>
       </p:sp>
     </p:spTree>
-    <p:extLst>
-      <p:ext uri="{BB962C8B-B14F-4D97-AF65-F5344CB8AC3E}">
-        <p14:creationId xmlns:p14="http://schemas.microsoft.com/office/powerpoint/2010/main" val="637892997"/>
-      </p:ext>
-    </p:extLst>
   </p:cSld>
   <p:clrMapOvr>
     <a:masterClrMapping/>
@@ -4459,7 +3933,7 @@
             <a:spLocks noGrp="1"/>
           </p:cNvSpPr>
           <p:nvPr>
-            <p:ph idx="1"/>
+            <p:ph idx="1" hasCustomPrompt="1"/>
           </p:nvPr>
         </p:nvSpPr>
         <p:spPr/>
@@ -4510,7 +3984,7 @@
             <a:spLocks noGrp="1"/>
           </p:cNvSpPr>
           <p:nvPr>
-            <p:ph type="title"/>
+            <p:ph type="title" hasCustomPrompt="1"/>
           </p:nvPr>
         </p:nvSpPr>
         <p:spPr/>
@@ -4527,11 +4001,6 @@
         </p:txBody>
       </p:sp>
     </p:spTree>
-    <p:extLst>
-      <p:ext uri="{BB962C8B-B14F-4D97-AF65-F5344CB8AC3E}">
-        <p14:creationId xmlns:p14="http://schemas.microsoft.com/office/powerpoint/2010/main" val="2051432974"/>
-      </p:ext>
-    </p:extLst>
   </p:cSld>
   <p:clrMapOvr>
     <a:masterClrMapping/>
@@ -5049,7 +4518,7 @@
           <a:p>
             <a:fld id="{28F692FF-03A7-4027-ADFE-44E691358618}" type="datetimeFigureOut">
               <a:rPr lang="fr-FR" smtClean="0"/>
-              <a:t>16/12/2025</a:t>
+              <a:t>17/12/2025</a:t>
             </a:fld>
             <a:endParaRPr lang="fr-FR"/>
           </a:p>
@@ -5105,18 +4574,13 @@
           <a:p>
             <a:fld id="{F13CA12D-4510-440A-A164-A3C2A0711BAD}" type="slidenum">
               <a:rPr lang="fr-FR" smtClean="0"/>
-              <a:t>‹N°›</a:t>
+              <a:t>‹#›</a:t>
             </a:fld>
             <a:endParaRPr lang="fr-FR"/>
           </a:p>
         </p:txBody>
       </p:sp>
     </p:spTree>
-    <p:extLst>
-      <p:ext uri="{BB962C8B-B14F-4D97-AF65-F5344CB8AC3E}">
-        <p14:creationId xmlns:p14="http://schemas.microsoft.com/office/powerpoint/2010/main" val="2191545673"/>
-      </p:ext>
-    </p:extLst>
   </p:cSld>
   <p:clrMapOvr>
     <a:overrideClrMapping bg1="lt1" tx1="dk1" bg2="lt2" tx2="dk2" accent1="accent1" accent2="accent2" accent3="accent3" accent4="accent4" accent5="accent5" accent6="accent6" hlink="hlink" folHlink="folHlink"/>
@@ -5351,7 +4815,7 @@
           <a:p>
             <a:fld id="{28F692FF-03A7-4027-ADFE-44E691358618}" type="datetimeFigureOut">
               <a:rPr lang="fr-FR" smtClean="0"/>
-              <a:t>16/12/2025</a:t>
+              <a:t>17/12/2025</a:t>
             </a:fld>
             <a:endParaRPr lang="fr-FR"/>
           </a:p>
@@ -5393,18 +4857,13 @@
           <a:p>
             <a:fld id="{F13CA12D-4510-440A-A164-A3C2A0711BAD}" type="slidenum">
               <a:rPr lang="fr-FR" smtClean="0"/>
-              <a:t>‹N°›</a:t>
+              <a:t>‹#›</a:t>
             </a:fld>
             <a:endParaRPr lang="fr-FR"/>
           </a:p>
         </p:txBody>
       </p:sp>
     </p:spTree>
-    <p:extLst>
-      <p:ext uri="{BB962C8B-B14F-4D97-AF65-F5344CB8AC3E}">
-        <p14:creationId xmlns:p14="http://schemas.microsoft.com/office/powerpoint/2010/main" val="3143851342"/>
-      </p:ext>
-    </p:extLst>
   </p:cSld>
   <p:clrMapOvr>
     <a:masterClrMapping/>
@@ -5788,7 +5247,7 @@
           <a:p>
             <a:fld id="{28F692FF-03A7-4027-ADFE-44E691358618}" type="datetimeFigureOut">
               <a:rPr lang="fr-FR" smtClean="0"/>
-              <a:t>16/12/2025</a:t>
+              <a:t>17/12/2025</a:t>
             </a:fld>
             <a:endParaRPr lang="fr-FR"/>
           </a:p>
@@ -5830,18 +5289,13 @@
           <a:p>
             <a:fld id="{F13CA12D-4510-440A-A164-A3C2A0711BAD}" type="slidenum">
               <a:rPr lang="fr-FR" smtClean="0"/>
-              <a:t>‹N°›</a:t>
+              <a:t>‹#›</a:t>
             </a:fld>
             <a:endParaRPr lang="fr-FR"/>
           </a:p>
         </p:txBody>
       </p:sp>
     </p:spTree>
-    <p:extLst>
-      <p:ext uri="{BB962C8B-B14F-4D97-AF65-F5344CB8AC3E}">
-        <p14:creationId xmlns:p14="http://schemas.microsoft.com/office/powerpoint/2010/main" val="1032049958"/>
-      </p:ext>
-    </p:extLst>
   </p:cSld>
   <p:clrMapOvr>
     <a:masterClrMapping/>
@@ -5906,7 +5360,7 @@
           <a:p>
             <a:fld id="{28F692FF-03A7-4027-ADFE-44E691358618}" type="datetimeFigureOut">
               <a:rPr lang="fr-FR" smtClean="0"/>
-              <a:t>16/12/2025</a:t>
+              <a:t>17/12/2025</a:t>
             </a:fld>
             <a:endParaRPr lang="fr-FR"/>
           </a:p>
@@ -5948,18 +5402,13 @@
           <a:p>
             <a:fld id="{F13CA12D-4510-440A-A164-A3C2A0711BAD}" type="slidenum">
               <a:rPr lang="fr-FR" smtClean="0"/>
-              <a:t>‹N°›</a:t>
+              <a:t>‹#›</a:t>
             </a:fld>
             <a:endParaRPr lang="fr-FR"/>
           </a:p>
         </p:txBody>
       </p:sp>
     </p:spTree>
-    <p:extLst>
-      <p:ext uri="{BB962C8B-B14F-4D97-AF65-F5344CB8AC3E}">
-        <p14:creationId xmlns:p14="http://schemas.microsoft.com/office/powerpoint/2010/main" val="528689101"/>
-      </p:ext>
-    </p:extLst>
   </p:cSld>
   <p:clrMapOvr>
     <a:masterClrMapping/>
@@ -6001,7 +5450,7 @@
           <a:p>
             <a:fld id="{28F692FF-03A7-4027-ADFE-44E691358618}" type="datetimeFigureOut">
               <a:rPr lang="fr-FR" smtClean="0"/>
-              <a:t>16/12/2025</a:t>
+              <a:t>17/12/2025</a:t>
             </a:fld>
             <a:endParaRPr lang="fr-FR"/>
           </a:p>
@@ -6043,18 +5492,13 @@
           <a:p>
             <a:fld id="{F13CA12D-4510-440A-A164-A3C2A0711BAD}" type="slidenum">
               <a:rPr lang="fr-FR" smtClean="0"/>
-              <a:t>‹N°›</a:t>
+              <a:t>‹#›</a:t>
             </a:fld>
             <a:endParaRPr lang="fr-FR"/>
           </a:p>
         </p:txBody>
       </p:sp>
     </p:spTree>
-    <p:extLst>
-      <p:ext uri="{BB962C8B-B14F-4D97-AF65-F5344CB8AC3E}">
-        <p14:creationId xmlns:p14="http://schemas.microsoft.com/office/powerpoint/2010/main" val="1486128925"/>
-      </p:ext>
-    </p:extLst>
   </p:cSld>
   <p:clrMapOvr>
     <a:masterClrMapping/>
@@ -6383,7 +5827,7 @@
           <a:p>
             <a:fld id="{28F692FF-03A7-4027-ADFE-44E691358618}" type="datetimeFigureOut">
               <a:rPr lang="fr-FR" smtClean="0"/>
-              <a:t>16/12/2025</a:t>
+              <a:t>17/12/2025</a:t>
             </a:fld>
             <a:endParaRPr lang="fr-FR"/>
           </a:p>
@@ -6442,7 +5886,7 @@
           <a:p>
             <a:fld id="{F13CA12D-4510-440A-A164-A3C2A0711BAD}" type="slidenum">
               <a:rPr lang="fr-FR" smtClean="0"/>
-              <a:t>‹N°›</a:t>
+              <a:t>‹#›</a:t>
             </a:fld>
             <a:endParaRPr lang="fr-FR"/>
           </a:p>
@@ -6488,11 +5932,6 @@
         </p:style>
       </p:sp>
     </p:spTree>
-    <p:extLst>
-      <p:ext uri="{BB962C8B-B14F-4D97-AF65-F5344CB8AC3E}">
-        <p14:creationId xmlns:p14="http://schemas.microsoft.com/office/powerpoint/2010/main" val="3991079819"/>
-      </p:ext>
-    </p:extLst>
   </p:cSld>
   <p:clrMapOvr>
     <a:masterClrMapping/>
@@ -6777,7 +6216,7 @@
           <a:p>
             <a:fld id="{28F692FF-03A7-4027-ADFE-44E691358618}" type="datetimeFigureOut">
               <a:rPr lang="fr-FR" smtClean="0"/>
-              <a:t>16/12/2025</a:t>
+              <a:t>17/12/2025</a:t>
             </a:fld>
             <a:endParaRPr lang="fr-FR"/>
           </a:p>
@@ -6850,7 +6289,7 @@
           <a:p>
             <a:fld id="{F13CA12D-4510-440A-A164-A3C2A0711BAD}" type="slidenum">
               <a:rPr lang="fr-FR" smtClean="0"/>
-              <a:t>‹N°›</a:t>
+              <a:t>‹#›</a:t>
             </a:fld>
             <a:endParaRPr lang="fr-FR"/>
           </a:p>
@@ -6896,11 +6335,6 @@
         </p:style>
       </p:sp>
     </p:spTree>
-    <p:extLst>
-      <p:ext uri="{BB962C8B-B14F-4D97-AF65-F5344CB8AC3E}">
-        <p14:creationId xmlns:p14="http://schemas.microsoft.com/office/powerpoint/2010/main" val="382475861"/>
-      </p:ext>
-    </p:extLst>
   </p:cSld>
   <p:clrMapOvr>
     <a:masterClrMapping/>
@@ -6958,6 +6392,13 @@
             <a:softEdge rad="0"/>
           </a:effectLst>
         </p:spPr>
+        <p:txBody>
+          <a:bodyPr/>
+          <a:lstStyle/>
+          <a:p>
+            <a:endParaRPr lang="en-GB"/>
+          </a:p>
+        </p:txBody>
       </p:sp>
       <p:sp>
         <p:nvSpPr>
@@ -7090,7 +6531,7 @@
           <a:p>
             <a:fld id="{28F692FF-03A7-4027-ADFE-44E691358618}" type="datetimeFigureOut">
               <a:rPr lang="fr-FR" smtClean="0"/>
-              <a:t>16/12/2025</a:t>
+              <a:t>17/12/2025</a:t>
             </a:fld>
             <a:endParaRPr lang="fr-FR"/>
           </a:p>
@@ -7170,32 +6611,27 @@
           <a:p>
             <a:fld id="{F13CA12D-4510-440A-A164-A3C2A0711BAD}" type="slidenum">
               <a:rPr lang="fr-FR" smtClean="0"/>
-              <a:t>‹N°›</a:t>
+              <a:t>‹#›</a:t>
             </a:fld>
             <a:endParaRPr lang="fr-FR"/>
           </a:p>
         </p:txBody>
       </p:sp>
     </p:spTree>
-    <p:extLst>
-      <p:ext uri="{BB962C8B-B14F-4D97-AF65-F5344CB8AC3E}">
-        <p14:creationId xmlns:p14="http://schemas.microsoft.com/office/powerpoint/2010/main" val="843361322"/>
-      </p:ext>
-    </p:extLst>
   </p:cSld>
   <p:clrMap bg1="lt1" tx1="dk1" bg2="lt2" tx2="dk2" accent1="accent1" accent2="accent2" accent3="accent3" accent4="accent4" accent5="accent5" accent6="accent6" hlink="hlink" folHlink="folHlink"/>
   <p:sldLayoutIdLst>
-    <p:sldLayoutId id="2147483661" r:id="rId1"/>
-    <p:sldLayoutId id="2147483662" r:id="rId2"/>
-    <p:sldLayoutId id="2147483663" r:id="rId3"/>
-    <p:sldLayoutId id="2147483664" r:id="rId4"/>
-    <p:sldLayoutId id="2147483665" r:id="rId5"/>
-    <p:sldLayoutId id="2147483666" r:id="rId6"/>
-    <p:sldLayoutId id="2147483667" r:id="rId7"/>
-    <p:sldLayoutId id="2147483668" r:id="rId8"/>
-    <p:sldLayoutId id="2147483669" r:id="rId9"/>
-    <p:sldLayoutId id="2147483670" r:id="rId10"/>
-    <p:sldLayoutId id="2147483671" r:id="rId11"/>
+    <p:sldLayoutId id="2147483649" r:id="rId1"/>
+    <p:sldLayoutId id="2147483650" r:id="rId2"/>
+    <p:sldLayoutId id="2147483651" r:id="rId3"/>
+    <p:sldLayoutId id="2147483652" r:id="rId4"/>
+    <p:sldLayoutId id="2147483653" r:id="rId5"/>
+    <p:sldLayoutId id="2147483654" r:id="rId6"/>
+    <p:sldLayoutId id="2147483655" r:id="rId7"/>
+    <p:sldLayoutId id="2147483656" r:id="rId8"/>
+    <p:sldLayoutId id="2147483657" r:id="rId9"/>
+    <p:sldLayoutId id="2147483658" r:id="rId10"/>
+    <p:sldLayoutId id="2147483659" r:id="rId11"/>
   </p:sldLayoutIdLst>
   <p:txStyles>
     <p:titleStyle>
@@ -7238,7 +6674,7 @@
             <a:lumOff val="15000"/>
           </a:schemeClr>
         </a:buClr>
-        <a:buFont typeface="Garamond" pitchFamily="18" charset="0"/>
+        <a:buFont typeface="Garamond" panose="02020404030301010803" pitchFamily="18" charset="0"/>
         <a:buChar char="◦"/>
         <a:defRPr sz="1800" kern="1200">
           <a:solidFill>
@@ -7262,7 +6698,7 @@
             <a:lumOff val="15000"/>
           </a:schemeClr>
         </a:buClr>
-        <a:buFont typeface="Garamond" pitchFamily="18" charset="0"/>
+        <a:buFont typeface="Garamond" panose="02020404030301010803" pitchFamily="18" charset="0"/>
         <a:buChar char="◦"/>
         <a:defRPr sz="1600" kern="1200">
           <a:solidFill>
@@ -7286,7 +6722,7 @@
             <a:lumOff val="15000"/>
           </a:schemeClr>
         </a:buClr>
-        <a:buFont typeface="Garamond" pitchFamily="18" charset="0"/>
+        <a:buFont typeface="Garamond" panose="02020404030301010803" pitchFamily="18" charset="0"/>
         <a:buChar char="◦"/>
         <a:defRPr sz="1400" kern="1200">
           <a:solidFill>
@@ -7310,7 +6746,7 @@
             <a:lumOff val="15000"/>
           </a:schemeClr>
         </a:buClr>
-        <a:buFont typeface="Garamond" pitchFamily="18" charset="0"/>
+        <a:buFont typeface="Garamond" panose="02020404030301010803" pitchFamily="18" charset="0"/>
         <a:buChar char="◦"/>
         <a:defRPr sz="1400" kern="1200">
           <a:solidFill>
@@ -7334,7 +6770,7 @@
             <a:lumOff val="15000"/>
           </a:schemeClr>
         </a:buClr>
-        <a:buFont typeface="Garamond" pitchFamily="18" charset="0"/>
+        <a:buFont typeface="Garamond" panose="02020404030301010803" pitchFamily="18" charset="0"/>
         <a:buChar char="◦"/>
         <a:defRPr sz="1400" kern="1200">
           <a:solidFill>
@@ -7345,7 +6781,7 @@
           <a:cs typeface="+mn-cs"/>
         </a:defRPr>
       </a:lvl5pPr>
-      <a:lvl6pPr marL="1600000" indent="-228600" algn="l" defTabSz="914400" rtl="0" eaLnBrk="1" latinLnBrk="0" hangingPunct="1">
+      <a:lvl6pPr marL="1600200" indent="-228600" algn="l" defTabSz="914400" rtl="0" eaLnBrk="1" latinLnBrk="0" hangingPunct="1">
         <a:lnSpc>
           <a:spcPct val="100000"/>
         </a:lnSpc>
@@ -7358,7 +6794,7 @@
             <a:lumOff val="15000"/>
           </a:schemeClr>
         </a:buClr>
-        <a:buFont typeface="Garamond" pitchFamily="18" charset="0"/>
+        <a:buFont typeface="Garamond" panose="02020404030301010803" pitchFamily="18" charset="0"/>
         <a:buChar char="◦"/>
         <a:defRPr sz="1400" kern="1200">
           <a:solidFill>
@@ -7369,7 +6805,7 @@
           <a:cs typeface="+mn-cs"/>
         </a:defRPr>
       </a:lvl6pPr>
-      <a:lvl7pPr marL="1900000" indent="-228600" algn="l" defTabSz="914400" rtl="0" eaLnBrk="1" latinLnBrk="0" hangingPunct="1">
+      <a:lvl7pPr marL="1899920" indent="-228600" algn="l" defTabSz="914400" rtl="0" eaLnBrk="1" latinLnBrk="0" hangingPunct="1">
         <a:lnSpc>
           <a:spcPct val="100000"/>
         </a:lnSpc>
@@ -7382,7 +6818,7 @@
             <a:lumOff val="15000"/>
           </a:schemeClr>
         </a:buClr>
-        <a:buFont typeface="Garamond" pitchFamily="18" charset="0"/>
+        <a:buFont typeface="Garamond" panose="02020404030301010803" pitchFamily="18" charset="0"/>
         <a:buChar char="◦"/>
         <a:defRPr sz="1400" kern="1200">
           <a:solidFill>
@@ -7393,7 +6829,7 @@
           <a:cs typeface="+mn-cs"/>
         </a:defRPr>
       </a:lvl7pPr>
-      <a:lvl8pPr marL="2200000" indent="-228600" algn="l" defTabSz="914400" rtl="0" eaLnBrk="1" latinLnBrk="0" hangingPunct="1">
+      <a:lvl8pPr marL="2200275" indent="-228600" algn="l" defTabSz="914400" rtl="0" eaLnBrk="1" latinLnBrk="0" hangingPunct="1">
         <a:lnSpc>
           <a:spcPct val="100000"/>
         </a:lnSpc>
@@ -7406,7 +6842,7 @@
             <a:lumOff val="15000"/>
           </a:schemeClr>
         </a:buClr>
-        <a:buFont typeface="Garamond" pitchFamily="18" charset="0"/>
+        <a:buFont typeface="Garamond" panose="02020404030301010803" pitchFamily="18" charset="0"/>
         <a:buChar char="◦"/>
         <a:defRPr sz="1400" kern="1200">
           <a:solidFill>
@@ -7417,7 +6853,7 @@
           <a:cs typeface="+mn-cs"/>
         </a:defRPr>
       </a:lvl8pPr>
-      <a:lvl9pPr marL="2500000" indent="-228600" algn="l" defTabSz="914400" rtl="0" eaLnBrk="1" latinLnBrk="0" hangingPunct="1">
+      <a:lvl9pPr marL="2499995" indent="-228600" algn="l" defTabSz="914400" rtl="0" eaLnBrk="1" latinLnBrk="0" hangingPunct="1">
         <a:lnSpc>
           <a:spcPct val="100000"/>
         </a:lnSpc>
@@ -7430,7 +6866,7 @@
             <a:lumOff val="15000"/>
           </a:schemeClr>
         </a:buClr>
-        <a:buFont typeface="Garamond" pitchFamily="18" charset="0"/>
+        <a:buFont typeface="Garamond" panose="02020404030301010803" pitchFamily="18" charset="0"/>
         <a:buChar char="◦"/>
         <a:defRPr sz="1400" kern="1200">
           <a:solidFill>
@@ -7565,13 +7001,7 @@
       </p:grpSpPr>
       <p:sp>
         <p:nvSpPr>
-          <p:cNvPr id="2" name="Title Placeholder 1">
-            <a:extLst>
-              <a:ext uri="{FF2B5EF4-FFF2-40B4-BE49-F238E27FC236}">
-                <a16:creationId xmlns="" xmlns:a16="http://schemas.microsoft.com/office/drawing/2014/main" id="{0150F2ED-9CBC-0E44-DBFE-18345E681577}"/>
-              </a:ext>
-            </a:extLst>
-          </p:cNvPr>
+          <p:cNvPr id="2" name="Title Placeholder 1"/>
           <p:cNvSpPr>
             <a:spLocks noGrp="1"/>
           </p:cNvSpPr>
@@ -7603,13 +7033,7 @@
       </p:sp>
       <p:sp>
         <p:nvSpPr>
-          <p:cNvPr id="3" name="Text Placeholder 2">
-            <a:extLst>
-              <a:ext uri="{FF2B5EF4-FFF2-40B4-BE49-F238E27FC236}">
-                <a16:creationId xmlns="" xmlns:a16="http://schemas.microsoft.com/office/drawing/2014/main" id="{6C4414EE-11B9-A8C7-6894-240E37E27F7F}"/>
-              </a:ext>
-            </a:extLst>
-          </p:cNvPr>
+          <p:cNvPr id="3" name="Text Placeholder 2"/>
           <p:cNvSpPr>
             <a:spLocks noGrp="1"/>
           </p:cNvSpPr>
@@ -7670,13 +7094,7 @@
       </p:sp>
       <p:sp>
         <p:nvSpPr>
-          <p:cNvPr id="4" name="Date Placeholder 3">
-            <a:extLst>
-              <a:ext uri="{FF2B5EF4-FFF2-40B4-BE49-F238E27FC236}">
-                <a16:creationId xmlns="" xmlns:a16="http://schemas.microsoft.com/office/drawing/2014/main" id="{DDCDF880-683A-3734-E0D7-EF325D0541C5}"/>
-              </a:ext>
-            </a:extLst>
-          </p:cNvPr>
+          <p:cNvPr id="4" name="Date Placeholder 3"/>
           <p:cNvSpPr>
             <a:spLocks noGrp="1"/>
           </p:cNvSpPr>
@@ -7709,7 +7127,7 @@
           <a:p>
             <a:fld id="{37F56924-F9DA-4FFB-BB0A-49F438EC028A}" type="datetimeFigureOut">
               <a:rPr lang="en-US" smtClean="0"/>
-              <a:t>12/16/2025</a:t>
+              <a:t>12/17/2025</a:t>
             </a:fld>
             <a:endParaRPr lang="en-US"/>
           </a:p>
@@ -7717,13 +7135,7 @@
       </p:sp>
       <p:sp>
         <p:nvSpPr>
-          <p:cNvPr id="5" name="Footer Placeholder 4">
-            <a:extLst>
-              <a:ext uri="{FF2B5EF4-FFF2-40B4-BE49-F238E27FC236}">
-                <a16:creationId xmlns="" xmlns:a16="http://schemas.microsoft.com/office/drawing/2014/main" id="{5B0FB2CC-221F-8F5A-3102-09C67D499DF3}"/>
-              </a:ext>
-            </a:extLst>
-          </p:cNvPr>
+          <p:cNvPr id="5" name="Footer Placeholder 4"/>
           <p:cNvSpPr>
             <a:spLocks noGrp="1"/>
           </p:cNvSpPr>
@@ -7760,13 +7172,7 @@
       </p:sp>
       <p:sp>
         <p:nvSpPr>
-          <p:cNvPr id="6" name="Slide Number Placeholder 5">
-            <a:extLst>
-              <a:ext uri="{FF2B5EF4-FFF2-40B4-BE49-F238E27FC236}">
-                <a16:creationId xmlns="" xmlns:a16="http://schemas.microsoft.com/office/drawing/2014/main" id="{F62275FA-65FD-0956-30D0-D0BCB5B3925D}"/>
-              </a:ext>
-            </a:extLst>
-          </p:cNvPr>
+          <p:cNvPr id="6" name="Slide Number Placeholder 5"/>
           <p:cNvSpPr>
             <a:spLocks noGrp="1"/>
           </p:cNvSpPr>
@@ -7799,33 +7205,28 @@
           <a:p>
             <a:fld id="{FFEBDC2A-1B28-4739-94E8-53CDF1A4BB68}" type="slidenum">
               <a:rPr lang="en-US" smtClean="0"/>
-              <a:t>‹N°›</a:t>
+              <a:t>‹#›</a:t>
             </a:fld>
             <a:endParaRPr lang="en-US"/>
           </a:p>
         </p:txBody>
       </p:sp>
     </p:spTree>
-    <p:extLst>
-      <p:ext uri="{BB962C8B-B14F-4D97-AF65-F5344CB8AC3E}">
-        <p14:creationId xmlns:p14="http://schemas.microsoft.com/office/powerpoint/2010/main" val="1396568470"/>
-      </p:ext>
-    </p:extLst>
   </p:cSld>
   <p:clrMap bg1="lt1" tx1="dk1" bg2="lt2" tx2="dk2" accent1="accent1" accent2="accent2" accent3="accent3" accent4="accent4" accent5="accent5" accent6="accent6" hlink="hlink" folHlink="folHlink"/>
   <p:sldLayoutIdLst>
-    <p:sldLayoutId id="2147483673" r:id="rId1"/>
-    <p:sldLayoutId id="2147483674" r:id="rId2"/>
-    <p:sldLayoutId id="2147483675" r:id="rId3"/>
-    <p:sldLayoutId id="2147483676" r:id="rId4"/>
-    <p:sldLayoutId id="2147483677" r:id="rId5"/>
-    <p:sldLayoutId id="2147483678" r:id="rId6"/>
-    <p:sldLayoutId id="2147483679" r:id="rId7"/>
-    <p:sldLayoutId id="2147483680" r:id="rId8"/>
-    <p:sldLayoutId id="2147483681" r:id="rId9"/>
-    <p:sldLayoutId id="2147483682" r:id="rId10"/>
-    <p:sldLayoutId id="2147483683" r:id="rId11"/>
-    <p:sldLayoutId id="2147483684" r:id="rId12"/>
+    <p:sldLayoutId id="2147483661" r:id="rId1"/>
+    <p:sldLayoutId id="2147483662" r:id="rId2"/>
+    <p:sldLayoutId id="2147483663" r:id="rId3"/>
+    <p:sldLayoutId id="2147483664" r:id="rId4"/>
+    <p:sldLayoutId id="2147483665" r:id="rId5"/>
+    <p:sldLayoutId id="2147483666" r:id="rId6"/>
+    <p:sldLayoutId id="2147483667" r:id="rId7"/>
+    <p:sldLayoutId id="2147483668" r:id="rId8"/>
+    <p:sldLayoutId id="2147483669" r:id="rId9"/>
+    <p:sldLayoutId id="2147483670" r:id="rId10"/>
+    <p:sldLayoutId id="2147483671" r:id="rId11"/>
+    <p:sldLayoutId id="2147483672" r:id="rId12"/>
   </p:sldLayoutIdLst>
   <p:txStyles>
     <p:titleStyle>
@@ -8129,13 +7530,7 @@
       </p:grpSpPr>
       <p:sp>
         <p:nvSpPr>
-          <p:cNvPr id="2" name="Title 1">
-            <a:extLst>
-              <a:ext uri="{FF2B5EF4-FFF2-40B4-BE49-F238E27FC236}">
-                <a16:creationId xmlns="" xmlns:a16="http://schemas.microsoft.com/office/drawing/2014/main" id="{844E73FA-3960-4ED3-B9D4-3A7BB5820E88}"/>
-              </a:ext>
-            </a:extLst>
-          </p:cNvPr>
+          <p:cNvPr id="2" name="Title 1"/>
           <p:cNvSpPr>
             <a:spLocks noGrp="1"/>
           </p:cNvSpPr>
@@ -8160,22 +7555,10 @@
         </p:txBody>
       </p:sp>
     </p:spTree>
-    <p:extLst>
-      <p:ext uri="{BB962C8B-B14F-4D97-AF65-F5344CB8AC3E}">
-        <p14:creationId xmlns:p14="http://schemas.microsoft.com/office/powerpoint/2010/main" val="3343144112"/>
-      </p:ext>
-    </p:extLst>
   </p:cSld>
   <p:clrMapOvr>
     <a:masterClrMapping/>
   </p:clrMapOvr>
-  <p:timing>
-    <p:tnLst>
-      <p:par>
-        <p:cTn id="1" dur="indefinite" restart="never" nodeType="tmRoot"/>
-      </p:par>
-    </p:tnLst>
-  </p:timing>
 </p:sld>
 </file>
 
@@ -8206,26 +7589,11 @@
       </p:grpSpPr>
       <p:sp>
         <p:nvSpPr>
-          <p:cNvPr id="8" name="Rectangle 7">
-            <a:extLst>
-              <a:ext uri="{FF2B5EF4-FFF2-40B4-BE49-F238E27FC236}">
-                <a16:creationId xmlns="" xmlns:a16="http://schemas.microsoft.com/office/drawing/2014/main" id="{70120F84-A866-4D9F-8B1C-9120A013D654}"/>
-              </a:ext>
-              <a:ext uri="{C183D7F6-B498-43B3-948B-1728B52AA6E4}">
-                <adec:decorative xmlns="" xmlns:adec="http://schemas.microsoft.com/office/drawing/2017/decorative" val="1"/>
-              </a:ext>
-            </a:extLst>
-          </p:cNvPr>
+          <p:cNvPr id="8" name="Rectangle 7"/>
           <p:cNvSpPr>
             <a:spLocks noGrp="1" noRot="1" noChangeAspect="1" noMove="1" noResize="1" noEditPoints="1" noAdjustHandles="1" noChangeArrowheads="1" noChangeShapeType="1" noTextEdit="1"/>
           </p:cNvSpPr>
-          <p:nvPr>
-            <p:extLst>
-              <p:ext uri="{386F3935-93C4-4BCD-93E2-E3B085C9AB24}">
-                <p16:designElem xmlns="" xmlns:p16="http://schemas.microsoft.com/office/powerpoint/2015/main" val="1"/>
-              </p:ext>
-            </p:extLst>
-          </p:nvPr>
+          <p:nvPr/>
         </p:nvSpPr>
         <p:spPr>
           <a:xfrm>
@@ -8260,9 +7628,6 @@
         </p:style>
         <p:txBody>
           <a:bodyPr rot="0" spcFirstLastPara="0" vert="horz" wrap="square" lIns="91440" tIns="45720" rIns="91440" bIns="45720" numCol="1" spcCol="0" rtlCol="0" fromWordArt="0" anchor="ctr" anchorCtr="0" forceAA="0" compatLnSpc="1">
-            <a:prstTxWarp prst="textNoShape">
-              <a:avLst/>
-            </a:prstTxWarp>
             <a:noAutofit/>
           </a:bodyPr>
           <a:lstStyle>
@@ -8368,26 +7733,11 @@
       </p:sp>
       <p:sp useBgFill="1">
         <p:nvSpPr>
-          <p:cNvPr id="10" name="Rectangle 9">
-            <a:extLst>
-              <a:ext uri="{FF2B5EF4-FFF2-40B4-BE49-F238E27FC236}">
-                <a16:creationId xmlns="" xmlns:a16="http://schemas.microsoft.com/office/drawing/2014/main" id="{252FEFEF-6AC0-46B6-AC09-11FC56196FA4}"/>
-              </a:ext>
-              <a:ext uri="{C183D7F6-B498-43B3-948B-1728B52AA6E4}">
-                <adec:decorative xmlns="" xmlns:adec="http://schemas.microsoft.com/office/drawing/2017/decorative" val="1"/>
-              </a:ext>
-            </a:extLst>
-          </p:cNvPr>
+          <p:cNvPr id="10" name="Rectangle 9"/>
           <p:cNvSpPr>
             <a:spLocks noGrp="1" noRot="1" noChangeAspect="1" noMove="1" noResize="1" noEditPoints="1" noAdjustHandles="1" noChangeArrowheads="1" noChangeShapeType="1" noTextEdit="1"/>
           </p:cNvSpPr>
-          <p:nvPr>
-            <p:extLst>
-              <p:ext uri="{386F3935-93C4-4BCD-93E2-E3B085C9AB24}">
-                <p16:designElem xmlns="" xmlns:p16="http://schemas.microsoft.com/office/powerpoint/2015/main" val="1"/>
-              </p:ext>
-            </p:extLst>
-          </p:nvPr>
+          <p:nvPr/>
         </p:nvSpPr>
         <p:spPr>
           <a:xfrm>
@@ -8415,13 +7765,7 @@
       </p:sp>
       <p:sp>
         <p:nvSpPr>
-          <p:cNvPr id="4" name="Rectangle 3">
-            <a:extLst>
-              <a:ext uri="{FF2B5EF4-FFF2-40B4-BE49-F238E27FC236}">
-                <a16:creationId xmlns="" xmlns:a16="http://schemas.microsoft.com/office/drawing/2014/main" id="{80D55A6F-7190-47FE-A830-5DF140C82A13}"/>
-              </a:ext>
-            </a:extLst>
-          </p:cNvPr>
+          <p:cNvPr id="4" name="Rectangle 3"/>
           <p:cNvSpPr/>
           <p:nvPr/>
         </p:nvSpPr>
@@ -8469,13 +7813,7 @@
       </p:sp>
       <p:pic>
         <p:nvPicPr>
-          <p:cNvPr id="3" name="Picture 2" descr="A graph of different colored bars&#10;&#10;Description automatically generated">
-            <a:extLst>
-              <a:ext uri="{FF2B5EF4-FFF2-40B4-BE49-F238E27FC236}">
-                <a16:creationId xmlns="" xmlns:a16="http://schemas.microsoft.com/office/drawing/2014/main" id="{5FB4DA8E-64AF-CBA1-504B-3A0650C3D8B2}"/>
-              </a:ext>
-            </a:extLst>
-          </p:cNvPr>
+          <p:cNvPr id="3" name="Picture 2" descr="A graph of different colored bars&#10;&#10;Description automatically generated"/>
           <p:cNvPicPr>
             <a:picLocks noChangeAspect="1"/>
           </p:cNvPicPr>
@@ -8505,13 +7843,7 @@
       </p:pic>
       <p:sp>
         <p:nvSpPr>
-          <p:cNvPr id="5" name="Rectangle 4">
-            <a:extLst>
-              <a:ext uri="{FF2B5EF4-FFF2-40B4-BE49-F238E27FC236}">
-                <a16:creationId xmlns="" xmlns:a16="http://schemas.microsoft.com/office/drawing/2014/main" id="{2CF955B4-3FAE-D0B7-17DD-58673E9A750D}"/>
-              </a:ext>
-            </a:extLst>
-          </p:cNvPr>
+          <p:cNvPr id="5" name="Rectangle 4"/>
           <p:cNvSpPr/>
           <p:nvPr/>
         </p:nvSpPr>
@@ -8558,13 +7890,7 @@
       </p:sp>
       <p:sp>
         <p:nvSpPr>
-          <p:cNvPr id="6" name="Rectangle 5">
-            <a:extLst>
-              <a:ext uri="{FF2B5EF4-FFF2-40B4-BE49-F238E27FC236}">
-                <a16:creationId xmlns="" xmlns:a16="http://schemas.microsoft.com/office/drawing/2014/main" id="{FC8A7C8F-7835-910F-AA1F-5C0524AF0408}"/>
-              </a:ext>
-            </a:extLst>
-          </p:cNvPr>
+          <p:cNvPr id="6" name="Rectangle 5"/>
           <p:cNvSpPr/>
           <p:nvPr/>
         </p:nvSpPr>
@@ -8611,13 +7937,7 @@
       </p:sp>
       <p:sp>
         <p:nvSpPr>
-          <p:cNvPr id="9" name="Rectangle 8">
-            <a:extLst>
-              <a:ext uri="{FF2B5EF4-FFF2-40B4-BE49-F238E27FC236}">
-                <a16:creationId xmlns="" xmlns:a16="http://schemas.microsoft.com/office/drawing/2014/main" id="{5CAE7D7D-BFD5-59AF-4B66-6DB0DAA84C68}"/>
-              </a:ext>
-            </a:extLst>
-          </p:cNvPr>
+          <p:cNvPr id="9" name="Rectangle 8"/>
           <p:cNvSpPr/>
           <p:nvPr/>
         </p:nvSpPr>
@@ -8664,13 +7984,7 @@
       </p:sp>
       <p:sp>
         <p:nvSpPr>
-          <p:cNvPr id="12" name="Rectangle 11">
-            <a:extLst>
-              <a:ext uri="{FF2B5EF4-FFF2-40B4-BE49-F238E27FC236}">
-                <a16:creationId xmlns="" xmlns:a16="http://schemas.microsoft.com/office/drawing/2014/main" id="{B93DC8E3-1804-2721-266B-467B9DEF5CA6}"/>
-              </a:ext>
-            </a:extLst>
-          </p:cNvPr>
+          <p:cNvPr id="12" name="Rectangle 11"/>
           <p:cNvSpPr/>
           <p:nvPr/>
         </p:nvSpPr>
@@ -8716,22 +8030,10 @@
         </p:txBody>
       </p:sp>
     </p:spTree>
-    <p:extLst>
-      <p:ext uri="{BB962C8B-B14F-4D97-AF65-F5344CB8AC3E}">
-        <p14:creationId xmlns:p14="http://schemas.microsoft.com/office/powerpoint/2010/main" val="2079793933"/>
-      </p:ext>
-    </p:extLst>
   </p:cSld>
   <p:clrMapOvr>
     <a:masterClrMapping/>
   </p:clrMapOvr>
-  <p:timing>
-    <p:tnLst>
-      <p:par>
-        <p:cTn id="1" dur="indefinite" restart="never" nodeType="tmRoot"/>
-      </p:par>
-    </p:tnLst>
-  </p:timing>
 </p:sld>
 </file>
 
@@ -8762,26 +8064,11 @@
       </p:grpSpPr>
       <p:sp>
         <p:nvSpPr>
-          <p:cNvPr id="8" name="Rectangle 7">
-            <a:extLst>
-              <a:ext uri="{FF2B5EF4-FFF2-40B4-BE49-F238E27FC236}">
-                <a16:creationId xmlns="" xmlns:a16="http://schemas.microsoft.com/office/drawing/2014/main" id="{70120F84-A866-4D9F-8B1C-9120A013D654}"/>
-              </a:ext>
-              <a:ext uri="{C183D7F6-B498-43B3-948B-1728B52AA6E4}">
-                <adec:decorative xmlns="" xmlns:adec="http://schemas.microsoft.com/office/drawing/2017/decorative" val="1"/>
-              </a:ext>
-            </a:extLst>
-          </p:cNvPr>
+          <p:cNvPr id="8" name="Rectangle 7"/>
           <p:cNvSpPr>
             <a:spLocks noGrp="1" noRot="1" noChangeAspect="1" noMove="1" noResize="1" noEditPoints="1" noAdjustHandles="1" noChangeArrowheads="1" noChangeShapeType="1" noTextEdit="1"/>
           </p:cNvSpPr>
-          <p:nvPr>
-            <p:extLst>
-              <p:ext uri="{386F3935-93C4-4BCD-93E2-E3B085C9AB24}">
-                <p16:designElem xmlns="" xmlns:p16="http://schemas.microsoft.com/office/powerpoint/2015/main" val="1"/>
-              </p:ext>
-            </p:extLst>
-          </p:nvPr>
+          <p:nvPr/>
         </p:nvSpPr>
         <p:spPr>
           <a:xfrm>
@@ -8816,9 +8103,6 @@
         </p:style>
         <p:txBody>
           <a:bodyPr rot="0" spcFirstLastPara="0" vert="horz" wrap="square" lIns="91440" tIns="45720" rIns="91440" bIns="45720" numCol="1" spcCol="0" rtlCol="0" fromWordArt="0" anchor="ctr" anchorCtr="0" forceAA="0" compatLnSpc="1">
-            <a:prstTxWarp prst="textNoShape">
-              <a:avLst/>
-            </a:prstTxWarp>
             <a:noAutofit/>
           </a:bodyPr>
           <a:lstStyle>
@@ -8924,26 +8208,11 @@
       </p:sp>
       <p:sp useBgFill="1">
         <p:nvSpPr>
-          <p:cNvPr id="10" name="Rectangle 9">
-            <a:extLst>
-              <a:ext uri="{FF2B5EF4-FFF2-40B4-BE49-F238E27FC236}">
-                <a16:creationId xmlns="" xmlns:a16="http://schemas.microsoft.com/office/drawing/2014/main" id="{252FEFEF-6AC0-46B6-AC09-11FC56196FA4}"/>
-              </a:ext>
-              <a:ext uri="{C183D7F6-B498-43B3-948B-1728B52AA6E4}">
-                <adec:decorative xmlns="" xmlns:adec="http://schemas.microsoft.com/office/drawing/2017/decorative" val="1"/>
-              </a:ext>
-            </a:extLst>
-          </p:cNvPr>
+          <p:cNvPr id="10" name="Rectangle 9"/>
           <p:cNvSpPr>
             <a:spLocks noGrp="1" noRot="1" noChangeAspect="1" noMove="1" noResize="1" noEditPoints="1" noAdjustHandles="1" noChangeArrowheads="1" noChangeShapeType="1" noTextEdit="1"/>
           </p:cNvSpPr>
-          <p:nvPr>
-            <p:extLst>
-              <p:ext uri="{386F3935-93C4-4BCD-93E2-E3B085C9AB24}">
-                <p16:designElem xmlns="" xmlns:p16="http://schemas.microsoft.com/office/powerpoint/2015/main" val="1"/>
-              </p:ext>
-            </p:extLst>
-          </p:nvPr>
+          <p:nvPr/>
         </p:nvSpPr>
         <p:spPr>
           <a:xfrm>
@@ -8971,13 +8240,7 @@
       </p:sp>
       <p:sp>
         <p:nvSpPr>
-          <p:cNvPr id="4" name="Rectangle 3">
-            <a:extLst>
-              <a:ext uri="{FF2B5EF4-FFF2-40B4-BE49-F238E27FC236}">
-                <a16:creationId xmlns="" xmlns:a16="http://schemas.microsoft.com/office/drawing/2014/main" id="{80D55A6F-7190-47FE-A830-5DF140C82A13}"/>
-              </a:ext>
-            </a:extLst>
-          </p:cNvPr>
+          <p:cNvPr id="4" name="Rectangle 3"/>
           <p:cNvSpPr/>
           <p:nvPr/>
         </p:nvSpPr>
@@ -9037,13 +8300,7 @@
       </p:sp>
       <p:pic>
         <p:nvPicPr>
-          <p:cNvPr id="7" name="Picture 6" descr="A graph with red and blue dots&#10;&#10;Description automatically generated">
-            <a:extLst>
-              <a:ext uri="{FF2B5EF4-FFF2-40B4-BE49-F238E27FC236}">
-                <a16:creationId xmlns="" xmlns:a16="http://schemas.microsoft.com/office/drawing/2014/main" id="{EE809420-92EF-E316-65D2-5744C3D45A70}"/>
-              </a:ext>
-            </a:extLst>
-          </p:cNvPr>
+          <p:cNvPr id="7" name="Picture 6" descr="A graph with red and blue dots&#10;&#10;Description automatically generated"/>
           <p:cNvPicPr>
             <a:picLocks noChangeAspect="1"/>
           </p:cNvPicPr>
@@ -9073,13 +8330,7 @@
       </p:pic>
       <p:sp>
         <p:nvSpPr>
-          <p:cNvPr id="11" name="TextBox 10">
-            <a:extLst>
-              <a:ext uri="{FF2B5EF4-FFF2-40B4-BE49-F238E27FC236}">
-                <a16:creationId xmlns="" xmlns:a16="http://schemas.microsoft.com/office/drawing/2014/main" id="{AEEF8B7F-BF24-9386-D7A3-62289BA8F4AE}"/>
-              </a:ext>
-            </a:extLst>
-          </p:cNvPr>
+          <p:cNvPr id="11" name="TextBox 10"/>
           <p:cNvSpPr txBox="1"/>
           <p:nvPr/>
         </p:nvSpPr>
@@ -9124,22 +8375,10 @@
         </p:txBody>
       </p:sp>
     </p:spTree>
-    <p:extLst>
-      <p:ext uri="{BB962C8B-B14F-4D97-AF65-F5344CB8AC3E}">
-        <p14:creationId xmlns:p14="http://schemas.microsoft.com/office/powerpoint/2010/main" val="3068934411"/>
-      </p:ext>
-    </p:extLst>
   </p:cSld>
   <p:clrMapOvr>
     <a:masterClrMapping/>
   </p:clrMapOvr>
-  <p:timing>
-    <p:tnLst>
-      <p:par>
-        <p:cTn id="1" dur="indefinite" restart="never" nodeType="tmRoot"/>
-      </p:par>
-    </p:tnLst>
-  </p:timing>
 </p:sld>
 </file>
 
@@ -9170,26 +8409,11 @@
       </p:grpSpPr>
       <p:sp>
         <p:nvSpPr>
-          <p:cNvPr id="8" name="Rectangle 7">
-            <a:extLst>
-              <a:ext uri="{FF2B5EF4-FFF2-40B4-BE49-F238E27FC236}">
-                <a16:creationId xmlns="" xmlns:a16="http://schemas.microsoft.com/office/drawing/2014/main" id="{70120F84-A866-4D9F-8B1C-9120A013D654}"/>
-              </a:ext>
-              <a:ext uri="{C183D7F6-B498-43B3-948B-1728B52AA6E4}">
-                <adec:decorative xmlns="" xmlns:adec="http://schemas.microsoft.com/office/drawing/2017/decorative" val="1"/>
-              </a:ext>
-            </a:extLst>
-          </p:cNvPr>
+          <p:cNvPr id="8" name="Rectangle 7"/>
           <p:cNvSpPr>
             <a:spLocks noGrp="1" noRot="1" noChangeAspect="1" noMove="1" noResize="1" noEditPoints="1" noAdjustHandles="1" noChangeArrowheads="1" noChangeShapeType="1" noTextEdit="1"/>
           </p:cNvSpPr>
-          <p:nvPr>
-            <p:extLst>
-              <p:ext uri="{386F3935-93C4-4BCD-93E2-E3B085C9AB24}">
-                <p16:designElem xmlns="" xmlns:p16="http://schemas.microsoft.com/office/powerpoint/2015/main" val="1"/>
-              </p:ext>
-            </p:extLst>
-          </p:nvPr>
+          <p:nvPr/>
         </p:nvSpPr>
         <p:spPr>
           <a:xfrm>
@@ -9224,9 +8448,6 @@
         </p:style>
         <p:txBody>
           <a:bodyPr rot="0" spcFirstLastPara="0" vert="horz" wrap="square" lIns="91440" tIns="45720" rIns="91440" bIns="45720" numCol="1" spcCol="0" rtlCol="0" fromWordArt="0" anchor="ctr" anchorCtr="0" forceAA="0" compatLnSpc="1">
-            <a:prstTxWarp prst="textNoShape">
-              <a:avLst/>
-            </a:prstTxWarp>
             <a:noAutofit/>
           </a:bodyPr>
           <a:lstStyle>
@@ -9332,26 +8553,11 @@
       </p:sp>
       <p:sp useBgFill="1">
         <p:nvSpPr>
-          <p:cNvPr id="10" name="Rectangle 9">
-            <a:extLst>
-              <a:ext uri="{FF2B5EF4-FFF2-40B4-BE49-F238E27FC236}">
-                <a16:creationId xmlns="" xmlns:a16="http://schemas.microsoft.com/office/drawing/2014/main" id="{252FEFEF-6AC0-46B6-AC09-11FC56196FA4}"/>
-              </a:ext>
-              <a:ext uri="{C183D7F6-B498-43B3-948B-1728B52AA6E4}">
-                <adec:decorative xmlns="" xmlns:adec="http://schemas.microsoft.com/office/drawing/2017/decorative" val="1"/>
-              </a:ext>
-            </a:extLst>
-          </p:cNvPr>
+          <p:cNvPr id="10" name="Rectangle 9"/>
           <p:cNvSpPr>
             <a:spLocks noGrp="1" noRot="1" noChangeAspect="1" noMove="1" noResize="1" noEditPoints="1" noAdjustHandles="1" noChangeArrowheads="1" noChangeShapeType="1" noTextEdit="1"/>
           </p:cNvSpPr>
-          <p:nvPr>
-            <p:extLst>
-              <p:ext uri="{386F3935-93C4-4BCD-93E2-E3B085C9AB24}">
-                <p16:designElem xmlns="" xmlns:p16="http://schemas.microsoft.com/office/powerpoint/2015/main" val="1"/>
-              </p:ext>
-            </p:extLst>
-          </p:nvPr>
+          <p:nvPr/>
         </p:nvSpPr>
         <p:spPr>
           <a:xfrm>
@@ -9379,13 +8585,7 @@
       </p:sp>
       <p:sp>
         <p:nvSpPr>
-          <p:cNvPr id="4" name="Rectangle 3">
-            <a:extLst>
-              <a:ext uri="{FF2B5EF4-FFF2-40B4-BE49-F238E27FC236}">
-                <a16:creationId xmlns="" xmlns:a16="http://schemas.microsoft.com/office/drawing/2014/main" id="{80D55A6F-7190-47FE-A830-5DF140C82A13}"/>
-              </a:ext>
-            </a:extLst>
-          </p:cNvPr>
+          <p:cNvPr id="4" name="Rectangle 3"/>
           <p:cNvSpPr/>
           <p:nvPr/>
         </p:nvSpPr>
@@ -9445,13 +8645,7 @@
       </p:sp>
       <p:pic>
         <p:nvPicPr>
-          <p:cNvPr id="5" name="Picture 4" descr="A graph of a line&#10;&#10;Description automatically generated">
-            <a:extLst>
-              <a:ext uri="{FF2B5EF4-FFF2-40B4-BE49-F238E27FC236}">
-                <a16:creationId xmlns="" xmlns:a16="http://schemas.microsoft.com/office/drawing/2014/main" id="{DF9E4FD0-9B19-23F9-E363-977B7598F7FF}"/>
-              </a:ext>
-            </a:extLst>
-          </p:cNvPr>
+          <p:cNvPr id="5" name="Picture 4" descr="A graph of a line&#10;&#10;Description automatically generated"/>
           <p:cNvPicPr>
             <a:picLocks noChangeAspect="1"/>
           </p:cNvPicPr>
@@ -9481,13 +8675,7 @@
       </p:pic>
       <p:sp>
         <p:nvSpPr>
-          <p:cNvPr id="6" name="TextBox 5">
-            <a:extLst>
-              <a:ext uri="{FF2B5EF4-FFF2-40B4-BE49-F238E27FC236}">
-                <a16:creationId xmlns="" xmlns:a16="http://schemas.microsoft.com/office/drawing/2014/main" id="{D3FEE3A4-0223-6B97-F378-42F69BF8F729}"/>
-              </a:ext>
-            </a:extLst>
-          </p:cNvPr>
+          <p:cNvPr id="6" name="TextBox 5"/>
           <p:cNvSpPr txBox="1"/>
           <p:nvPr/>
         </p:nvSpPr>
@@ -9516,30 +8704,10 @@
         </p:txBody>
       </p:sp>
     </p:spTree>
-    <p:extLst>
-      <p:ext uri="{BB962C8B-B14F-4D97-AF65-F5344CB8AC3E}">
-        <p14:creationId xmlns:p14="http://schemas.microsoft.com/office/powerpoint/2010/main" val="3999885572"/>
-      </p:ext>
-    </p:extLst>
   </p:cSld>
   <p:clrMapOvr>
     <a:masterClrMapping/>
   </p:clrMapOvr>
-  <mc:AlternateContent xmlns:mc="http://schemas.openxmlformats.org/markup-compatibility/2006" xmlns:p14="http://schemas.microsoft.com/office/powerpoint/2010/main">
-    <mc:Choice Requires="p14">
-      <p:transition spd="slow" p14:dur="2000"/>
-    </mc:Choice>
-    <mc:Fallback xmlns="">
-      <p:transition spd="slow"/>
-    </mc:Fallback>
-  </mc:AlternateContent>
-  <p:timing>
-    <p:tnLst>
-      <p:par>
-        <p:cTn id="1" dur="indefinite" restart="never" nodeType="tmRoot"/>
-      </p:par>
-    </p:tnLst>
-  </p:timing>
 </p:sld>
 </file>
 
@@ -9570,13 +8738,7 @@
       </p:grpSpPr>
       <p:sp>
         <p:nvSpPr>
-          <p:cNvPr id="4" name="Rectangle 3">
-            <a:extLst>
-              <a:ext uri="{FF2B5EF4-FFF2-40B4-BE49-F238E27FC236}">
-                <a16:creationId xmlns="" xmlns:a16="http://schemas.microsoft.com/office/drawing/2014/main" id="{80D55A6F-7190-47FE-A830-5DF140C82A13}"/>
-              </a:ext>
-            </a:extLst>
-          </p:cNvPr>
+          <p:cNvPr id="4" name="Rectangle 3"/>
           <p:cNvSpPr/>
           <p:nvPr/>
         </p:nvSpPr>
@@ -9624,13 +8786,7 @@
       </p:sp>
       <p:pic>
         <p:nvPicPr>
-          <p:cNvPr id="12" name="Picture 11" descr="A screenshot of a computer&#10;&#10;Description automatically generated">
-            <a:extLst>
-              <a:ext uri="{FF2B5EF4-FFF2-40B4-BE49-F238E27FC236}">
-                <a16:creationId xmlns="" xmlns:a16="http://schemas.microsoft.com/office/drawing/2014/main" id="{5DBA3E2B-E41B-00E9-933E-01204019F141}"/>
-              </a:ext>
-            </a:extLst>
-          </p:cNvPr>
+          <p:cNvPr id="12" name="Picture 11" descr="A screenshot of a computer&#10;&#10;Description automatically generated"/>
           <p:cNvPicPr>
             <a:picLocks noChangeAspect="1"/>
           </p:cNvPicPr>
@@ -9659,22 +8815,10 @@
         </p:spPr>
       </p:pic>
     </p:spTree>
-    <p:extLst>
-      <p:ext uri="{BB962C8B-B14F-4D97-AF65-F5344CB8AC3E}">
-        <p14:creationId xmlns:p14="http://schemas.microsoft.com/office/powerpoint/2010/main" val="3133798278"/>
-      </p:ext>
-    </p:extLst>
   </p:cSld>
   <p:clrMapOvr>
     <a:masterClrMapping/>
   </p:clrMapOvr>
-  <p:timing>
-    <p:tnLst>
-      <p:par>
-        <p:cTn id="1" dur="indefinite" restart="never" nodeType="tmRoot"/>
-      </p:par>
-    </p:tnLst>
-  </p:timing>
 </p:sld>
 </file>
 
@@ -9697,13 +8841,7 @@
       </p:grpSpPr>
       <p:sp>
         <p:nvSpPr>
-          <p:cNvPr id="4" name="Rectangle 3">
-            <a:extLst>
-              <a:ext uri="{FF2B5EF4-FFF2-40B4-BE49-F238E27FC236}">
-                <a16:creationId xmlns="" xmlns:a16="http://schemas.microsoft.com/office/drawing/2014/main" id="{5B0F83B5-1F35-5F68-2474-89CD7BC18F76}"/>
-              </a:ext>
-            </a:extLst>
-          </p:cNvPr>
+          <p:cNvPr id="4" name="Rectangle 3"/>
           <p:cNvSpPr/>
           <p:nvPr/>
         </p:nvSpPr>
@@ -9748,7 +8886,6 @@
               <a:buSzTx/>
               <a:buFontTx/>
               <a:buNone/>
-              <a:tabLst/>
               <a:defRPr/>
             </a:pPr>
             <a:r>
@@ -9796,23 +8933,11 @@
       </p:sp>
       <p:graphicFrame>
         <p:nvGraphicFramePr>
-          <p:cNvPr id="2" name="Table 1">
-            <a:extLst>
-              <a:ext uri="{FF2B5EF4-FFF2-40B4-BE49-F238E27FC236}">
-                <a16:creationId xmlns="" xmlns:a16="http://schemas.microsoft.com/office/drawing/2014/main" id="{543F9E1D-9CC1-E273-25A9-76A567E83275}"/>
-              </a:ext>
-            </a:extLst>
-          </p:cNvPr>
+          <p:cNvPr id="2" name="Table 1"/>
           <p:cNvGraphicFramePr>
             <a:graphicFrameLocks noGrp="1"/>
           </p:cNvGraphicFramePr>
-          <p:nvPr>
-            <p:extLst>
-              <p:ext uri="{D42A27DB-BD31-4B8C-83A1-F6EECF244321}">
-                <p14:modId xmlns:p14="http://schemas.microsoft.com/office/powerpoint/2010/main" val="3926228534"/>
-              </p:ext>
-            </p:extLst>
-          </p:nvPr>
+          <p:nvPr/>
         </p:nvGraphicFramePr>
         <p:xfrm>
           <a:off x="109331" y="1222513"/>
@@ -9826,49 +8951,49 @@
                 <a:gridCol w="1937533">
                   <a:extLst>
                     <a:ext uri="{9D8B030D-6E8A-4147-A177-3AD203B41FA5}">
-                      <a16:colId xmlns="" xmlns:a16="http://schemas.microsoft.com/office/drawing/2014/main" val="3542284253"/>
+                      <a16:colId xmlns:a16="http://schemas.microsoft.com/office/drawing/2014/main" val="20000"/>
                     </a:ext>
                   </a:extLst>
                 </a:gridCol>
                 <a:gridCol w="1733583">
                   <a:extLst>
                     <a:ext uri="{9D8B030D-6E8A-4147-A177-3AD203B41FA5}">
-                      <a16:colId xmlns="" xmlns:a16="http://schemas.microsoft.com/office/drawing/2014/main" val="2498022655"/>
+                      <a16:colId xmlns:a16="http://schemas.microsoft.com/office/drawing/2014/main" val="20001"/>
                     </a:ext>
                   </a:extLst>
                 </a:gridCol>
                 <a:gridCol w="1305286">
                   <a:extLst>
                     <a:ext uri="{9D8B030D-6E8A-4147-A177-3AD203B41FA5}">
-                      <a16:colId xmlns="" xmlns:a16="http://schemas.microsoft.com/office/drawing/2014/main" val="1225226977"/>
+                      <a16:colId xmlns:a16="http://schemas.microsoft.com/office/drawing/2014/main" val="20002"/>
                     </a:ext>
                   </a:extLst>
                 </a:gridCol>
                 <a:gridCol w="1305286">
                   <a:extLst>
                     <a:ext uri="{9D8B030D-6E8A-4147-A177-3AD203B41FA5}">
-                      <a16:colId xmlns="" xmlns:a16="http://schemas.microsoft.com/office/drawing/2014/main" val="3974426038"/>
+                      <a16:colId xmlns:a16="http://schemas.microsoft.com/office/drawing/2014/main" val="20003"/>
                     </a:ext>
                   </a:extLst>
                 </a:gridCol>
                 <a:gridCol w="1305286">
                   <a:extLst>
                     <a:ext uri="{9D8B030D-6E8A-4147-A177-3AD203B41FA5}">
-                      <a16:colId xmlns="" xmlns:a16="http://schemas.microsoft.com/office/drawing/2014/main" val="828486052"/>
+                      <a16:colId xmlns:a16="http://schemas.microsoft.com/office/drawing/2014/main" val="20004"/>
                     </a:ext>
                   </a:extLst>
                 </a:gridCol>
                 <a:gridCol w="1305286">
                   <a:extLst>
                     <a:ext uri="{9D8B030D-6E8A-4147-A177-3AD203B41FA5}">
-                      <a16:colId xmlns="" xmlns:a16="http://schemas.microsoft.com/office/drawing/2014/main" val="3341612997"/>
+                      <a16:colId xmlns:a16="http://schemas.microsoft.com/office/drawing/2014/main" val="20005"/>
                     </a:ext>
                   </a:extLst>
                 </a:gridCol>
                 <a:gridCol w="1643218">
                   <a:extLst>
                     <a:ext uri="{9D8B030D-6E8A-4147-A177-3AD203B41FA5}">
-                      <a16:colId xmlns="" xmlns:a16="http://schemas.microsoft.com/office/drawing/2014/main" val="2921562081"/>
+                      <a16:colId xmlns:a16="http://schemas.microsoft.com/office/drawing/2014/main" val="20006"/>
                     </a:ext>
                   </a:extLst>
                 </a:gridCol>
@@ -10096,7 +9221,7 @@
                 </a:tc>
                 <a:extLst>
                   <a:ext uri="{0D108BD9-81ED-4DB2-BD59-A6C34878D82A}">
-                    <a16:rowId xmlns="" xmlns:a16="http://schemas.microsoft.com/office/drawing/2014/main" val="2421494902"/>
+                    <a16:rowId xmlns:a16="http://schemas.microsoft.com/office/drawing/2014/main" val="10000"/>
                   </a:ext>
                 </a:extLst>
               </a:tr>
@@ -10373,7 +9498,7 @@
                 </a:tc>
                 <a:extLst>
                   <a:ext uri="{0D108BD9-81ED-4DB2-BD59-A6C34878D82A}">
-                    <a16:rowId xmlns="" xmlns:a16="http://schemas.microsoft.com/office/drawing/2014/main" val="2063390512"/>
+                    <a16:rowId xmlns:a16="http://schemas.microsoft.com/office/drawing/2014/main" val="10001"/>
                   </a:ext>
                 </a:extLst>
               </a:tr>
@@ -10642,7 +9767,7 @@
                 </a:tc>
                 <a:extLst>
                   <a:ext uri="{0D108BD9-81ED-4DB2-BD59-A6C34878D82A}">
-                    <a16:rowId xmlns="" xmlns:a16="http://schemas.microsoft.com/office/drawing/2014/main" val="3197875562"/>
+                    <a16:rowId xmlns:a16="http://schemas.microsoft.com/office/drawing/2014/main" val="10002"/>
                   </a:ext>
                 </a:extLst>
               </a:tr>
@@ -10911,7 +10036,7 @@
                 </a:tc>
                 <a:extLst>
                   <a:ext uri="{0D108BD9-81ED-4DB2-BD59-A6C34878D82A}">
-                    <a16:rowId xmlns="" xmlns:a16="http://schemas.microsoft.com/office/drawing/2014/main" val="2485643719"/>
+                    <a16:rowId xmlns:a16="http://schemas.microsoft.com/office/drawing/2014/main" val="10003"/>
                   </a:ext>
                 </a:extLst>
               </a:tr>
@@ -11180,7 +10305,7 @@
                 </a:tc>
                 <a:extLst>
                   <a:ext uri="{0D108BD9-81ED-4DB2-BD59-A6C34878D82A}">
-                    <a16:rowId xmlns="" xmlns:a16="http://schemas.microsoft.com/office/drawing/2014/main" val="3293557974"/>
+                    <a16:rowId xmlns:a16="http://schemas.microsoft.com/office/drawing/2014/main" val="10004"/>
                   </a:ext>
                 </a:extLst>
               </a:tr>
@@ -11449,7 +10574,7 @@
                 </a:tc>
                 <a:extLst>
                   <a:ext uri="{0D108BD9-81ED-4DB2-BD59-A6C34878D82A}">
-                    <a16:rowId xmlns="" xmlns:a16="http://schemas.microsoft.com/office/drawing/2014/main" val="1468234169"/>
+                    <a16:rowId xmlns:a16="http://schemas.microsoft.com/office/drawing/2014/main" val="10005"/>
                   </a:ext>
                 </a:extLst>
               </a:tr>
@@ -11718,7 +10843,7 @@
                 </a:tc>
                 <a:extLst>
                   <a:ext uri="{0D108BD9-81ED-4DB2-BD59-A6C34878D82A}">
-                    <a16:rowId xmlns="" xmlns:a16="http://schemas.microsoft.com/office/drawing/2014/main" val="4658764"/>
+                    <a16:rowId xmlns:a16="http://schemas.microsoft.com/office/drawing/2014/main" val="10006"/>
                   </a:ext>
                 </a:extLst>
               </a:tr>
@@ -11987,7 +11112,7 @@
                 </a:tc>
                 <a:extLst>
                   <a:ext uri="{0D108BD9-81ED-4DB2-BD59-A6C34878D82A}">
-                    <a16:rowId xmlns="" xmlns:a16="http://schemas.microsoft.com/office/drawing/2014/main" val="77198213"/>
+                    <a16:rowId xmlns:a16="http://schemas.microsoft.com/office/drawing/2014/main" val="10007"/>
                   </a:ext>
                 </a:extLst>
               </a:tr>
@@ -12256,7 +11381,7 @@
                 </a:tc>
                 <a:extLst>
                   <a:ext uri="{0D108BD9-81ED-4DB2-BD59-A6C34878D82A}">
-                    <a16:rowId xmlns="" xmlns:a16="http://schemas.microsoft.com/office/drawing/2014/main" val="3696649157"/>
+                    <a16:rowId xmlns:a16="http://schemas.microsoft.com/office/drawing/2014/main" val="10008"/>
                   </a:ext>
                 </a:extLst>
               </a:tr>
@@ -12525,7 +11650,7 @@
                 </a:tc>
                 <a:extLst>
                   <a:ext uri="{0D108BD9-81ED-4DB2-BD59-A6C34878D82A}">
-                    <a16:rowId xmlns="" xmlns:a16="http://schemas.microsoft.com/office/drawing/2014/main" val="4004279577"/>
+                    <a16:rowId xmlns:a16="http://schemas.microsoft.com/office/drawing/2014/main" val="10009"/>
                   </a:ext>
                 </a:extLst>
               </a:tr>
@@ -12794,7 +11919,7 @@
                 </a:tc>
                 <a:extLst>
                   <a:ext uri="{0D108BD9-81ED-4DB2-BD59-A6C34878D82A}">
-                    <a16:rowId xmlns="" xmlns:a16="http://schemas.microsoft.com/office/drawing/2014/main" val="4000132399"/>
+                    <a16:rowId xmlns:a16="http://schemas.microsoft.com/office/drawing/2014/main" val="10010"/>
                   </a:ext>
                 </a:extLst>
               </a:tr>
@@ -13063,7 +12188,7 @@
                 </a:tc>
                 <a:extLst>
                   <a:ext uri="{0D108BD9-81ED-4DB2-BD59-A6C34878D82A}">
-                    <a16:rowId xmlns="" xmlns:a16="http://schemas.microsoft.com/office/drawing/2014/main" val="3073681961"/>
+                    <a16:rowId xmlns:a16="http://schemas.microsoft.com/office/drawing/2014/main" val="10011"/>
                   </a:ext>
                 </a:extLst>
               </a:tr>
@@ -13332,7 +12457,7 @@
                 </a:tc>
                 <a:extLst>
                   <a:ext uri="{0D108BD9-81ED-4DB2-BD59-A6C34878D82A}">
-                    <a16:rowId xmlns="" xmlns:a16="http://schemas.microsoft.com/office/drawing/2014/main" val="2631888047"/>
+                    <a16:rowId xmlns:a16="http://schemas.microsoft.com/office/drawing/2014/main" val="10012"/>
                   </a:ext>
                 </a:extLst>
               </a:tr>
@@ -13601,7 +12726,7 @@
                 </a:tc>
                 <a:extLst>
                   <a:ext uri="{0D108BD9-81ED-4DB2-BD59-A6C34878D82A}">
-                    <a16:rowId xmlns="" xmlns:a16="http://schemas.microsoft.com/office/drawing/2014/main" val="96361011"/>
+                    <a16:rowId xmlns:a16="http://schemas.microsoft.com/office/drawing/2014/main" val="10013"/>
                   </a:ext>
                 </a:extLst>
               </a:tr>
@@ -13870,7 +12995,7 @@
                 </a:tc>
                 <a:extLst>
                   <a:ext uri="{0D108BD9-81ED-4DB2-BD59-A6C34878D82A}">
-                    <a16:rowId xmlns="" xmlns:a16="http://schemas.microsoft.com/office/drawing/2014/main" val="1494299352"/>
+                    <a16:rowId xmlns:a16="http://schemas.microsoft.com/office/drawing/2014/main" val="10014"/>
                   </a:ext>
                 </a:extLst>
               </a:tr>
@@ -14139,7 +13264,7 @@
                 </a:tc>
                 <a:extLst>
                   <a:ext uri="{0D108BD9-81ED-4DB2-BD59-A6C34878D82A}">
-                    <a16:rowId xmlns="" xmlns:a16="http://schemas.microsoft.com/office/drawing/2014/main" val="1111364632"/>
+                    <a16:rowId xmlns:a16="http://schemas.microsoft.com/office/drawing/2014/main" val="10015"/>
                   </a:ext>
                 </a:extLst>
               </a:tr>
@@ -14408,7 +13533,7 @@
                 </a:tc>
                 <a:extLst>
                   <a:ext uri="{0D108BD9-81ED-4DB2-BD59-A6C34878D82A}">
-                    <a16:rowId xmlns="" xmlns:a16="http://schemas.microsoft.com/office/drawing/2014/main" val="3023806234"/>
+                    <a16:rowId xmlns:a16="http://schemas.microsoft.com/office/drawing/2014/main" val="10016"/>
                   </a:ext>
                 </a:extLst>
               </a:tr>
@@ -14677,7 +13802,7 @@
                 </a:tc>
                 <a:extLst>
                   <a:ext uri="{0D108BD9-81ED-4DB2-BD59-A6C34878D82A}">
-                    <a16:rowId xmlns="" xmlns:a16="http://schemas.microsoft.com/office/drawing/2014/main" val="1675126781"/>
+                    <a16:rowId xmlns:a16="http://schemas.microsoft.com/office/drawing/2014/main" val="10017"/>
                   </a:ext>
                 </a:extLst>
               </a:tr>
@@ -14946,7 +14071,7 @@
                 </a:tc>
                 <a:extLst>
                   <a:ext uri="{0D108BD9-81ED-4DB2-BD59-A6C34878D82A}">
-                    <a16:rowId xmlns="" xmlns:a16="http://schemas.microsoft.com/office/drawing/2014/main" val="3226027439"/>
+                    <a16:rowId xmlns:a16="http://schemas.microsoft.com/office/drawing/2014/main" val="10018"/>
                   </a:ext>
                 </a:extLst>
               </a:tr>
@@ -15215,7 +14340,7 @@
                 </a:tc>
                 <a:extLst>
                   <a:ext uri="{0D108BD9-81ED-4DB2-BD59-A6C34878D82A}">
-                    <a16:rowId xmlns="" xmlns:a16="http://schemas.microsoft.com/office/drawing/2014/main" val="1783301296"/>
+                    <a16:rowId xmlns:a16="http://schemas.microsoft.com/office/drawing/2014/main" val="10019"/>
                   </a:ext>
                 </a:extLst>
               </a:tr>
@@ -15484,7 +14609,7 @@
                 </a:tc>
                 <a:extLst>
                   <a:ext uri="{0D108BD9-81ED-4DB2-BD59-A6C34878D82A}">
-                    <a16:rowId xmlns="" xmlns:a16="http://schemas.microsoft.com/office/drawing/2014/main" val="3946941833"/>
+                    <a16:rowId xmlns:a16="http://schemas.microsoft.com/office/drawing/2014/main" val="10020"/>
                   </a:ext>
                 </a:extLst>
               </a:tr>
@@ -15753,7 +14878,7 @@
                 </a:tc>
                 <a:extLst>
                   <a:ext uri="{0D108BD9-81ED-4DB2-BD59-A6C34878D82A}">
-                    <a16:rowId xmlns="" xmlns:a16="http://schemas.microsoft.com/office/drawing/2014/main" val="1503838694"/>
+                    <a16:rowId xmlns:a16="http://schemas.microsoft.com/office/drawing/2014/main" val="10021"/>
                   </a:ext>
                 </a:extLst>
               </a:tr>
@@ -16022,7 +15147,7 @@
                 </a:tc>
                 <a:extLst>
                   <a:ext uri="{0D108BD9-81ED-4DB2-BD59-A6C34878D82A}">
-                    <a16:rowId xmlns="" xmlns:a16="http://schemas.microsoft.com/office/drawing/2014/main" val="3927991499"/>
+                    <a16:rowId xmlns:a16="http://schemas.microsoft.com/office/drawing/2014/main" val="10022"/>
                   </a:ext>
                 </a:extLst>
               </a:tr>
@@ -16291,7 +15416,7 @@
                 </a:tc>
                 <a:extLst>
                   <a:ext uri="{0D108BD9-81ED-4DB2-BD59-A6C34878D82A}">
-                    <a16:rowId xmlns="" xmlns:a16="http://schemas.microsoft.com/office/drawing/2014/main" val="3684813222"/>
+                    <a16:rowId xmlns:a16="http://schemas.microsoft.com/office/drawing/2014/main" val="10023"/>
                   </a:ext>
                 </a:extLst>
               </a:tr>
@@ -16560,7 +15685,7 @@
                 </a:tc>
                 <a:extLst>
                   <a:ext uri="{0D108BD9-81ED-4DB2-BD59-A6C34878D82A}">
-                    <a16:rowId xmlns="" xmlns:a16="http://schemas.microsoft.com/office/drawing/2014/main" val="2386830991"/>
+                    <a16:rowId xmlns:a16="http://schemas.microsoft.com/office/drawing/2014/main" val="10024"/>
                   </a:ext>
                 </a:extLst>
               </a:tr>
@@ -16829,7 +15954,7 @@
                 </a:tc>
                 <a:extLst>
                   <a:ext uri="{0D108BD9-81ED-4DB2-BD59-A6C34878D82A}">
-                    <a16:rowId xmlns="" xmlns:a16="http://schemas.microsoft.com/office/drawing/2014/main" val="1684519494"/>
+                    <a16:rowId xmlns:a16="http://schemas.microsoft.com/office/drawing/2014/main" val="10025"/>
                   </a:ext>
                 </a:extLst>
               </a:tr>
@@ -17098,7 +16223,7 @@
                 </a:tc>
                 <a:extLst>
                   <a:ext uri="{0D108BD9-81ED-4DB2-BD59-A6C34878D82A}">
-                    <a16:rowId xmlns="" xmlns:a16="http://schemas.microsoft.com/office/drawing/2014/main" val="1377585972"/>
+                    <a16:rowId xmlns:a16="http://schemas.microsoft.com/office/drawing/2014/main" val="10026"/>
                   </a:ext>
                 </a:extLst>
               </a:tr>
@@ -17367,7 +16492,7 @@
                 </a:tc>
                 <a:extLst>
                   <a:ext uri="{0D108BD9-81ED-4DB2-BD59-A6C34878D82A}">
-                    <a16:rowId xmlns="" xmlns:a16="http://schemas.microsoft.com/office/drawing/2014/main" val="3136080078"/>
+                    <a16:rowId xmlns:a16="http://schemas.microsoft.com/office/drawing/2014/main" val="10027"/>
                   </a:ext>
                 </a:extLst>
               </a:tr>
@@ -17678,7 +16803,7 @@
                 </a:tc>
                 <a:extLst>
                   <a:ext uri="{0D108BD9-81ED-4DB2-BD59-A6C34878D82A}">
-                    <a16:rowId xmlns="" xmlns:a16="http://schemas.microsoft.com/office/drawing/2014/main" val="3593867963"/>
+                    <a16:rowId xmlns:a16="http://schemas.microsoft.com/office/drawing/2014/main" val="10028"/>
                   </a:ext>
                 </a:extLst>
               </a:tr>
@@ -17688,23 +16813,11 @@
       </p:graphicFrame>
       <p:graphicFrame>
         <p:nvGraphicFramePr>
-          <p:cNvPr id="3" name="Table 2">
-            <a:extLst>
-              <a:ext uri="{FF2B5EF4-FFF2-40B4-BE49-F238E27FC236}">
-                <a16:creationId xmlns="" xmlns:a16="http://schemas.microsoft.com/office/drawing/2014/main" id="{81F3080A-6EBF-AA6E-6DA7-15592D1A6C30}"/>
-              </a:ext>
-            </a:extLst>
-          </p:cNvPr>
+          <p:cNvPr id="3" name="Table 2"/>
           <p:cNvGraphicFramePr>
             <a:graphicFrameLocks noGrp="1"/>
           </p:cNvGraphicFramePr>
-          <p:nvPr>
-            <p:extLst>
-              <p:ext uri="{D42A27DB-BD31-4B8C-83A1-F6EECF244321}">
-                <p14:modId xmlns:p14="http://schemas.microsoft.com/office/powerpoint/2010/main" val="3912472130"/>
-              </p:ext>
-            </p:extLst>
-          </p:nvPr>
+          <p:nvPr/>
         </p:nvGraphicFramePr>
         <p:xfrm>
           <a:off x="10783957" y="4743416"/>
@@ -17718,14 +16831,14 @@
                 <a:gridCol w="764448">
                   <a:extLst>
                     <a:ext uri="{9D8B030D-6E8A-4147-A177-3AD203B41FA5}">
-                      <a16:colId xmlns="" xmlns:a16="http://schemas.microsoft.com/office/drawing/2014/main" val="4253056358"/>
+                      <a16:colId xmlns:a16="http://schemas.microsoft.com/office/drawing/2014/main" val="20000"/>
                     </a:ext>
                   </a:extLst>
                 </a:gridCol>
                 <a:gridCol w="686664">
                   <a:extLst>
                     <a:ext uri="{9D8B030D-6E8A-4147-A177-3AD203B41FA5}">
-                      <a16:colId xmlns="" xmlns:a16="http://schemas.microsoft.com/office/drawing/2014/main" val="3624955021"/>
+                      <a16:colId xmlns:a16="http://schemas.microsoft.com/office/drawing/2014/main" val="20001"/>
                     </a:ext>
                   </a:extLst>
                 </a:gridCol>
@@ -17851,7 +16964,7 @@
                 </a:tc>
                 <a:extLst>
                   <a:ext uri="{0D108BD9-81ED-4DB2-BD59-A6C34878D82A}">
-                    <a16:rowId xmlns="" xmlns:a16="http://schemas.microsoft.com/office/drawing/2014/main" val="2727415307"/>
+                    <a16:rowId xmlns:a16="http://schemas.microsoft.com/office/drawing/2014/main" val="10000"/>
                   </a:ext>
                 </a:extLst>
               </a:tr>
@@ -17976,7 +17089,7 @@
                 </a:tc>
                 <a:extLst>
                   <a:ext uri="{0D108BD9-81ED-4DB2-BD59-A6C34878D82A}">
-                    <a16:rowId xmlns="" xmlns:a16="http://schemas.microsoft.com/office/drawing/2014/main" val="4070415257"/>
+                    <a16:rowId xmlns:a16="http://schemas.microsoft.com/office/drawing/2014/main" val="10001"/>
                   </a:ext>
                 </a:extLst>
               </a:tr>
@@ -18101,7 +17214,7 @@
                 </a:tc>
                 <a:extLst>
                   <a:ext uri="{0D108BD9-81ED-4DB2-BD59-A6C34878D82A}">
-                    <a16:rowId xmlns="" xmlns:a16="http://schemas.microsoft.com/office/drawing/2014/main" val="3064579536"/>
+                    <a16:rowId xmlns:a16="http://schemas.microsoft.com/office/drawing/2014/main" val="10002"/>
                   </a:ext>
                 </a:extLst>
               </a:tr>
@@ -18226,7 +17339,7 @@
                 </a:tc>
                 <a:extLst>
                   <a:ext uri="{0D108BD9-81ED-4DB2-BD59-A6C34878D82A}">
-                    <a16:rowId xmlns="" xmlns:a16="http://schemas.microsoft.com/office/drawing/2014/main" val="2066681885"/>
+                    <a16:rowId xmlns:a16="http://schemas.microsoft.com/office/drawing/2014/main" val="10003"/>
                   </a:ext>
                 </a:extLst>
               </a:tr>
@@ -18235,23 +17348,11 @@
         </a:graphic>
       </p:graphicFrame>
     </p:spTree>
-    <p:extLst>
-      <p:ext uri="{BB962C8B-B14F-4D97-AF65-F5344CB8AC3E}">
-        <p14:creationId xmlns:p14="http://schemas.microsoft.com/office/powerpoint/2010/main" val="2963520410"/>
-      </p:ext>
-    </p:extLst>
   </p:cSld>
   <p:clrMapOvr>
     <a:masterClrMapping/>
   </p:clrMapOvr>
   <p:transition/>
-  <p:timing>
-    <p:tnLst>
-      <p:par>
-        <p:cTn id="1" dur="indefinite" restart="never" nodeType="tmRoot"/>
-      </p:par>
-    </p:tnLst>
-  </p:timing>
 </p:sld>
 </file>
 
@@ -18282,13 +17383,7 @@
       </p:grpSpPr>
       <p:pic>
         <p:nvPicPr>
-          <p:cNvPr id="8" name="Picture 7" descr="A graph of a number of bars&#10;&#10;Description automatically generated with medium confidence">
-            <a:extLst>
-              <a:ext uri="{FF2B5EF4-FFF2-40B4-BE49-F238E27FC236}">
-                <a16:creationId xmlns="" xmlns:a16="http://schemas.microsoft.com/office/drawing/2014/main" id="{A6E18826-76F3-42E0-41C9-9F9D09C66337}"/>
-              </a:ext>
-            </a:extLst>
-          </p:cNvPr>
+          <p:cNvPr id="8" name="Picture 7" descr="A graph of a number of bars&#10;&#10;Description automatically generated with medium confidence"/>
           <p:cNvPicPr>
             <a:picLocks noChangeAspect="1"/>
           </p:cNvPicPr>
@@ -18318,13 +17413,7 @@
       </p:pic>
       <p:sp>
         <p:nvSpPr>
-          <p:cNvPr id="4" name="Rectangle 3">
-            <a:extLst>
-              <a:ext uri="{FF2B5EF4-FFF2-40B4-BE49-F238E27FC236}">
-                <a16:creationId xmlns="" xmlns:a16="http://schemas.microsoft.com/office/drawing/2014/main" id="{80D55A6F-7190-47FE-A830-5DF140C82A13}"/>
-              </a:ext>
-            </a:extLst>
-          </p:cNvPr>
+          <p:cNvPr id="4" name="Rectangle 3"/>
           <p:cNvSpPr/>
           <p:nvPr/>
         </p:nvSpPr>
@@ -18372,23 +17461,11 @@
       </p:sp>
       <p:graphicFrame>
         <p:nvGraphicFramePr>
-          <p:cNvPr id="6" name="Table 5">
-            <a:extLst>
-              <a:ext uri="{FF2B5EF4-FFF2-40B4-BE49-F238E27FC236}">
-                <a16:creationId xmlns="" xmlns:a16="http://schemas.microsoft.com/office/drawing/2014/main" id="{31529746-C0A4-F273-1C83-DE7BD049E7E6}"/>
-              </a:ext>
-            </a:extLst>
-          </p:cNvPr>
+          <p:cNvPr id="6" name="Table 5"/>
           <p:cNvGraphicFramePr>
             <a:graphicFrameLocks noGrp="1"/>
           </p:cNvGraphicFramePr>
-          <p:nvPr>
-            <p:extLst>
-              <p:ext uri="{D42A27DB-BD31-4B8C-83A1-F6EECF244321}">
-                <p14:modId xmlns:p14="http://schemas.microsoft.com/office/powerpoint/2010/main" val="3437712427"/>
-              </p:ext>
-            </p:extLst>
-          </p:nvPr>
+          <p:nvPr/>
         </p:nvGraphicFramePr>
         <p:xfrm>
           <a:off x="5264549" y="1317935"/>
@@ -18402,21 +17479,21 @@
                 <a:gridCol w="900430">
                   <a:extLst>
                     <a:ext uri="{9D8B030D-6E8A-4147-A177-3AD203B41FA5}">
-                      <a16:colId xmlns="" xmlns:a16="http://schemas.microsoft.com/office/drawing/2014/main" val="499018617"/>
+                      <a16:colId xmlns:a16="http://schemas.microsoft.com/office/drawing/2014/main" val="20000"/>
                     </a:ext>
                   </a:extLst>
                 </a:gridCol>
                 <a:gridCol w="1710055">
                   <a:extLst>
                     <a:ext uri="{9D8B030D-6E8A-4147-A177-3AD203B41FA5}">
-                      <a16:colId xmlns="" xmlns:a16="http://schemas.microsoft.com/office/drawing/2014/main" val="2626115646"/>
+                      <a16:colId xmlns:a16="http://schemas.microsoft.com/office/drawing/2014/main" val="20001"/>
                     </a:ext>
                   </a:extLst>
                 </a:gridCol>
                 <a:gridCol w="1620520">
                   <a:extLst>
                     <a:ext uri="{9D8B030D-6E8A-4147-A177-3AD203B41FA5}">
-                      <a16:colId xmlns="" xmlns:a16="http://schemas.microsoft.com/office/drawing/2014/main" val="3055292247"/>
+                      <a16:colId xmlns:a16="http://schemas.microsoft.com/office/drawing/2014/main" val="20002"/>
                     </a:ext>
                   </a:extLst>
                 </a:gridCol>
@@ -18613,7 +17690,7 @@
                 </a:tc>
                 <a:extLst>
                   <a:ext uri="{0D108BD9-81ED-4DB2-BD59-A6C34878D82A}">
-                    <a16:rowId xmlns="" xmlns:a16="http://schemas.microsoft.com/office/drawing/2014/main" val="1493563742"/>
+                    <a16:rowId xmlns:a16="http://schemas.microsoft.com/office/drawing/2014/main" val="10000"/>
                   </a:ext>
                 </a:extLst>
               </a:tr>
@@ -18809,7 +17886,7 @@
                 </a:tc>
                 <a:extLst>
                   <a:ext uri="{0D108BD9-81ED-4DB2-BD59-A6C34878D82A}">
-                    <a16:rowId xmlns="" xmlns:a16="http://schemas.microsoft.com/office/drawing/2014/main" val="2548302878"/>
+                    <a16:rowId xmlns:a16="http://schemas.microsoft.com/office/drawing/2014/main" val="10001"/>
                   </a:ext>
                 </a:extLst>
               </a:tr>
@@ -18818,22 +17895,10 @@
         </a:graphic>
       </p:graphicFrame>
     </p:spTree>
-    <p:extLst>
-      <p:ext uri="{BB962C8B-B14F-4D97-AF65-F5344CB8AC3E}">
-        <p14:creationId xmlns:p14="http://schemas.microsoft.com/office/powerpoint/2010/main" val="1661991740"/>
-      </p:ext>
-    </p:extLst>
   </p:cSld>
   <p:clrMapOvr>
     <a:masterClrMapping/>
   </p:clrMapOvr>
-  <p:timing>
-    <p:tnLst>
-      <p:par>
-        <p:cTn id="1" dur="indefinite" restart="never" nodeType="tmRoot"/>
-      </p:par>
-    </p:tnLst>
-  </p:timing>
 </p:sld>
 </file>
 
@@ -18864,13 +17929,7 @@
       </p:grpSpPr>
       <p:sp>
         <p:nvSpPr>
-          <p:cNvPr id="4" name="Rectangle 3">
-            <a:extLst>
-              <a:ext uri="{FF2B5EF4-FFF2-40B4-BE49-F238E27FC236}">
-                <a16:creationId xmlns="" xmlns:a16="http://schemas.microsoft.com/office/drawing/2014/main" id="{80D55A6F-7190-47FE-A830-5DF140C82A13}"/>
-              </a:ext>
-            </a:extLst>
-          </p:cNvPr>
+          <p:cNvPr id="4" name="Rectangle 3"/>
           <p:cNvSpPr/>
           <p:nvPr/>
         </p:nvSpPr>
@@ -18918,23 +17977,11 @@
       </p:sp>
       <p:graphicFrame>
         <p:nvGraphicFramePr>
-          <p:cNvPr id="2" name="Table 1">
-            <a:extLst>
-              <a:ext uri="{FF2B5EF4-FFF2-40B4-BE49-F238E27FC236}">
-                <a16:creationId xmlns="" xmlns:a16="http://schemas.microsoft.com/office/drawing/2014/main" id="{180F1081-0F83-98A3-210E-69FFE42CD081}"/>
-              </a:ext>
-            </a:extLst>
-          </p:cNvPr>
+          <p:cNvPr id="2" name="Table 1"/>
           <p:cNvGraphicFramePr>
             <a:graphicFrameLocks noGrp="1"/>
           </p:cNvGraphicFramePr>
-          <p:nvPr>
-            <p:extLst>
-              <p:ext uri="{D42A27DB-BD31-4B8C-83A1-F6EECF244321}">
-                <p14:modId xmlns:p14="http://schemas.microsoft.com/office/powerpoint/2010/main" val="2309264928"/>
-              </p:ext>
-            </p:extLst>
-          </p:nvPr>
+          <p:nvPr/>
         </p:nvGraphicFramePr>
         <p:xfrm>
           <a:off x="1749287" y="950514"/>
@@ -18948,28 +17995,28 @@
                 <a:gridCol w="2582417">
                   <a:extLst>
                     <a:ext uri="{9D8B030D-6E8A-4147-A177-3AD203B41FA5}">
-                      <a16:colId xmlns="" xmlns:a16="http://schemas.microsoft.com/office/drawing/2014/main" val="3108143568"/>
+                      <a16:colId xmlns:a16="http://schemas.microsoft.com/office/drawing/2014/main" val="20000"/>
                     </a:ext>
                   </a:extLst>
                 </a:gridCol>
                 <a:gridCol w="2425078">
                   <a:extLst>
                     <a:ext uri="{9D8B030D-6E8A-4147-A177-3AD203B41FA5}">
-                      <a16:colId xmlns="" xmlns:a16="http://schemas.microsoft.com/office/drawing/2014/main" val="964022955"/>
+                      <a16:colId xmlns:a16="http://schemas.microsoft.com/office/drawing/2014/main" val="20001"/>
                     </a:ext>
                   </a:extLst>
                 </a:gridCol>
                 <a:gridCol w="2239233">
                   <a:extLst>
                     <a:ext uri="{9D8B030D-6E8A-4147-A177-3AD203B41FA5}">
-                      <a16:colId xmlns="" xmlns:a16="http://schemas.microsoft.com/office/drawing/2014/main" val="2610271418"/>
+                      <a16:colId xmlns:a16="http://schemas.microsoft.com/office/drawing/2014/main" val="20002"/>
                     </a:ext>
                   </a:extLst>
                 </a:gridCol>
                 <a:gridCol w="1231350">
                   <a:extLst>
                     <a:ext uri="{9D8B030D-6E8A-4147-A177-3AD203B41FA5}">
-                      <a16:colId xmlns="" xmlns:a16="http://schemas.microsoft.com/office/drawing/2014/main" val="3312740433"/>
+                      <a16:colId xmlns:a16="http://schemas.microsoft.com/office/drawing/2014/main" val="20003"/>
                     </a:ext>
                   </a:extLst>
                 </a:gridCol>
@@ -19301,7 +18348,7 @@
                 </a:tc>
                 <a:extLst>
                   <a:ext uri="{0D108BD9-81ED-4DB2-BD59-A6C34878D82A}">
-                    <a16:rowId xmlns="" xmlns:a16="http://schemas.microsoft.com/office/drawing/2014/main" val="3866342614"/>
+                    <a16:rowId xmlns:a16="http://schemas.microsoft.com/office/drawing/2014/main" val="10000"/>
                   </a:ext>
                 </a:extLst>
               </a:tr>
@@ -19536,7 +18583,7 @@
                 </a:tc>
                 <a:extLst>
                   <a:ext uri="{0D108BD9-81ED-4DB2-BD59-A6C34878D82A}">
-                    <a16:rowId xmlns="" xmlns:a16="http://schemas.microsoft.com/office/drawing/2014/main" val="2168485327"/>
+                    <a16:rowId xmlns:a16="http://schemas.microsoft.com/office/drawing/2014/main" val="10001"/>
                   </a:ext>
                 </a:extLst>
               </a:tr>
@@ -19747,7 +18794,7 @@
                 </a:tc>
                 <a:extLst>
                   <a:ext uri="{0D108BD9-81ED-4DB2-BD59-A6C34878D82A}">
-                    <a16:rowId xmlns="" xmlns:a16="http://schemas.microsoft.com/office/drawing/2014/main" val="733967743"/>
+                    <a16:rowId xmlns:a16="http://schemas.microsoft.com/office/drawing/2014/main" val="10002"/>
                   </a:ext>
                 </a:extLst>
               </a:tr>
@@ -19958,7 +19005,7 @@
                 </a:tc>
                 <a:extLst>
                   <a:ext uri="{0D108BD9-81ED-4DB2-BD59-A6C34878D82A}">
-                    <a16:rowId xmlns="" xmlns:a16="http://schemas.microsoft.com/office/drawing/2014/main" val="3990475937"/>
+                    <a16:rowId xmlns:a16="http://schemas.microsoft.com/office/drawing/2014/main" val="10003"/>
                   </a:ext>
                 </a:extLst>
               </a:tr>
@@ -20169,7 +19216,7 @@
                 </a:tc>
                 <a:extLst>
                   <a:ext uri="{0D108BD9-81ED-4DB2-BD59-A6C34878D82A}">
-                    <a16:rowId xmlns="" xmlns:a16="http://schemas.microsoft.com/office/drawing/2014/main" val="2317945270"/>
+                    <a16:rowId xmlns:a16="http://schemas.microsoft.com/office/drawing/2014/main" val="10004"/>
                   </a:ext>
                 </a:extLst>
               </a:tr>
@@ -20380,7 +19427,7 @@
                 </a:tc>
                 <a:extLst>
                   <a:ext uri="{0D108BD9-81ED-4DB2-BD59-A6C34878D82A}">
-                    <a16:rowId xmlns="" xmlns:a16="http://schemas.microsoft.com/office/drawing/2014/main" val="711741288"/>
+                    <a16:rowId xmlns:a16="http://schemas.microsoft.com/office/drawing/2014/main" val="10005"/>
                   </a:ext>
                 </a:extLst>
               </a:tr>
@@ -20591,7 +19638,7 @@
                 </a:tc>
                 <a:extLst>
                   <a:ext uri="{0D108BD9-81ED-4DB2-BD59-A6C34878D82A}">
-                    <a16:rowId xmlns="" xmlns:a16="http://schemas.microsoft.com/office/drawing/2014/main" val="3071288470"/>
+                    <a16:rowId xmlns:a16="http://schemas.microsoft.com/office/drawing/2014/main" val="10006"/>
                   </a:ext>
                 </a:extLst>
               </a:tr>
@@ -20802,7 +19849,7 @@
                 </a:tc>
                 <a:extLst>
                   <a:ext uri="{0D108BD9-81ED-4DB2-BD59-A6C34878D82A}">
-                    <a16:rowId xmlns="" xmlns:a16="http://schemas.microsoft.com/office/drawing/2014/main" val="3202226929"/>
+                    <a16:rowId xmlns:a16="http://schemas.microsoft.com/office/drawing/2014/main" val="10007"/>
                   </a:ext>
                 </a:extLst>
               </a:tr>
@@ -21013,7 +20060,7 @@
                 </a:tc>
                 <a:extLst>
                   <a:ext uri="{0D108BD9-81ED-4DB2-BD59-A6C34878D82A}">
-                    <a16:rowId xmlns="" xmlns:a16="http://schemas.microsoft.com/office/drawing/2014/main" val="774811708"/>
+                    <a16:rowId xmlns:a16="http://schemas.microsoft.com/office/drawing/2014/main" val="10008"/>
                   </a:ext>
                 </a:extLst>
               </a:tr>
@@ -21224,7 +20271,7 @@
                 </a:tc>
                 <a:extLst>
                   <a:ext uri="{0D108BD9-81ED-4DB2-BD59-A6C34878D82A}">
-                    <a16:rowId xmlns="" xmlns:a16="http://schemas.microsoft.com/office/drawing/2014/main" val="415105157"/>
+                    <a16:rowId xmlns:a16="http://schemas.microsoft.com/office/drawing/2014/main" val="10009"/>
                   </a:ext>
                 </a:extLst>
               </a:tr>
@@ -21435,7 +20482,7 @@
                 </a:tc>
                 <a:extLst>
                   <a:ext uri="{0D108BD9-81ED-4DB2-BD59-A6C34878D82A}">
-                    <a16:rowId xmlns="" xmlns:a16="http://schemas.microsoft.com/office/drawing/2014/main" val="2421584368"/>
+                    <a16:rowId xmlns:a16="http://schemas.microsoft.com/office/drawing/2014/main" val="10010"/>
                   </a:ext>
                 </a:extLst>
               </a:tr>
@@ -21646,7 +20693,7 @@
                 </a:tc>
                 <a:extLst>
                   <a:ext uri="{0D108BD9-81ED-4DB2-BD59-A6C34878D82A}">
-                    <a16:rowId xmlns="" xmlns:a16="http://schemas.microsoft.com/office/drawing/2014/main" val="891146336"/>
+                    <a16:rowId xmlns:a16="http://schemas.microsoft.com/office/drawing/2014/main" val="10011"/>
                   </a:ext>
                 </a:extLst>
               </a:tr>
@@ -21857,7 +20904,7 @@
                 </a:tc>
                 <a:extLst>
                   <a:ext uri="{0D108BD9-81ED-4DB2-BD59-A6C34878D82A}">
-                    <a16:rowId xmlns="" xmlns:a16="http://schemas.microsoft.com/office/drawing/2014/main" val="1615198930"/>
+                    <a16:rowId xmlns:a16="http://schemas.microsoft.com/office/drawing/2014/main" val="10012"/>
                   </a:ext>
                 </a:extLst>
               </a:tr>
@@ -22068,7 +21115,7 @@
                 </a:tc>
                 <a:extLst>
                   <a:ext uri="{0D108BD9-81ED-4DB2-BD59-A6C34878D82A}">
-                    <a16:rowId xmlns="" xmlns:a16="http://schemas.microsoft.com/office/drawing/2014/main" val="429315342"/>
+                    <a16:rowId xmlns:a16="http://schemas.microsoft.com/office/drawing/2014/main" val="10013"/>
                   </a:ext>
                 </a:extLst>
               </a:tr>
@@ -22279,7 +21326,7 @@
                 </a:tc>
                 <a:extLst>
                   <a:ext uri="{0D108BD9-81ED-4DB2-BD59-A6C34878D82A}">
-                    <a16:rowId xmlns="" xmlns:a16="http://schemas.microsoft.com/office/drawing/2014/main" val="4139090511"/>
+                    <a16:rowId xmlns:a16="http://schemas.microsoft.com/office/drawing/2014/main" val="10014"/>
                   </a:ext>
                 </a:extLst>
               </a:tr>
@@ -22490,7 +21537,7 @@
                 </a:tc>
                 <a:extLst>
                   <a:ext uri="{0D108BD9-81ED-4DB2-BD59-A6C34878D82A}">
-                    <a16:rowId xmlns="" xmlns:a16="http://schemas.microsoft.com/office/drawing/2014/main" val="2666385800"/>
+                    <a16:rowId xmlns:a16="http://schemas.microsoft.com/office/drawing/2014/main" val="10015"/>
                   </a:ext>
                 </a:extLst>
               </a:tr>
@@ -22701,7 +21748,7 @@
                 </a:tc>
                 <a:extLst>
                   <a:ext uri="{0D108BD9-81ED-4DB2-BD59-A6C34878D82A}">
-                    <a16:rowId xmlns="" xmlns:a16="http://schemas.microsoft.com/office/drawing/2014/main" val="3747204645"/>
+                    <a16:rowId xmlns:a16="http://schemas.microsoft.com/office/drawing/2014/main" val="10016"/>
                   </a:ext>
                 </a:extLst>
               </a:tr>
@@ -22912,7 +21959,7 @@
                 </a:tc>
                 <a:extLst>
                   <a:ext uri="{0D108BD9-81ED-4DB2-BD59-A6C34878D82A}">
-                    <a16:rowId xmlns="" xmlns:a16="http://schemas.microsoft.com/office/drawing/2014/main" val="1909036247"/>
+                    <a16:rowId xmlns:a16="http://schemas.microsoft.com/office/drawing/2014/main" val="10017"/>
                   </a:ext>
                 </a:extLst>
               </a:tr>
@@ -23123,7 +22170,7 @@
                 </a:tc>
                 <a:extLst>
                   <a:ext uri="{0D108BD9-81ED-4DB2-BD59-A6C34878D82A}">
-                    <a16:rowId xmlns="" xmlns:a16="http://schemas.microsoft.com/office/drawing/2014/main" val="211480611"/>
+                    <a16:rowId xmlns:a16="http://schemas.microsoft.com/office/drawing/2014/main" val="10018"/>
                   </a:ext>
                 </a:extLst>
               </a:tr>
@@ -23334,7 +22381,7 @@
                 </a:tc>
                 <a:extLst>
                   <a:ext uri="{0D108BD9-81ED-4DB2-BD59-A6C34878D82A}">
-                    <a16:rowId xmlns="" xmlns:a16="http://schemas.microsoft.com/office/drawing/2014/main" val="1963594792"/>
+                    <a16:rowId xmlns:a16="http://schemas.microsoft.com/office/drawing/2014/main" val="10019"/>
                   </a:ext>
                 </a:extLst>
               </a:tr>
@@ -23545,7 +22592,7 @@
                 </a:tc>
                 <a:extLst>
                   <a:ext uri="{0D108BD9-81ED-4DB2-BD59-A6C34878D82A}">
-                    <a16:rowId xmlns="" xmlns:a16="http://schemas.microsoft.com/office/drawing/2014/main" val="2517044939"/>
+                    <a16:rowId xmlns:a16="http://schemas.microsoft.com/office/drawing/2014/main" val="10020"/>
                   </a:ext>
                 </a:extLst>
               </a:tr>
@@ -23756,7 +22803,7 @@
                 </a:tc>
                 <a:extLst>
                   <a:ext uri="{0D108BD9-81ED-4DB2-BD59-A6C34878D82A}">
-                    <a16:rowId xmlns="" xmlns:a16="http://schemas.microsoft.com/office/drawing/2014/main" val="1490559399"/>
+                    <a16:rowId xmlns:a16="http://schemas.microsoft.com/office/drawing/2014/main" val="10021"/>
                   </a:ext>
                 </a:extLst>
               </a:tr>
@@ -23967,7 +23014,7 @@
                 </a:tc>
                 <a:extLst>
                   <a:ext uri="{0D108BD9-81ED-4DB2-BD59-A6C34878D82A}">
-                    <a16:rowId xmlns="" xmlns:a16="http://schemas.microsoft.com/office/drawing/2014/main" val="1470887176"/>
+                    <a16:rowId xmlns:a16="http://schemas.microsoft.com/office/drawing/2014/main" val="10022"/>
                   </a:ext>
                 </a:extLst>
               </a:tr>
@@ -24178,7 +23225,7 @@
                 </a:tc>
                 <a:extLst>
                   <a:ext uri="{0D108BD9-81ED-4DB2-BD59-A6C34878D82A}">
-                    <a16:rowId xmlns="" xmlns:a16="http://schemas.microsoft.com/office/drawing/2014/main" val="3727228546"/>
+                    <a16:rowId xmlns:a16="http://schemas.microsoft.com/office/drawing/2014/main" val="10023"/>
                   </a:ext>
                 </a:extLst>
               </a:tr>
@@ -24389,7 +23436,7 @@
                 </a:tc>
                 <a:extLst>
                   <a:ext uri="{0D108BD9-81ED-4DB2-BD59-A6C34878D82A}">
-                    <a16:rowId xmlns="" xmlns:a16="http://schemas.microsoft.com/office/drawing/2014/main" val="2466081589"/>
+                    <a16:rowId xmlns:a16="http://schemas.microsoft.com/office/drawing/2014/main" val="10024"/>
                   </a:ext>
                 </a:extLst>
               </a:tr>
@@ -24600,7 +23647,7 @@
                 </a:tc>
                 <a:extLst>
                   <a:ext uri="{0D108BD9-81ED-4DB2-BD59-A6C34878D82A}">
-                    <a16:rowId xmlns="" xmlns:a16="http://schemas.microsoft.com/office/drawing/2014/main" val="4293849307"/>
+                    <a16:rowId xmlns:a16="http://schemas.microsoft.com/office/drawing/2014/main" val="10025"/>
                   </a:ext>
                 </a:extLst>
               </a:tr>
@@ -24847,7 +23894,7 @@
                 </a:tc>
                 <a:extLst>
                   <a:ext uri="{0D108BD9-81ED-4DB2-BD59-A6C34878D82A}">
-                    <a16:rowId xmlns="" xmlns:a16="http://schemas.microsoft.com/office/drawing/2014/main" val="4070384636"/>
+                    <a16:rowId xmlns:a16="http://schemas.microsoft.com/office/drawing/2014/main" val="10026"/>
                   </a:ext>
                 </a:extLst>
               </a:tr>
@@ -24857,13 +23904,7 @@
       </p:graphicFrame>
       <p:sp>
         <p:nvSpPr>
-          <p:cNvPr id="3" name="Rectangle 2">
-            <a:extLst>
-              <a:ext uri="{FF2B5EF4-FFF2-40B4-BE49-F238E27FC236}">
-                <a16:creationId xmlns="" xmlns:a16="http://schemas.microsoft.com/office/drawing/2014/main" id="{649A5CC4-13EE-A2FF-7829-2879AF7981D3}"/>
-              </a:ext>
-            </a:extLst>
-          </p:cNvPr>
+          <p:cNvPr id="3" name="Rectangle 2"/>
           <p:cNvSpPr/>
           <p:nvPr/>
         </p:nvSpPr>
@@ -24909,22 +23950,10 @@
         </p:txBody>
       </p:sp>
     </p:spTree>
-    <p:extLst>
-      <p:ext uri="{BB962C8B-B14F-4D97-AF65-F5344CB8AC3E}">
-        <p14:creationId xmlns:p14="http://schemas.microsoft.com/office/powerpoint/2010/main" val="311394260"/>
-      </p:ext>
-    </p:extLst>
   </p:cSld>
   <p:clrMapOvr>
     <a:masterClrMapping/>
   </p:clrMapOvr>
-  <p:timing>
-    <p:tnLst>
-      <p:par>
-        <p:cTn id="1" dur="indefinite" restart="never" nodeType="tmRoot"/>
-      </p:par>
-    </p:tnLst>
-  </p:timing>
 </p:sld>
 </file>
 
@@ -24955,13 +23984,7 @@
       </p:grpSpPr>
       <p:sp>
         <p:nvSpPr>
-          <p:cNvPr id="4" name="Rectangle 3">
-            <a:extLst>
-              <a:ext uri="{FF2B5EF4-FFF2-40B4-BE49-F238E27FC236}">
-                <a16:creationId xmlns="" xmlns:a16="http://schemas.microsoft.com/office/drawing/2014/main" id="{80D55A6F-7190-47FE-A830-5DF140C82A13}"/>
-              </a:ext>
-            </a:extLst>
-          </p:cNvPr>
+          <p:cNvPr id="4" name="Rectangle 3"/>
           <p:cNvSpPr/>
           <p:nvPr/>
         </p:nvSpPr>
@@ -25013,23 +24036,11 @@
       </p:sp>
       <p:graphicFrame>
         <p:nvGraphicFramePr>
-          <p:cNvPr id="5" name="Table 4">
-            <a:extLst>
-              <a:ext uri="{FF2B5EF4-FFF2-40B4-BE49-F238E27FC236}">
-                <a16:creationId xmlns="" xmlns:a16="http://schemas.microsoft.com/office/drawing/2014/main" id="{DAB01D05-BD51-A72C-B53D-FFDC1DF84F40}"/>
-              </a:ext>
-            </a:extLst>
-          </p:cNvPr>
+          <p:cNvPr id="5" name="Table 4"/>
           <p:cNvGraphicFramePr>
             <a:graphicFrameLocks noGrp="1"/>
           </p:cNvGraphicFramePr>
-          <p:nvPr>
-            <p:extLst>
-              <p:ext uri="{D42A27DB-BD31-4B8C-83A1-F6EECF244321}">
-                <p14:modId xmlns:p14="http://schemas.microsoft.com/office/powerpoint/2010/main" val="902124162"/>
-              </p:ext>
-            </p:extLst>
-          </p:nvPr>
+          <p:nvPr/>
         </p:nvGraphicFramePr>
         <p:xfrm>
           <a:off x="1431235" y="826091"/>
@@ -25043,28 +24054,28 @@
                 <a:gridCol w="2613464">
                   <a:extLst>
                     <a:ext uri="{9D8B030D-6E8A-4147-A177-3AD203B41FA5}">
-                      <a16:colId xmlns="" xmlns:a16="http://schemas.microsoft.com/office/drawing/2014/main" val="2519532491"/>
+                      <a16:colId xmlns:a16="http://schemas.microsoft.com/office/drawing/2014/main" val="20000"/>
                     </a:ext>
                   </a:extLst>
                 </a:gridCol>
                 <a:gridCol w="1915558">
                   <a:extLst>
                     <a:ext uri="{9D8B030D-6E8A-4147-A177-3AD203B41FA5}">
-                      <a16:colId xmlns="" xmlns:a16="http://schemas.microsoft.com/office/drawing/2014/main" val="1105957055"/>
+                      <a16:colId xmlns:a16="http://schemas.microsoft.com/office/drawing/2014/main" val="20001"/>
                     </a:ext>
                   </a:extLst>
                 </a:gridCol>
                 <a:gridCol w="2065460">
                   <a:extLst>
                     <a:ext uri="{9D8B030D-6E8A-4147-A177-3AD203B41FA5}">
-                      <a16:colId xmlns="" xmlns:a16="http://schemas.microsoft.com/office/drawing/2014/main" val="1304593966"/>
+                      <a16:colId xmlns:a16="http://schemas.microsoft.com/office/drawing/2014/main" val="20002"/>
                     </a:ext>
                   </a:extLst>
                 </a:gridCol>
                 <a:gridCol w="1327005">
                   <a:extLst>
                     <a:ext uri="{9D8B030D-6E8A-4147-A177-3AD203B41FA5}">
-                      <a16:colId xmlns="" xmlns:a16="http://schemas.microsoft.com/office/drawing/2014/main" val="38524689"/>
+                      <a16:colId xmlns:a16="http://schemas.microsoft.com/office/drawing/2014/main" val="20003"/>
                     </a:ext>
                   </a:extLst>
                 </a:gridCol>
@@ -25324,7 +24335,7 @@
                 </a:tc>
                 <a:extLst>
                   <a:ext uri="{0D108BD9-81ED-4DB2-BD59-A6C34878D82A}">
-                    <a16:rowId xmlns="" xmlns:a16="http://schemas.microsoft.com/office/drawing/2014/main" val="3776122985"/>
+                    <a16:rowId xmlns:a16="http://schemas.microsoft.com/office/drawing/2014/main" val="10000"/>
                   </a:ext>
                 </a:extLst>
               </a:tr>
@@ -25559,7 +24570,7 @@
                 </a:tc>
                 <a:extLst>
                   <a:ext uri="{0D108BD9-81ED-4DB2-BD59-A6C34878D82A}">
-                    <a16:rowId xmlns="" xmlns:a16="http://schemas.microsoft.com/office/drawing/2014/main" val="1619403595"/>
+                    <a16:rowId xmlns:a16="http://schemas.microsoft.com/office/drawing/2014/main" val="10001"/>
                   </a:ext>
                 </a:extLst>
               </a:tr>
@@ -25770,7 +24781,7 @@
                 </a:tc>
                 <a:extLst>
                   <a:ext uri="{0D108BD9-81ED-4DB2-BD59-A6C34878D82A}">
-                    <a16:rowId xmlns="" xmlns:a16="http://schemas.microsoft.com/office/drawing/2014/main" val="1677633437"/>
+                    <a16:rowId xmlns:a16="http://schemas.microsoft.com/office/drawing/2014/main" val="10002"/>
                   </a:ext>
                 </a:extLst>
               </a:tr>
@@ -25981,7 +24992,7 @@
                 </a:tc>
                 <a:extLst>
                   <a:ext uri="{0D108BD9-81ED-4DB2-BD59-A6C34878D82A}">
-                    <a16:rowId xmlns="" xmlns:a16="http://schemas.microsoft.com/office/drawing/2014/main" val="3891004803"/>
+                    <a16:rowId xmlns:a16="http://schemas.microsoft.com/office/drawing/2014/main" val="10003"/>
                   </a:ext>
                 </a:extLst>
               </a:tr>
@@ -26192,7 +25203,7 @@
                 </a:tc>
                 <a:extLst>
                   <a:ext uri="{0D108BD9-81ED-4DB2-BD59-A6C34878D82A}">
-                    <a16:rowId xmlns="" xmlns:a16="http://schemas.microsoft.com/office/drawing/2014/main" val="643475662"/>
+                    <a16:rowId xmlns:a16="http://schemas.microsoft.com/office/drawing/2014/main" val="10004"/>
                   </a:ext>
                 </a:extLst>
               </a:tr>
@@ -26403,7 +25414,7 @@
                 </a:tc>
                 <a:extLst>
                   <a:ext uri="{0D108BD9-81ED-4DB2-BD59-A6C34878D82A}">
-                    <a16:rowId xmlns="" xmlns:a16="http://schemas.microsoft.com/office/drawing/2014/main" val="290173377"/>
+                    <a16:rowId xmlns:a16="http://schemas.microsoft.com/office/drawing/2014/main" val="10005"/>
                   </a:ext>
                 </a:extLst>
               </a:tr>
@@ -26614,7 +25625,7 @@
                 </a:tc>
                 <a:extLst>
                   <a:ext uri="{0D108BD9-81ED-4DB2-BD59-A6C34878D82A}">
-                    <a16:rowId xmlns="" xmlns:a16="http://schemas.microsoft.com/office/drawing/2014/main" val="1234217984"/>
+                    <a16:rowId xmlns:a16="http://schemas.microsoft.com/office/drawing/2014/main" val="10006"/>
                   </a:ext>
                 </a:extLst>
               </a:tr>
@@ -26825,7 +25836,7 @@
                 </a:tc>
                 <a:extLst>
                   <a:ext uri="{0D108BD9-81ED-4DB2-BD59-A6C34878D82A}">
-                    <a16:rowId xmlns="" xmlns:a16="http://schemas.microsoft.com/office/drawing/2014/main" val="2681290921"/>
+                    <a16:rowId xmlns:a16="http://schemas.microsoft.com/office/drawing/2014/main" val="10007"/>
                   </a:ext>
                 </a:extLst>
               </a:tr>
@@ -27036,7 +26047,7 @@
                 </a:tc>
                 <a:extLst>
                   <a:ext uri="{0D108BD9-81ED-4DB2-BD59-A6C34878D82A}">
-                    <a16:rowId xmlns="" xmlns:a16="http://schemas.microsoft.com/office/drawing/2014/main" val="3155150148"/>
+                    <a16:rowId xmlns:a16="http://schemas.microsoft.com/office/drawing/2014/main" val="10008"/>
                   </a:ext>
                 </a:extLst>
               </a:tr>
@@ -27247,7 +26258,7 @@
                 </a:tc>
                 <a:extLst>
                   <a:ext uri="{0D108BD9-81ED-4DB2-BD59-A6C34878D82A}">
-                    <a16:rowId xmlns="" xmlns:a16="http://schemas.microsoft.com/office/drawing/2014/main" val="1030272401"/>
+                    <a16:rowId xmlns:a16="http://schemas.microsoft.com/office/drawing/2014/main" val="10009"/>
                   </a:ext>
                 </a:extLst>
               </a:tr>
@@ -27458,7 +26469,7 @@
                 </a:tc>
                 <a:extLst>
                   <a:ext uri="{0D108BD9-81ED-4DB2-BD59-A6C34878D82A}">
-                    <a16:rowId xmlns="" xmlns:a16="http://schemas.microsoft.com/office/drawing/2014/main" val="2967316848"/>
+                    <a16:rowId xmlns:a16="http://schemas.microsoft.com/office/drawing/2014/main" val="10010"/>
                   </a:ext>
                 </a:extLst>
               </a:tr>
@@ -27669,7 +26680,7 @@
                 </a:tc>
                 <a:extLst>
                   <a:ext uri="{0D108BD9-81ED-4DB2-BD59-A6C34878D82A}">
-                    <a16:rowId xmlns="" xmlns:a16="http://schemas.microsoft.com/office/drawing/2014/main" val="926033649"/>
+                    <a16:rowId xmlns:a16="http://schemas.microsoft.com/office/drawing/2014/main" val="10011"/>
                   </a:ext>
                 </a:extLst>
               </a:tr>
@@ -27880,7 +26891,7 @@
                 </a:tc>
                 <a:extLst>
                   <a:ext uri="{0D108BD9-81ED-4DB2-BD59-A6C34878D82A}">
-                    <a16:rowId xmlns="" xmlns:a16="http://schemas.microsoft.com/office/drawing/2014/main" val="1537509383"/>
+                    <a16:rowId xmlns:a16="http://schemas.microsoft.com/office/drawing/2014/main" val="10012"/>
                   </a:ext>
                 </a:extLst>
               </a:tr>
@@ -28091,7 +27102,7 @@
                 </a:tc>
                 <a:extLst>
                   <a:ext uri="{0D108BD9-81ED-4DB2-BD59-A6C34878D82A}">
-                    <a16:rowId xmlns="" xmlns:a16="http://schemas.microsoft.com/office/drawing/2014/main" val="289839066"/>
+                    <a16:rowId xmlns:a16="http://schemas.microsoft.com/office/drawing/2014/main" val="10013"/>
                   </a:ext>
                 </a:extLst>
               </a:tr>
@@ -28302,7 +27313,7 @@
                 </a:tc>
                 <a:extLst>
                   <a:ext uri="{0D108BD9-81ED-4DB2-BD59-A6C34878D82A}">
-                    <a16:rowId xmlns="" xmlns:a16="http://schemas.microsoft.com/office/drawing/2014/main" val="695022055"/>
+                    <a16:rowId xmlns:a16="http://schemas.microsoft.com/office/drawing/2014/main" val="10014"/>
                   </a:ext>
                 </a:extLst>
               </a:tr>
@@ -28513,7 +27524,7 @@
                 </a:tc>
                 <a:extLst>
                   <a:ext uri="{0D108BD9-81ED-4DB2-BD59-A6C34878D82A}">
-                    <a16:rowId xmlns="" xmlns:a16="http://schemas.microsoft.com/office/drawing/2014/main" val="3543256962"/>
+                    <a16:rowId xmlns:a16="http://schemas.microsoft.com/office/drawing/2014/main" val="10015"/>
                   </a:ext>
                 </a:extLst>
               </a:tr>
@@ -28724,7 +27735,7 @@
                 </a:tc>
                 <a:extLst>
                   <a:ext uri="{0D108BD9-81ED-4DB2-BD59-A6C34878D82A}">
-                    <a16:rowId xmlns="" xmlns:a16="http://schemas.microsoft.com/office/drawing/2014/main" val="2072373958"/>
+                    <a16:rowId xmlns:a16="http://schemas.microsoft.com/office/drawing/2014/main" val="10016"/>
                   </a:ext>
                 </a:extLst>
               </a:tr>
@@ -28935,7 +27946,7 @@
                 </a:tc>
                 <a:extLst>
                   <a:ext uri="{0D108BD9-81ED-4DB2-BD59-A6C34878D82A}">
-                    <a16:rowId xmlns="" xmlns:a16="http://schemas.microsoft.com/office/drawing/2014/main" val="1324711308"/>
+                    <a16:rowId xmlns:a16="http://schemas.microsoft.com/office/drawing/2014/main" val="10017"/>
                   </a:ext>
                 </a:extLst>
               </a:tr>
@@ -29146,7 +28157,7 @@
                 </a:tc>
                 <a:extLst>
                   <a:ext uri="{0D108BD9-81ED-4DB2-BD59-A6C34878D82A}">
-                    <a16:rowId xmlns="" xmlns:a16="http://schemas.microsoft.com/office/drawing/2014/main" val="2118362667"/>
+                    <a16:rowId xmlns:a16="http://schemas.microsoft.com/office/drawing/2014/main" val="10018"/>
                   </a:ext>
                 </a:extLst>
               </a:tr>
@@ -29357,7 +28368,7 @@
                 </a:tc>
                 <a:extLst>
                   <a:ext uri="{0D108BD9-81ED-4DB2-BD59-A6C34878D82A}">
-                    <a16:rowId xmlns="" xmlns:a16="http://schemas.microsoft.com/office/drawing/2014/main" val="977234531"/>
+                    <a16:rowId xmlns:a16="http://schemas.microsoft.com/office/drawing/2014/main" val="10019"/>
                   </a:ext>
                 </a:extLst>
               </a:tr>
@@ -29568,7 +28579,7 @@
                 </a:tc>
                 <a:extLst>
                   <a:ext uri="{0D108BD9-81ED-4DB2-BD59-A6C34878D82A}">
-                    <a16:rowId xmlns="" xmlns:a16="http://schemas.microsoft.com/office/drawing/2014/main" val="3956454285"/>
+                    <a16:rowId xmlns:a16="http://schemas.microsoft.com/office/drawing/2014/main" val="10020"/>
                   </a:ext>
                 </a:extLst>
               </a:tr>
@@ -29779,7 +28790,7 @@
                 </a:tc>
                 <a:extLst>
                   <a:ext uri="{0D108BD9-81ED-4DB2-BD59-A6C34878D82A}">
-                    <a16:rowId xmlns="" xmlns:a16="http://schemas.microsoft.com/office/drawing/2014/main" val="3029139045"/>
+                    <a16:rowId xmlns:a16="http://schemas.microsoft.com/office/drawing/2014/main" val="10021"/>
                   </a:ext>
                 </a:extLst>
               </a:tr>
@@ -29990,7 +29001,7 @@
                 </a:tc>
                 <a:extLst>
                   <a:ext uri="{0D108BD9-81ED-4DB2-BD59-A6C34878D82A}">
-                    <a16:rowId xmlns="" xmlns:a16="http://schemas.microsoft.com/office/drawing/2014/main" val="736130140"/>
+                    <a16:rowId xmlns:a16="http://schemas.microsoft.com/office/drawing/2014/main" val="10022"/>
                   </a:ext>
                 </a:extLst>
               </a:tr>
@@ -30201,7 +29212,7 @@
                 </a:tc>
                 <a:extLst>
                   <a:ext uri="{0D108BD9-81ED-4DB2-BD59-A6C34878D82A}">
-                    <a16:rowId xmlns="" xmlns:a16="http://schemas.microsoft.com/office/drawing/2014/main" val="971251394"/>
+                    <a16:rowId xmlns:a16="http://schemas.microsoft.com/office/drawing/2014/main" val="10023"/>
                   </a:ext>
                 </a:extLst>
               </a:tr>
@@ -30412,7 +29423,7 @@
                 </a:tc>
                 <a:extLst>
                   <a:ext uri="{0D108BD9-81ED-4DB2-BD59-A6C34878D82A}">
-                    <a16:rowId xmlns="" xmlns:a16="http://schemas.microsoft.com/office/drawing/2014/main" val="3482516569"/>
+                    <a16:rowId xmlns:a16="http://schemas.microsoft.com/office/drawing/2014/main" val="10024"/>
                   </a:ext>
                 </a:extLst>
               </a:tr>
@@ -30623,7 +29634,7 @@
                 </a:tc>
                 <a:extLst>
                   <a:ext uri="{0D108BD9-81ED-4DB2-BD59-A6C34878D82A}">
-                    <a16:rowId xmlns="" xmlns:a16="http://schemas.microsoft.com/office/drawing/2014/main" val="426959131"/>
+                    <a16:rowId xmlns:a16="http://schemas.microsoft.com/office/drawing/2014/main" val="10025"/>
                   </a:ext>
                 </a:extLst>
               </a:tr>
@@ -30834,7 +29845,7 @@
                 </a:tc>
                 <a:extLst>
                   <a:ext uri="{0D108BD9-81ED-4DB2-BD59-A6C34878D82A}">
-                    <a16:rowId xmlns="" xmlns:a16="http://schemas.microsoft.com/office/drawing/2014/main" val="3491597864"/>
+                    <a16:rowId xmlns:a16="http://schemas.microsoft.com/office/drawing/2014/main" val="10026"/>
                   </a:ext>
                 </a:extLst>
               </a:tr>
@@ -31069,7 +30080,7 @@
                 </a:tc>
                 <a:extLst>
                   <a:ext uri="{0D108BD9-81ED-4DB2-BD59-A6C34878D82A}">
-                    <a16:rowId xmlns="" xmlns:a16="http://schemas.microsoft.com/office/drawing/2014/main" val="2504006989"/>
+                    <a16:rowId xmlns:a16="http://schemas.microsoft.com/office/drawing/2014/main" val="10027"/>
                   </a:ext>
                 </a:extLst>
               </a:tr>
@@ -31078,22 +30089,10 @@
         </a:graphic>
       </p:graphicFrame>
     </p:spTree>
-    <p:extLst>
-      <p:ext uri="{BB962C8B-B14F-4D97-AF65-F5344CB8AC3E}">
-        <p14:creationId xmlns:p14="http://schemas.microsoft.com/office/powerpoint/2010/main" val="2135066858"/>
-      </p:ext>
-    </p:extLst>
   </p:cSld>
   <p:clrMapOvr>
     <a:masterClrMapping/>
   </p:clrMapOvr>
-  <p:timing>
-    <p:tnLst>
-      <p:par>
-        <p:cTn id="1" dur="indefinite" restart="never" nodeType="tmRoot"/>
-      </p:par>
-    </p:tnLst>
-  </p:timing>
 </p:sld>
 </file>
 
@@ -31124,26 +30123,11 @@
       </p:grpSpPr>
       <p:sp>
         <p:nvSpPr>
-          <p:cNvPr id="8" name="Rectangle 7">
-            <a:extLst>
-              <a:ext uri="{FF2B5EF4-FFF2-40B4-BE49-F238E27FC236}">
-                <a16:creationId xmlns="" xmlns:a16="http://schemas.microsoft.com/office/drawing/2014/main" id="{70120F84-A866-4D9F-8B1C-9120A013D654}"/>
-              </a:ext>
-              <a:ext uri="{C183D7F6-B498-43B3-948B-1728B52AA6E4}">
-                <adec:decorative xmlns="" xmlns:adec="http://schemas.microsoft.com/office/drawing/2017/decorative" val="1"/>
-              </a:ext>
-            </a:extLst>
-          </p:cNvPr>
+          <p:cNvPr id="8" name="Rectangle 7"/>
           <p:cNvSpPr>
             <a:spLocks noGrp="1" noRot="1" noChangeAspect="1" noMove="1" noResize="1" noEditPoints="1" noAdjustHandles="1" noChangeArrowheads="1" noChangeShapeType="1" noTextEdit="1"/>
           </p:cNvSpPr>
-          <p:nvPr>
-            <p:extLst>
-              <p:ext uri="{386F3935-93C4-4BCD-93E2-E3B085C9AB24}">
-                <p16:designElem xmlns="" xmlns:p16="http://schemas.microsoft.com/office/powerpoint/2015/main" val="1"/>
-              </p:ext>
-            </p:extLst>
-          </p:nvPr>
+          <p:nvPr/>
         </p:nvSpPr>
         <p:spPr>
           <a:xfrm>
@@ -31178,9 +30162,6 @@
         </p:style>
         <p:txBody>
           <a:bodyPr rot="0" spcFirstLastPara="0" vert="horz" wrap="square" lIns="91440" tIns="45720" rIns="91440" bIns="45720" numCol="1" spcCol="0" rtlCol="0" fromWordArt="0" anchor="ctr" anchorCtr="0" forceAA="0" compatLnSpc="1">
-            <a:prstTxWarp prst="textNoShape">
-              <a:avLst/>
-            </a:prstTxWarp>
             <a:noAutofit/>
           </a:bodyPr>
           <a:lstStyle>
@@ -31293,7 +30274,6 @@
               <a:buSzTx/>
               <a:buFontTx/>
               <a:buNone/>
-              <a:tabLst/>
               <a:defRPr/>
             </a:pPr>
             <a:endParaRPr kumimoji="0" lang="en-US" sz="1800" b="0" i="0" u="none" strike="noStrike" kern="1200" cap="none" spc="0" normalizeH="0" baseline="0" noProof="0">
@@ -31315,26 +30295,11 @@
       </p:sp>
       <p:sp useBgFill="1">
         <p:nvSpPr>
-          <p:cNvPr id="10" name="Rectangle 9">
-            <a:extLst>
-              <a:ext uri="{FF2B5EF4-FFF2-40B4-BE49-F238E27FC236}">
-                <a16:creationId xmlns="" xmlns:a16="http://schemas.microsoft.com/office/drawing/2014/main" id="{252FEFEF-6AC0-46B6-AC09-11FC56196FA4}"/>
-              </a:ext>
-              <a:ext uri="{C183D7F6-B498-43B3-948B-1728B52AA6E4}">
-                <adec:decorative xmlns="" xmlns:adec="http://schemas.microsoft.com/office/drawing/2017/decorative" val="1"/>
-              </a:ext>
-            </a:extLst>
-          </p:cNvPr>
+          <p:cNvPr id="10" name="Rectangle 9"/>
           <p:cNvSpPr>
             <a:spLocks noGrp="1" noRot="1" noChangeAspect="1" noMove="1" noResize="1" noEditPoints="1" noAdjustHandles="1" noChangeArrowheads="1" noChangeShapeType="1" noTextEdit="1"/>
           </p:cNvSpPr>
-          <p:nvPr>
-            <p:extLst>
-              <p:ext uri="{386F3935-93C4-4BCD-93E2-E3B085C9AB24}">
-                <p16:designElem xmlns="" xmlns:p16="http://schemas.microsoft.com/office/powerpoint/2015/main" val="1"/>
-              </p:ext>
-            </p:extLst>
-          </p:nvPr>
+          <p:nvPr/>
         </p:nvSpPr>
         <p:spPr>
           <a:xfrm>
@@ -31370,7 +30335,6 @@
               <a:buSzTx/>
               <a:buFontTx/>
               <a:buNone/>
-              <a:tabLst/>
               <a:defRPr/>
             </a:pPr>
             <a:endParaRPr kumimoji="0" lang="en-US" sz="1800" b="0" i="0" u="none" strike="noStrike" kern="1200" cap="none" spc="0" normalizeH="0" baseline="0" noProof="0">
@@ -31392,13 +30356,7 @@
       </p:sp>
       <p:sp>
         <p:nvSpPr>
-          <p:cNvPr id="4" name="Rectangle 3">
-            <a:extLst>
-              <a:ext uri="{FF2B5EF4-FFF2-40B4-BE49-F238E27FC236}">
-                <a16:creationId xmlns="" xmlns:a16="http://schemas.microsoft.com/office/drawing/2014/main" id="{80D55A6F-7190-47FE-A830-5DF140C82A13}"/>
-              </a:ext>
-            </a:extLst>
-          </p:cNvPr>
+          <p:cNvPr id="4" name="Rectangle 3"/>
           <p:cNvSpPr/>
           <p:nvPr/>
         </p:nvSpPr>
@@ -31450,7 +30408,6 @@
               <a:buSzTx/>
               <a:buFontTx/>
               <a:buNone/>
-              <a:tabLst/>
               <a:defRPr/>
             </a:pPr>
             <a:r>
@@ -31475,13 +30432,7 @@
       </p:sp>
       <p:sp>
         <p:nvSpPr>
-          <p:cNvPr id="5" name="Rectangle 4">
-            <a:extLst>
-              <a:ext uri="{FF2B5EF4-FFF2-40B4-BE49-F238E27FC236}">
-                <a16:creationId xmlns="" xmlns:a16="http://schemas.microsoft.com/office/drawing/2014/main" id="{683B44C2-FA59-4A22-936C-6C1B0CD162EA}"/>
-              </a:ext>
-            </a:extLst>
-          </p:cNvPr>
+          <p:cNvPr id="5" name="Rectangle 4"/>
           <p:cNvSpPr/>
           <p:nvPr/>
         </p:nvSpPr>
@@ -31526,7 +30477,6 @@
               <a:buSzTx/>
               <a:buFont typeface="Wingdings" panose="05000000000000000000" pitchFamily="2" charset="2"/>
               <a:buChar char="q"/>
-              <a:tabLst/>
               <a:defRPr/>
             </a:pPr>
             <a:r>
@@ -31562,7 +30512,6 @@
               <a:buSzTx/>
               <a:buFont typeface="Wingdings" panose="05000000000000000000" pitchFamily="2" charset="2"/>
               <a:buChar char="q"/>
-              <a:tabLst/>
               <a:defRPr/>
             </a:pPr>
             <a:r>
@@ -31598,7 +30547,6 @@
               <a:buSzTx/>
               <a:buFont typeface="Wingdings" panose="05000000000000000000" pitchFamily="2" charset="2"/>
               <a:buChar char="q"/>
-              <a:tabLst/>
               <a:defRPr/>
             </a:pPr>
             <a:r>
@@ -31634,7 +30582,6 @@
               <a:buSzTx/>
               <a:buFont typeface="Wingdings" panose="05000000000000000000" pitchFamily="2" charset="2"/>
               <a:buChar char="q"/>
-              <a:tabLst/>
               <a:defRPr/>
             </a:pPr>
             <a:r>
@@ -31670,7 +30617,6 @@
               <a:buSzTx/>
               <a:buFont typeface="Wingdings" panose="05000000000000000000" pitchFamily="2" charset="2"/>
               <a:buChar char="q"/>
-              <a:tabLst/>
               <a:defRPr/>
             </a:pPr>
             <a:r>
@@ -31713,7 +30659,6 @@
               <a:buSzTx/>
               <a:buFont typeface="Wingdings" panose="05000000000000000000" pitchFamily="2" charset="2"/>
               <a:buChar char="q"/>
-              <a:tabLst/>
               <a:defRPr/>
             </a:pPr>
             <a:r>
@@ -31766,7 +30711,6 @@
               <a:buSzTx/>
               <a:buFont typeface="Wingdings" panose="05000000000000000000" pitchFamily="2" charset="2"/>
               <a:buChar char="q"/>
-              <a:tabLst/>
               <a:defRPr/>
             </a:pPr>
             <a:r>
@@ -31809,7 +30753,6 @@
               <a:buSzTx/>
               <a:buFontTx/>
               <a:buNone/>
-              <a:tabLst/>
               <a:defRPr/>
             </a:pPr>
             <a:endParaRPr kumimoji="0" lang="fr-FR" sz="1800" b="0" i="0" u="none" strike="noStrike" kern="1200" cap="none" spc="0" normalizeH="0" baseline="0" noProof="0" dirty="0">
@@ -31830,22 +30773,10 @@
         </p:txBody>
       </p:sp>
     </p:spTree>
-    <p:extLst>
-      <p:ext uri="{BB962C8B-B14F-4D97-AF65-F5344CB8AC3E}">
-        <p14:creationId xmlns:p14="http://schemas.microsoft.com/office/powerpoint/2010/main" val="1806927491"/>
-      </p:ext>
-    </p:extLst>
   </p:cSld>
   <p:clrMapOvr>
     <a:masterClrMapping/>
   </p:clrMapOvr>
-  <p:timing>
-    <p:tnLst>
-      <p:par>
-        <p:cTn id="1" dur="indefinite" restart="never" nodeType="tmRoot"/>
-      </p:par>
-    </p:tnLst>
-  </p:timing>
 </p:sld>
 </file>
 
@@ -31868,13 +30799,7 @@
       </p:grpSpPr>
       <p:sp>
         <p:nvSpPr>
-          <p:cNvPr id="4" name="Rectangle 3">
-            <a:extLst>
-              <a:ext uri="{FF2B5EF4-FFF2-40B4-BE49-F238E27FC236}">
-                <a16:creationId xmlns="" xmlns:a16="http://schemas.microsoft.com/office/drawing/2014/main" id="{80D55A6F-7190-47FE-A830-5DF140C82A13}"/>
-              </a:ext>
-            </a:extLst>
-          </p:cNvPr>
+          <p:cNvPr id="4" name="Rectangle 3"/>
           <p:cNvSpPr/>
           <p:nvPr/>
         </p:nvSpPr>
@@ -31914,22 +30839,15 @@
           <a:p>
             <a:pPr algn="ctr"/>
             <a:r>
-              <a:rPr lang="fr-FR" sz="3600" b="1" dirty="0" smtClean="0"/>
+              <a:rPr lang="fr-FR" sz="3600" b="1" dirty="0"/>
               <a:t>Recommandations</a:t>
             </a:r>
-            <a:endParaRPr lang="fr-FR" sz="3600" b="1" dirty="0"/>
           </a:p>
         </p:txBody>
       </p:sp>
       <p:sp>
         <p:nvSpPr>
-          <p:cNvPr id="6" name="Rectangle 5">
-            <a:extLst>
-              <a:ext uri="{FF2B5EF4-FFF2-40B4-BE49-F238E27FC236}">
-                <a16:creationId xmlns="" xmlns:a16="http://schemas.microsoft.com/office/drawing/2014/main" id="{BEC12674-DD8F-45D5-8F52-E2EB6FFB668E}"/>
-              </a:ext>
-            </a:extLst>
-          </p:cNvPr>
+          <p:cNvPr id="6" name="Rectangle 5"/>
           <p:cNvSpPr/>
           <p:nvPr/>
         </p:nvSpPr>
@@ -31991,7 +30909,21 @@
                 <a:latin typeface="Calibri" panose="020F0502020204030204" pitchFamily="34" charset="0"/>
                 <a:cs typeface="Calibri" panose="020F0502020204030204" pitchFamily="34" charset="0"/>
               </a:rPr>
-              <a:t>Faire valider des cibles ajustées par le CCIA.</a:t>
+              <a:t>Faire valider des cibles ajustées par le CC</a:t>
+            </a:r>
+            <a:r>
+              <a:rPr lang="" altLang="fr-FR" sz="2400" dirty="0">
+                <a:latin typeface="Calibri" panose="020F0502020204030204" pitchFamily="34" charset="0"/>
+                <a:cs typeface="Calibri" panose="020F0502020204030204" pitchFamily="34" charset="0"/>
+              </a:rPr>
+              <a:t>PeV</a:t>
+            </a:r>
+            <a:r>
+              <a:rPr lang="fr-FR" sz="2400" dirty="0">
+                <a:latin typeface="Calibri" panose="020F0502020204030204" pitchFamily="34" charset="0"/>
+                <a:cs typeface="Calibri" panose="020F0502020204030204" pitchFamily="34" charset="0"/>
+              </a:rPr>
+              <a:t>.</a:t>
             </a:r>
           </a:p>
           <a:p>
@@ -32086,22 +31018,10 @@
         </p:txBody>
       </p:sp>
     </p:spTree>
-    <p:extLst>
-      <p:ext uri="{BB962C8B-B14F-4D97-AF65-F5344CB8AC3E}">
-        <p14:creationId xmlns:p14="http://schemas.microsoft.com/office/powerpoint/2010/main" val="666765850"/>
-      </p:ext>
-    </p:extLst>
   </p:cSld>
   <p:clrMapOvr>
     <a:masterClrMapping/>
   </p:clrMapOvr>
-  <p:timing>
-    <p:tnLst>
-      <p:par>
-        <p:cTn id="1" dur="indefinite" restart="never" nodeType="tmRoot"/>
-      </p:par>
-    </p:tnLst>
-  </p:timing>
 </p:sld>
 </file>
 
@@ -32132,26 +31052,11 @@
       </p:grpSpPr>
       <p:sp>
         <p:nvSpPr>
-          <p:cNvPr id="8" name="Rectangle 7">
-            <a:extLst>
-              <a:ext uri="{FF2B5EF4-FFF2-40B4-BE49-F238E27FC236}">
-                <a16:creationId xmlns="" xmlns:a16="http://schemas.microsoft.com/office/drawing/2014/main" id="{70120F84-A866-4D9F-8B1C-9120A013D654}"/>
-              </a:ext>
-              <a:ext uri="{C183D7F6-B498-43B3-948B-1728B52AA6E4}">
-                <adec:decorative xmlns="" xmlns:adec="http://schemas.microsoft.com/office/drawing/2017/decorative" val="1"/>
-              </a:ext>
-            </a:extLst>
-          </p:cNvPr>
+          <p:cNvPr id="8" name="Rectangle 7"/>
           <p:cNvSpPr>
             <a:spLocks noGrp="1" noRot="1" noChangeAspect="1" noMove="1" noResize="1" noEditPoints="1" noAdjustHandles="1" noChangeArrowheads="1" noChangeShapeType="1" noTextEdit="1"/>
           </p:cNvSpPr>
-          <p:nvPr>
-            <p:extLst>
-              <p:ext uri="{386F3935-93C4-4BCD-93E2-E3B085C9AB24}">
-                <p16:designElem xmlns="" xmlns:p16="http://schemas.microsoft.com/office/powerpoint/2015/main" val="1"/>
-              </p:ext>
-            </p:extLst>
-          </p:nvPr>
+          <p:nvPr/>
         </p:nvSpPr>
         <p:spPr>
           <a:xfrm>
@@ -32186,9 +31091,6 @@
         </p:style>
         <p:txBody>
           <a:bodyPr rot="0" spcFirstLastPara="0" vert="horz" wrap="square" lIns="91440" tIns="45720" rIns="91440" bIns="45720" numCol="1" spcCol="0" rtlCol="0" fromWordArt="0" anchor="ctr" anchorCtr="0" forceAA="0" compatLnSpc="1">
-            <a:prstTxWarp prst="textNoShape">
-              <a:avLst/>
-            </a:prstTxWarp>
             <a:noAutofit/>
           </a:bodyPr>
           <a:lstStyle>
@@ -32294,26 +31196,11 @@
       </p:sp>
       <p:sp useBgFill="1">
         <p:nvSpPr>
-          <p:cNvPr id="10" name="Rectangle 9">
-            <a:extLst>
-              <a:ext uri="{FF2B5EF4-FFF2-40B4-BE49-F238E27FC236}">
-                <a16:creationId xmlns="" xmlns:a16="http://schemas.microsoft.com/office/drawing/2014/main" id="{252FEFEF-6AC0-46B6-AC09-11FC56196FA4}"/>
-              </a:ext>
-              <a:ext uri="{C183D7F6-B498-43B3-948B-1728B52AA6E4}">
-                <adec:decorative xmlns="" xmlns:adec="http://schemas.microsoft.com/office/drawing/2017/decorative" val="1"/>
-              </a:ext>
-            </a:extLst>
-          </p:cNvPr>
+          <p:cNvPr id="10" name="Rectangle 9"/>
           <p:cNvSpPr>
             <a:spLocks noGrp="1" noRot="1" noChangeAspect="1" noMove="1" noResize="1" noEditPoints="1" noAdjustHandles="1" noChangeArrowheads="1" noChangeShapeType="1" noTextEdit="1"/>
           </p:cNvSpPr>
-          <p:nvPr>
-            <p:extLst>
-              <p:ext uri="{386F3935-93C4-4BCD-93E2-E3B085C9AB24}">
-                <p16:designElem xmlns="" xmlns:p16="http://schemas.microsoft.com/office/powerpoint/2015/main" val="1"/>
-              </p:ext>
-            </p:extLst>
-          </p:nvPr>
+          <p:nvPr/>
         </p:nvSpPr>
         <p:spPr>
           <a:xfrm>
@@ -32341,13 +31228,7 @@
       </p:sp>
       <p:sp>
         <p:nvSpPr>
-          <p:cNvPr id="4" name="Rectangle 3">
-            <a:extLst>
-              <a:ext uri="{FF2B5EF4-FFF2-40B4-BE49-F238E27FC236}">
-                <a16:creationId xmlns="" xmlns:a16="http://schemas.microsoft.com/office/drawing/2014/main" id="{80D55A6F-7190-47FE-A830-5DF140C82A13}"/>
-              </a:ext>
-            </a:extLst>
-          </p:cNvPr>
+          <p:cNvPr id="4" name="Rectangle 3"/>
           <p:cNvSpPr/>
           <p:nvPr/>
         </p:nvSpPr>
@@ -32395,13 +31276,7 @@
       </p:sp>
       <p:sp>
         <p:nvSpPr>
-          <p:cNvPr id="5" name="Rectangle 4">
-            <a:extLst>
-              <a:ext uri="{FF2B5EF4-FFF2-40B4-BE49-F238E27FC236}">
-                <a16:creationId xmlns="" xmlns:a16="http://schemas.microsoft.com/office/drawing/2014/main" id="{683B44C2-FA59-4A22-936C-6C1B0CD162EA}"/>
-              </a:ext>
-            </a:extLst>
-          </p:cNvPr>
+          <p:cNvPr id="5" name="Rectangle 4"/>
           <p:cNvSpPr/>
           <p:nvPr/>
         </p:nvSpPr>
@@ -32526,10 +31401,6 @@
               </a:rPr>
               <a:t>Janvier-Septembre 2024: </a:t>
             </a:r>
-            <a:endParaRPr lang="fr-FR" sz="2400" dirty="0" smtClean="0">
-              <a:latin typeface="Calibri" panose="020F0502020204030204" pitchFamily="34" charset="0"/>
-              <a:cs typeface="Calibri" panose="020F0502020204030204" pitchFamily="34" charset="0"/>
-            </a:endParaRPr>
           </a:p>
           <a:p>
             <a:pPr>
@@ -32551,16 +31422,6 @@
               <a:buChar char="ü"/>
             </a:pPr>
             <a:r>
-              <a:rPr lang="fr-FR" sz="2400" dirty="0" smtClean="0">
-                <a:solidFill>
-                  <a:schemeClr val="tx1"/>
-                </a:solidFill>
-                <a:latin typeface="Calibri" panose="020F0502020204030204" pitchFamily="34" charset="0"/>
-                <a:cs typeface="Calibri" panose="020F0502020204030204" pitchFamily="34" charset="0"/>
-              </a:rPr>
-              <a:t>7 </a:t>
-            </a:r>
-            <a:r>
               <a:rPr lang="fr-FR" sz="2400" dirty="0">
                 <a:solidFill>
                   <a:schemeClr val="tx1"/>
@@ -32568,7 +31429,7 @@
                 <a:latin typeface="Calibri" panose="020F0502020204030204" pitchFamily="34" charset="0"/>
                 <a:cs typeface="Calibri" panose="020F0502020204030204" pitchFamily="34" charset="0"/>
               </a:rPr>
-              <a:t>provinces (35 %) avec au moins 30 % de ZS avec une CV Penta 3 &lt;80 %</a:t>
+              <a:t>7 provinces (35 %) avec au moins 30 % de ZS avec une CV Penta 3 &lt;80 %</a:t>
             </a:r>
           </a:p>
           <a:p>
@@ -32587,20 +31448,10 @@
                 <a:latin typeface="Calibri" panose="020F0502020204030204" pitchFamily="34" charset="0"/>
                 <a:cs typeface="Calibri" panose="020F0502020204030204" pitchFamily="34" charset="0"/>
               </a:rPr>
-              <a:t>x</a:t>
+              <a:t>xx provinces sur 26 (soit 27 %) avec moins de 10 % de ZS ayant une CV </a:t>
             </a:r>
             <a:r>
-              <a:rPr lang="fr-FR" sz="2400" dirty="0" smtClean="0">
-                <a:solidFill>
-                  <a:schemeClr val="bg1"/>
-                </a:solidFill>
-                <a:latin typeface="Calibri" panose="020F0502020204030204" pitchFamily="34" charset="0"/>
-                <a:cs typeface="Calibri" panose="020F0502020204030204" pitchFamily="34" charset="0"/>
-              </a:rPr>
-              <a:t>x provinces sur 26 (soit 27 %) avec moins de 10 % de ZS ayant une CV </a:t>
-            </a:r>
-            <a:r>
-              <a:rPr lang="fr-FR" sz="2400" dirty="0" err="1" smtClean="0">
+              <a:rPr lang="fr-FR" sz="2400" dirty="0" err="1">
                 <a:solidFill>
                   <a:schemeClr val="bg1"/>
                 </a:solidFill>
@@ -32610,7 +31461,7 @@
               <a:t>adm</a:t>
             </a:r>
             <a:r>
-              <a:rPr lang="fr-FR" sz="2400" dirty="0" smtClean="0">
+              <a:rPr lang="fr-FR" sz="2400" dirty="0">
                 <a:solidFill>
                   <a:schemeClr val="bg1"/>
                 </a:solidFill>
@@ -32633,24 +31484,17 @@
                 <a:latin typeface="Calibri" panose="020F0502020204030204" pitchFamily="34" charset="0"/>
                 <a:cs typeface="Calibri" panose="020F0502020204030204" pitchFamily="34" charset="0"/>
               </a:rPr>
-              <a:t>Nécessité</a:t>
+              <a:t>Nécessité d’ajuster les cibles du PEV de 2024 et 2025 afin de réduire l’écart entre les CV </a:t>
             </a:r>
             <a:r>
-              <a:rPr lang="fr-FR" sz="2400" dirty="0" smtClean="0">
-                <a:latin typeface="Calibri" panose="020F0502020204030204" pitchFamily="34" charset="0"/>
-                <a:cs typeface="Calibri" panose="020F0502020204030204" pitchFamily="34" charset="0"/>
-              </a:rPr>
-              <a:t> d’ajuster les cibles du PEV de 2024 et 2025 afin de réduire l’écart entre les CV </a:t>
-            </a:r>
-            <a:r>
-              <a:rPr lang="fr-FR" sz="2400" dirty="0" err="1" smtClean="0">
+              <a:rPr lang="fr-FR" sz="2400" dirty="0" err="1">
                 <a:latin typeface="Calibri" panose="020F0502020204030204" pitchFamily="34" charset="0"/>
                 <a:cs typeface="Calibri" panose="020F0502020204030204" pitchFamily="34" charset="0"/>
               </a:rPr>
               <a:t>admin</a:t>
             </a:r>
             <a:r>
-              <a:rPr lang="fr-FR" sz="2400" dirty="0" smtClean="0">
+              <a:rPr lang="fr-FR" sz="2400" dirty="0">
                 <a:latin typeface="Calibri" panose="020F0502020204030204" pitchFamily="34" charset="0"/>
                 <a:cs typeface="Calibri" panose="020F0502020204030204" pitchFamily="34" charset="0"/>
               </a:rPr>
@@ -32664,22 +31508,10 @@
         </p:txBody>
       </p:sp>
     </p:spTree>
-    <p:extLst>
-      <p:ext uri="{BB962C8B-B14F-4D97-AF65-F5344CB8AC3E}">
-        <p14:creationId xmlns:p14="http://schemas.microsoft.com/office/powerpoint/2010/main" val="115884726"/>
-      </p:ext>
-    </p:extLst>
   </p:cSld>
   <p:clrMapOvr>
     <a:masterClrMapping/>
   </p:clrMapOvr>
-  <p:timing>
-    <p:tnLst>
-      <p:par>
-        <p:cTn id="1" dur="indefinite" restart="never" nodeType="tmRoot"/>
-      </p:par>
-    </p:tnLst>
-  </p:timing>
 </p:sld>
 </file>
 
@@ -32710,26 +31542,11 @@
       </p:grpSpPr>
       <p:sp>
         <p:nvSpPr>
-          <p:cNvPr id="8" name="Rectangle 7">
-            <a:extLst>
-              <a:ext uri="{FF2B5EF4-FFF2-40B4-BE49-F238E27FC236}">
-                <a16:creationId xmlns="" xmlns:a16="http://schemas.microsoft.com/office/drawing/2014/main" id="{70120F84-A866-4D9F-8B1C-9120A013D654}"/>
-              </a:ext>
-              <a:ext uri="{C183D7F6-B498-43B3-948B-1728B52AA6E4}">
-                <adec:decorative xmlns="" xmlns:adec="http://schemas.microsoft.com/office/drawing/2017/decorative" val="1"/>
-              </a:ext>
-            </a:extLst>
-          </p:cNvPr>
+          <p:cNvPr id="8" name="Rectangle 7"/>
           <p:cNvSpPr>
             <a:spLocks noGrp="1" noRot="1" noChangeAspect="1" noMove="1" noResize="1" noEditPoints="1" noAdjustHandles="1" noChangeArrowheads="1" noChangeShapeType="1" noTextEdit="1"/>
           </p:cNvSpPr>
-          <p:nvPr>
-            <p:extLst>
-              <p:ext uri="{386F3935-93C4-4BCD-93E2-E3B085C9AB24}">
-                <p16:designElem xmlns="" xmlns:p16="http://schemas.microsoft.com/office/powerpoint/2015/main" val="1"/>
-              </p:ext>
-            </p:extLst>
-          </p:nvPr>
+          <p:nvPr/>
         </p:nvSpPr>
         <p:spPr>
           <a:xfrm>
@@ -32764,9 +31581,6 @@
         </p:style>
         <p:txBody>
           <a:bodyPr rot="0" spcFirstLastPara="0" vert="horz" wrap="square" lIns="91440" tIns="45720" rIns="91440" bIns="45720" numCol="1" spcCol="0" rtlCol="0" fromWordArt="0" anchor="ctr" anchorCtr="0" forceAA="0" compatLnSpc="1">
-            <a:prstTxWarp prst="textNoShape">
-              <a:avLst/>
-            </a:prstTxWarp>
             <a:noAutofit/>
           </a:bodyPr>
           <a:lstStyle>
@@ -32872,26 +31686,11 @@
       </p:sp>
       <p:sp useBgFill="1">
         <p:nvSpPr>
-          <p:cNvPr id="10" name="Rectangle 9">
-            <a:extLst>
-              <a:ext uri="{FF2B5EF4-FFF2-40B4-BE49-F238E27FC236}">
-                <a16:creationId xmlns="" xmlns:a16="http://schemas.microsoft.com/office/drawing/2014/main" id="{252FEFEF-6AC0-46B6-AC09-11FC56196FA4}"/>
-              </a:ext>
-              <a:ext uri="{C183D7F6-B498-43B3-948B-1728B52AA6E4}">
-                <adec:decorative xmlns="" xmlns:adec="http://schemas.microsoft.com/office/drawing/2017/decorative" val="1"/>
-              </a:ext>
-            </a:extLst>
-          </p:cNvPr>
+          <p:cNvPr id="10" name="Rectangle 9"/>
           <p:cNvSpPr>
             <a:spLocks noGrp="1" noRot="1" noChangeAspect="1" noMove="1" noResize="1" noEditPoints="1" noAdjustHandles="1" noChangeArrowheads="1" noChangeShapeType="1" noTextEdit="1"/>
           </p:cNvSpPr>
-          <p:nvPr>
-            <p:extLst>
-              <p:ext uri="{386F3935-93C4-4BCD-93E2-E3B085C9AB24}">
-                <p16:designElem xmlns="" xmlns:p16="http://schemas.microsoft.com/office/powerpoint/2015/main" val="1"/>
-              </p:ext>
-            </p:extLst>
-          </p:nvPr>
+          <p:nvPr/>
         </p:nvSpPr>
         <p:spPr>
           <a:xfrm>
@@ -32919,13 +31718,7 @@
       </p:sp>
       <p:sp>
         <p:nvSpPr>
-          <p:cNvPr id="4" name="Rectangle 3">
-            <a:extLst>
-              <a:ext uri="{FF2B5EF4-FFF2-40B4-BE49-F238E27FC236}">
-                <a16:creationId xmlns="" xmlns:a16="http://schemas.microsoft.com/office/drawing/2014/main" id="{80D55A6F-7190-47FE-A830-5DF140C82A13}"/>
-              </a:ext>
-            </a:extLst>
-          </p:cNvPr>
+          <p:cNvPr id="4" name="Rectangle 3"/>
           <p:cNvSpPr/>
           <p:nvPr/>
         </p:nvSpPr>
@@ -32973,13 +31766,7 @@
       </p:sp>
       <p:sp>
         <p:nvSpPr>
-          <p:cNvPr id="2" name="Rectangle 1">
-            <a:extLst>
-              <a:ext uri="{FF2B5EF4-FFF2-40B4-BE49-F238E27FC236}">
-                <a16:creationId xmlns="" xmlns:a16="http://schemas.microsoft.com/office/drawing/2014/main" id="{8487084C-31A5-4472-8BF7-8EE2508FD9FD}"/>
-              </a:ext>
-            </a:extLst>
-          </p:cNvPr>
+          <p:cNvPr id="2" name="Rectangle 1"/>
           <p:cNvSpPr/>
           <p:nvPr/>
         </p:nvSpPr>
@@ -33100,13 +31887,7 @@
       </p:sp>
       <p:sp>
         <p:nvSpPr>
-          <p:cNvPr id="3" name="Rectangle 2">
-            <a:extLst>
-              <a:ext uri="{FF2B5EF4-FFF2-40B4-BE49-F238E27FC236}">
-                <a16:creationId xmlns="" xmlns:a16="http://schemas.microsoft.com/office/drawing/2014/main" id="{5B7A9EC5-FCCF-4EBA-9181-20303A2677C1}"/>
-              </a:ext>
-            </a:extLst>
-          </p:cNvPr>
+          <p:cNvPr id="3" name="Rectangle 2"/>
           <p:cNvSpPr/>
           <p:nvPr/>
         </p:nvSpPr>
@@ -33290,22 +32071,10 @@
         </p:txBody>
       </p:sp>
     </p:spTree>
-    <p:extLst>
-      <p:ext uri="{BB962C8B-B14F-4D97-AF65-F5344CB8AC3E}">
-        <p14:creationId xmlns:p14="http://schemas.microsoft.com/office/powerpoint/2010/main" val="3605824073"/>
-      </p:ext>
-    </p:extLst>
   </p:cSld>
   <p:clrMapOvr>
     <a:masterClrMapping/>
   </p:clrMapOvr>
-  <p:timing>
-    <p:tnLst>
-      <p:par>
-        <p:cTn id="1" dur="indefinite" restart="never" nodeType="tmRoot"/>
-      </p:par>
-    </p:tnLst>
-  </p:timing>
 </p:sld>
 </file>
 
@@ -33336,26 +32105,11 @@
       </p:grpSpPr>
       <p:sp>
         <p:nvSpPr>
-          <p:cNvPr id="8" name="Rectangle 7">
-            <a:extLst>
-              <a:ext uri="{FF2B5EF4-FFF2-40B4-BE49-F238E27FC236}">
-                <a16:creationId xmlns="" xmlns:a16="http://schemas.microsoft.com/office/drawing/2014/main" id="{70120F84-A866-4D9F-8B1C-9120A013D654}"/>
-              </a:ext>
-              <a:ext uri="{C183D7F6-B498-43B3-948B-1728B52AA6E4}">
-                <adec:decorative xmlns="" xmlns:adec="http://schemas.microsoft.com/office/drawing/2017/decorative" val="1"/>
-              </a:ext>
-            </a:extLst>
-          </p:cNvPr>
+          <p:cNvPr id="8" name="Rectangle 7"/>
           <p:cNvSpPr>
             <a:spLocks noGrp="1" noRot="1" noChangeAspect="1" noMove="1" noResize="1" noEditPoints="1" noAdjustHandles="1" noChangeArrowheads="1" noChangeShapeType="1" noTextEdit="1"/>
           </p:cNvSpPr>
-          <p:nvPr>
-            <p:extLst>
-              <p:ext uri="{386F3935-93C4-4BCD-93E2-E3B085C9AB24}">
-                <p16:designElem xmlns="" xmlns:p16="http://schemas.microsoft.com/office/powerpoint/2015/main" val="1"/>
-              </p:ext>
-            </p:extLst>
-          </p:nvPr>
+          <p:nvPr/>
         </p:nvSpPr>
         <p:spPr>
           <a:xfrm>
@@ -33390,9 +32144,6 @@
         </p:style>
         <p:txBody>
           <a:bodyPr rot="0" spcFirstLastPara="0" vert="horz" wrap="square" lIns="91440" tIns="45720" rIns="91440" bIns="45720" numCol="1" spcCol="0" rtlCol="0" fromWordArt="0" anchor="ctr" anchorCtr="0" forceAA="0" compatLnSpc="1">
-            <a:prstTxWarp prst="textNoShape">
-              <a:avLst/>
-            </a:prstTxWarp>
             <a:noAutofit/>
           </a:bodyPr>
           <a:lstStyle>
@@ -33498,26 +32249,11 @@
       </p:sp>
       <p:sp useBgFill="1">
         <p:nvSpPr>
-          <p:cNvPr id="10" name="Rectangle 9">
-            <a:extLst>
-              <a:ext uri="{FF2B5EF4-FFF2-40B4-BE49-F238E27FC236}">
-                <a16:creationId xmlns="" xmlns:a16="http://schemas.microsoft.com/office/drawing/2014/main" id="{252FEFEF-6AC0-46B6-AC09-11FC56196FA4}"/>
-              </a:ext>
-              <a:ext uri="{C183D7F6-B498-43B3-948B-1728B52AA6E4}">
-                <adec:decorative xmlns="" xmlns:adec="http://schemas.microsoft.com/office/drawing/2017/decorative" val="1"/>
-              </a:ext>
-            </a:extLst>
-          </p:cNvPr>
+          <p:cNvPr id="10" name="Rectangle 9"/>
           <p:cNvSpPr>
             <a:spLocks noGrp="1" noRot="1" noChangeAspect="1" noMove="1" noResize="1" noEditPoints="1" noAdjustHandles="1" noChangeArrowheads="1" noChangeShapeType="1" noTextEdit="1"/>
           </p:cNvSpPr>
-          <p:nvPr>
-            <p:extLst>
-              <p:ext uri="{386F3935-93C4-4BCD-93E2-E3B085C9AB24}">
-                <p16:designElem xmlns="" xmlns:p16="http://schemas.microsoft.com/office/powerpoint/2015/main" val="1"/>
-              </p:ext>
-            </p:extLst>
-          </p:nvPr>
+          <p:nvPr/>
         </p:nvSpPr>
         <p:spPr>
           <a:xfrm>
@@ -33545,13 +32281,7 @@
       </p:sp>
       <p:sp>
         <p:nvSpPr>
-          <p:cNvPr id="4" name="Rectangle 3">
-            <a:extLst>
-              <a:ext uri="{FF2B5EF4-FFF2-40B4-BE49-F238E27FC236}">
-                <a16:creationId xmlns="" xmlns:a16="http://schemas.microsoft.com/office/drawing/2014/main" id="{80D55A6F-7190-47FE-A830-5DF140C82A13}"/>
-              </a:ext>
-            </a:extLst>
-          </p:cNvPr>
+          <p:cNvPr id="4" name="Rectangle 3"/>
           <p:cNvSpPr/>
           <p:nvPr/>
         </p:nvSpPr>
@@ -33599,13 +32329,7 @@
       </p:sp>
       <p:sp>
         <p:nvSpPr>
-          <p:cNvPr id="5" name="Rectangle 4">
-            <a:extLst>
-              <a:ext uri="{FF2B5EF4-FFF2-40B4-BE49-F238E27FC236}">
-                <a16:creationId xmlns="" xmlns:a16="http://schemas.microsoft.com/office/drawing/2014/main" id="{683B44C2-FA59-4A22-936C-6C1B0CD162EA}"/>
-              </a:ext>
-            </a:extLst>
-          </p:cNvPr>
+          <p:cNvPr id="5" name="Rectangle 4"/>
           <p:cNvSpPr/>
           <p:nvPr/>
         </p:nvSpPr>
@@ -33637,7 +32361,7 @@
           <a:lstStyle/>
           <a:p>
             <a:r>
-              <a:rPr lang="fr-FR" sz="2400" b="1" dirty="0" smtClean="0">
+              <a:rPr lang="fr-FR" sz="2400" b="1" dirty="0">
                 <a:latin typeface="Calibri" panose="020F0502020204030204" pitchFamily="34" charset="0"/>
                 <a:cs typeface="Calibri" panose="020F0502020204030204" pitchFamily="34" charset="0"/>
               </a:rPr>
@@ -33673,21 +32397,7 @@
                 <a:latin typeface="Calibri" panose="020F0502020204030204" pitchFamily="34" charset="0"/>
                 <a:cs typeface="Calibri" panose="020F0502020204030204" pitchFamily="34" charset="0"/>
               </a:rPr>
-              <a:t>Population des données sur le nombre d’enfants vaccinés (Penta 1 pour les </a:t>
-            </a:r>
-            <a:r>
-              <a:rPr lang="fr-FR" sz="2400" dirty="0" smtClean="0">
-                <a:latin typeface="Calibri" panose="020F0502020204030204" pitchFamily="34" charset="0"/>
-                <a:cs typeface="Calibri" panose="020F0502020204030204" pitchFamily="34" charset="0"/>
-              </a:rPr>
-              <a:t>nourrissons survivants </a:t>
-            </a:r>
-            <a:r>
-              <a:rPr lang="fr-FR" sz="2400" dirty="0">
-                <a:latin typeface="Calibri" panose="020F0502020204030204" pitchFamily="34" charset="0"/>
-                <a:cs typeface="Calibri" panose="020F0502020204030204" pitchFamily="34" charset="0"/>
-              </a:rPr>
-              <a:t>et BCG pour les naissances vivantes) et les résultats de l’ECV 2023.</a:t>
+              <a:t>Population des données sur le nombre d’enfants vaccinés (Penta 1 pour les nourrissons survivants et BCG pour les naissances vivantes) et les résultats de l’ECV 2023.</a:t>
             </a:r>
           </a:p>
           <a:p>
@@ -33696,16 +32406,12 @@
               <a:buChar char="q"/>
             </a:pPr>
             <a:r>
-              <a:rPr lang="fr-FR" sz="2400" dirty="0" smtClean="0">
+              <a:rPr lang="fr-FR" sz="2400" dirty="0">
                 <a:latin typeface="Calibri" panose="020F0502020204030204" pitchFamily="34" charset="0"/>
                 <a:cs typeface="Calibri" panose="020F0502020204030204" pitchFamily="34" charset="0"/>
               </a:rPr>
               <a:t>Hypothèses émises :</a:t>
             </a:r>
-            <a:endParaRPr lang="fr-FR" sz="2400" dirty="0">
-              <a:latin typeface="Calibri" panose="020F0502020204030204" pitchFamily="34" charset="0"/>
-              <a:cs typeface="Calibri" panose="020F0502020204030204" pitchFamily="34" charset="0"/>
-            </a:endParaRPr>
           </a:p>
           <a:p>
             <a:pPr marL="914400" lvl="1" indent="-457200">
@@ -33779,22 +32485,10 @@
         </p:txBody>
       </p:sp>
     </p:spTree>
-    <p:extLst>
-      <p:ext uri="{BB962C8B-B14F-4D97-AF65-F5344CB8AC3E}">
-        <p14:creationId xmlns:p14="http://schemas.microsoft.com/office/powerpoint/2010/main" val="465089167"/>
-      </p:ext>
-    </p:extLst>
   </p:cSld>
   <p:clrMapOvr>
     <a:masterClrMapping/>
   </p:clrMapOvr>
-  <p:timing>
-    <p:tnLst>
-      <p:par>
-        <p:cTn id="1" dur="indefinite" restart="never" nodeType="tmRoot"/>
-      </p:par>
-    </p:tnLst>
-  </p:timing>
 </p:sld>
 </file>
 
@@ -33825,26 +32519,11 @@
       </p:grpSpPr>
       <p:sp>
         <p:nvSpPr>
-          <p:cNvPr id="8" name="Rectangle 7">
-            <a:extLst>
-              <a:ext uri="{FF2B5EF4-FFF2-40B4-BE49-F238E27FC236}">
-                <a16:creationId xmlns="" xmlns:a16="http://schemas.microsoft.com/office/drawing/2014/main" id="{70120F84-A866-4D9F-8B1C-9120A013D654}"/>
-              </a:ext>
-              <a:ext uri="{C183D7F6-B498-43B3-948B-1728B52AA6E4}">
-                <adec:decorative xmlns="" xmlns:adec="http://schemas.microsoft.com/office/drawing/2017/decorative" val="1"/>
-              </a:ext>
-            </a:extLst>
-          </p:cNvPr>
+          <p:cNvPr id="8" name="Rectangle 7"/>
           <p:cNvSpPr>
             <a:spLocks noGrp="1" noRot="1" noChangeAspect="1" noMove="1" noResize="1" noEditPoints="1" noAdjustHandles="1" noChangeArrowheads="1" noChangeShapeType="1" noTextEdit="1"/>
           </p:cNvSpPr>
-          <p:nvPr>
-            <p:extLst>
-              <p:ext uri="{386F3935-93C4-4BCD-93E2-E3B085C9AB24}">
-                <p16:designElem xmlns="" xmlns:p16="http://schemas.microsoft.com/office/powerpoint/2015/main" val="1"/>
-              </p:ext>
-            </p:extLst>
-          </p:nvPr>
+          <p:nvPr/>
         </p:nvSpPr>
         <p:spPr>
           <a:xfrm>
@@ -33879,9 +32558,6 @@
         </p:style>
         <p:txBody>
           <a:bodyPr rot="0" spcFirstLastPara="0" vert="horz" wrap="square" lIns="91440" tIns="45720" rIns="91440" bIns="45720" numCol="1" spcCol="0" rtlCol="0" fromWordArt="0" anchor="ctr" anchorCtr="0" forceAA="0" compatLnSpc="1">
-            <a:prstTxWarp prst="textNoShape">
-              <a:avLst/>
-            </a:prstTxWarp>
             <a:noAutofit/>
           </a:bodyPr>
           <a:lstStyle>
@@ -33987,26 +32663,11 @@
       </p:sp>
       <p:sp useBgFill="1">
         <p:nvSpPr>
-          <p:cNvPr id="10" name="Rectangle 9">
-            <a:extLst>
-              <a:ext uri="{FF2B5EF4-FFF2-40B4-BE49-F238E27FC236}">
-                <a16:creationId xmlns="" xmlns:a16="http://schemas.microsoft.com/office/drawing/2014/main" id="{252FEFEF-6AC0-46B6-AC09-11FC56196FA4}"/>
-              </a:ext>
-              <a:ext uri="{C183D7F6-B498-43B3-948B-1728B52AA6E4}">
-                <adec:decorative xmlns="" xmlns:adec="http://schemas.microsoft.com/office/drawing/2017/decorative" val="1"/>
-              </a:ext>
-            </a:extLst>
-          </p:cNvPr>
+          <p:cNvPr id="10" name="Rectangle 9"/>
           <p:cNvSpPr>
             <a:spLocks noGrp="1" noRot="1" noChangeAspect="1" noMove="1" noResize="1" noEditPoints="1" noAdjustHandles="1" noChangeArrowheads="1" noChangeShapeType="1" noTextEdit="1"/>
           </p:cNvSpPr>
-          <p:nvPr>
-            <p:extLst>
-              <p:ext uri="{386F3935-93C4-4BCD-93E2-E3B085C9AB24}">
-                <p16:designElem xmlns="" xmlns:p16="http://schemas.microsoft.com/office/powerpoint/2015/main" val="1"/>
-              </p:ext>
-            </p:extLst>
-          </p:nvPr>
+          <p:nvPr/>
         </p:nvSpPr>
         <p:spPr>
           <a:xfrm>
@@ -34034,13 +32695,7 @@
       </p:sp>
       <p:sp>
         <p:nvSpPr>
-          <p:cNvPr id="4" name="Rectangle 3">
-            <a:extLst>
-              <a:ext uri="{FF2B5EF4-FFF2-40B4-BE49-F238E27FC236}">
-                <a16:creationId xmlns="" xmlns:a16="http://schemas.microsoft.com/office/drawing/2014/main" id="{80D55A6F-7190-47FE-A830-5DF140C82A13}"/>
-              </a:ext>
-            </a:extLst>
-          </p:cNvPr>
+          <p:cNvPr id="4" name="Rectangle 3"/>
           <p:cNvSpPr/>
           <p:nvPr/>
         </p:nvSpPr>
@@ -34088,13 +32743,7 @@
       </p:sp>
       <p:sp>
         <p:nvSpPr>
-          <p:cNvPr id="5" name="Rectangle 4">
-            <a:extLst>
-              <a:ext uri="{FF2B5EF4-FFF2-40B4-BE49-F238E27FC236}">
-                <a16:creationId xmlns="" xmlns:a16="http://schemas.microsoft.com/office/drawing/2014/main" id="{683B44C2-FA59-4A22-936C-6C1B0CD162EA}"/>
-              </a:ext>
-            </a:extLst>
-          </p:cNvPr>
+          <p:cNvPr id="5" name="Rectangle 4"/>
           <p:cNvSpPr/>
           <p:nvPr/>
         </p:nvSpPr>
@@ -34151,21 +32800,7 @@
                 <a:latin typeface="Calibri" panose="020F0502020204030204" pitchFamily="34" charset="0"/>
                 <a:cs typeface="Calibri" panose="020F0502020204030204" pitchFamily="34" charset="0"/>
               </a:rPr>
-              <a:t>Calcul de la population ajustée 2023: Vaccinés </a:t>
-            </a:r>
-            <a:r>
-              <a:rPr lang="fr-FR" sz="2000" dirty="0" smtClean="0">
-                <a:latin typeface="Calibri" panose="020F0502020204030204" pitchFamily="34" charset="0"/>
-                <a:cs typeface="Calibri" panose="020F0502020204030204" pitchFamily="34" charset="0"/>
-              </a:rPr>
-              <a:t>2023 / CV </a:t>
-            </a:r>
-            <a:r>
-              <a:rPr lang="fr-FR" sz="2000" dirty="0">
-                <a:latin typeface="Calibri" panose="020F0502020204030204" pitchFamily="34" charset="0"/>
-                <a:cs typeface="Calibri" panose="020F0502020204030204" pitchFamily="34" charset="0"/>
-              </a:rPr>
-              <a:t>ECV 2023.</a:t>
+              <a:t>Calcul de la population ajustée 2023: Vaccinés 2023 / CV ECV 2023.</a:t>
             </a:r>
           </a:p>
           <a:p>
@@ -34181,49 +32816,7 @@
                 <a:latin typeface="Calibri" panose="020F0502020204030204" pitchFamily="34" charset="0"/>
                 <a:cs typeface="Calibri" panose="020F0502020204030204" pitchFamily="34" charset="0"/>
               </a:rPr>
-              <a:t>Ajustement de la cible 2024: </a:t>
-            </a:r>
-            <a:r>
-              <a:rPr lang="fr-FR" sz="2000" dirty="0" smtClean="0">
-                <a:latin typeface="Calibri" panose="020F0502020204030204" pitchFamily="34" charset="0"/>
-                <a:cs typeface="Calibri" panose="020F0502020204030204" pitchFamily="34" charset="0"/>
-              </a:rPr>
-              <a:t>augmentation de 3</a:t>
-            </a:r>
-            <a:r>
-              <a:rPr lang="fr-FR" sz="2000" dirty="0">
-                <a:latin typeface="Calibri" panose="020F0502020204030204" pitchFamily="34" charset="0"/>
-                <a:cs typeface="Calibri" panose="020F0502020204030204" pitchFamily="34" charset="0"/>
-              </a:rPr>
-              <a:t>% </a:t>
-            </a:r>
-            <a:r>
-              <a:rPr lang="fr-FR" sz="2000" dirty="0" smtClean="0">
-                <a:latin typeface="Calibri" panose="020F0502020204030204" pitchFamily="34" charset="0"/>
-                <a:cs typeface="Calibri" panose="020F0502020204030204" pitchFamily="34" charset="0"/>
-              </a:rPr>
-              <a:t>de la </a:t>
-            </a:r>
-            <a:r>
-              <a:rPr lang="fr-FR" sz="2000" dirty="0">
-                <a:latin typeface="Calibri" panose="020F0502020204030204" pitchFamily="34" charset="0"/>
-                <a:cs typeface="Calibri" panose="020F0502020204030204" pitchFamily="34" charset="0"/>
-              </a:rPr>
-              <a:t>cible </a:t>
-            </a:r>
-            <a:r>
-              <a:rPr lang="fr-FR" sz="2000" dirty="0" smtClean="0">
-                <a:latin typeface="Calibri" panose="020F0502020204030204" pitchFamily="34" charset="0"/>
-                <a:cs typeface="Calibri" panose="020F0502020204030204" pitchFamily="34" charset="0"/>
-              </a:rPr>
-              <a:t>de </a:t>
-            </a:r>
-            <a:r>
-              <a:rPr lang="fr-FR" sz="2000" dirty="0">
-                <a:latin typeface="Calibri" panose="020F0502020204030204" pitchFamily="34" charset="0"/>
-                <a:cs typeface="Calibri" panose="020F0502020204030204" pitchFamily="34" charset="0"/>
-              </a:rPr>
-              <a:t>2023.</a:t>
+              <a:t>Ajustement de la cible 2024: augmentation de 3% de la cible de 2023.</a:t>
             </a:r>
           </a:p>
           <a:p>
@@ -34319,17 +32912,10 @@
                 <a:latin typeface="Calibri" panose="020F0502020204030204" pitchFamily="34" charset="0"/>
                 <a:cs typeface="Calibri" panose="020F0502020204030204" pitchFamily="34" charset="0"/>
               </a:rPr>
-              <a:t>Si la CV ajustée restait &gt;100%, on appliquait une augmentation de 5% au nombre de vaccinés de l’année comme dénominateur de manière à ramener la CV à 95</a:t>
+              <a:t>Si la CV ajustée restait &gt;100%, on appliquait une augmentation de 5% au nombre de vaccinés de l’année comme dénominateur de manière à ramener la CV à 95%.    </a:t>
             </a:r>
             <a:r>
-              <a:rPr lang="fr-FR" sz="2000" dirty="0" smtClean="0">
-                <a:latin typeface="Calibri" panose="020F0502020204030204" pitchFamily="34" charset="0"/>
-                <a:cs typeface="Calibri" panose="020F0502020204030204" pitchFamily="34" charset="0"/>
-              </a:rPr>
-              <a:t>%.    </a:t>
-            </a:r>
-            <a:r>
-              <a:rPr lang="fr-FR" sz="2000" dirty="0" smtClean="0">
+              <a:rPr lang="fr-FR" sz="2000" dirty="0">
                 <a:solidFill>
                   <a:srgbClr val="FF0000"/>
                 </a:solidFill>
@@ -34338,13 +32924,6 @@
               </a:rPr>
               <a:t>pourquoi</a:t>
             </a:r>
-            <a:endParaRPr lang="fr-FR" sz="2000" dirty="0">
-              <a:solidFill>
-                <a:srgbClr val="FF0000"/>
-              </a:solidFill>
-              <a:latin typeface="Calibri" panose="020F0502020204030204" pitchFamily="34" charset="0"/>
-              <a:cs typeface="Calibri" panose="020F0502020204030204" pitchFamily="34" charset="0"/>
-            </a:endParaRPr>
           </a:p>
           <a:p>
             <a:pPr marL="457200" indent="-457200">
@@ -34369,22 +32948,10 @@
         </p:txBody>
       </p:sp>
     </p:spTree>
-    <p:extLst>
-      <p:ext uri="{BB962C8B-B14F-4D97-AF65-F5344CB8AC3E}">
-        <p14:creationId xmlns:p14="http://schemas.microsoft.com/office/powerpoint/2010/main" val="3444537841"/>
-      </p:ext>
-    </p:extLst>
   </p:cSld>
   <p:clrMapOvr>
     <a:masterClrMapping/>
   </p:clrMapOvr>
-  <p:timing>
-    <p:tnLst>
-      <p:par>
-        <p:cTn id="1" dur="indefinite" restart="never" nodeType="tmRoot"/>
-      </p:par>
-    </p:tnLst>
-  </p:timing>
 </p:sld>
 </file>
 
@@ -34415,26 +32982,11 @@
       </p:grpSpPr>
       <p:sp>
         <p:nvSpPr>
-          <p:cNvPr id="8" name="Rectangle 7">
-            <a:extLst>
-              <a:ext uri="{FF2B5EF4-FFF2-40B4-BE49-F238E27FC236}">
-                <a16:creationId xmlns="" xmlns:a16="http://schemas.microsoft.com/office/drawing/2014/main" id="{70120F84-A866-4D9F-8B1C-9120A013D654}"/>
-              </a:ext>
-              <a:ext uri="{C183D7F6-B498-43B3-948B-1728B52AA6E4}">
-                <adec:decorative xmlns="" xmlns:adec="http://schemas.microsoft.com/office/drawing/2017/decorative" val="1"/>
-              </a:ext>
-            </a:extLst>
-          </p:cNvPr>
+          <p:cNvPr id="8" name="Rectangle 7"/>
           <p:cNvSpPr>
             <a:spLocks noGrp="1" noRot="1" noChangeAspect="1" noMove="1" noResize="1" noEditPoints="1" noAdjustHandles="1" noChangeArrowheads="1" noChangeShapeType="1" noTextEdit="1"/>
           </p:cNvSpPr>
-          <p:nvPr>
-            <p:extLst>
-              <p:ext uri="{386F3935-93C4-4BCD-93E2-E3B085C9AB24}">
-                <p16:designElem xmlns="" xmlns:p16="http://schemas.microsoft.com/office/powerpoint/2015/main" val="1"/>
-              </p:ext>
-            </p:extLst>
-          </p:nvPr>
+          <p:nvPr/>
         </p:nvSpPr>
         <p:spPr>
           <a:xfrm>
@@ -34469,9 +33021,6 @@
         </p:style>
         <p:txBody>
           <a:bodyPr rot="0" spcFirstLastPara="0" vert="horz" wrap="square" lIns="91440" tIns="45720" rIns="91440" bIns="45720" numCol="1" spcCol="0" rtlCol="0" fromWordArt="0" anchor="ctr" anchorCtr="0" forceAA="0" compatLnSpc="1">
-            <a:prstTxWarp prst="textNoShape">
-              <a:avLst/>
-            </a:prstTxWarp>
             <a:noAutofit/>
           </a:bodyPr>
           <a:lstStyle>
@@ -34577,26 +33126,11 @@
       </p:sp>
       <p:sp useBgFill="1">
         <p:nvSpPr>
-          <p:cNvPr id="10" name="Rectangle 9">
-            <a:extLst>
-              <a:ext uri="{FF2B5EF4-FFF2-40B4-BE49-F238E27FC236}">
-                <a16:creationId xmlns="" xmlns:a16="http://schemas.microsoft.com/office/drawing/2014/main" id="{252FEFEF-6AC0-46B6-AC09-11FC56196FA4}"/>
-              </a:ext>
-              <a:ext uri="{C183D7F6-B498-43B3-948B-1728B52AA6E4}">
-                <adec:decorative xmlns="" xmlns:adec="http://schemas.microsoft.com/office/drawing/2017/decorative" val="1"/>
-              </a:ext>
-            </a:extLst>
-          </p:cNvPr>
+          <p:cNvPr id="10" name="Rectangle 9"/>
           <p:cNvSpPr>
             <a:spLocks noGrp="1" noRot="1" noChangeAspect="1" noMove="1" noResize="1" noEditPoints="1" noAdjustHandles="1" noChangeArrowheads="1" noChangeShapeType="1" noTextEdit="1"/>
           </p:cNvSpPr>
-          <p:nvPr>
-            <p:extLst>
-              <p:ext uri="{386F3935-93C4-4BCD-93E2-E3B085C9AB24}">
-                <p16:designElem xmlns="" xmlns:p16="http://schemas.microsoft.com/office/powerpoint/2015/main" val="1"/>
-              </p:ext>
-            </p:extLst>
-          </p:nvPr>
+          <p:nvPr/>
         </p:nvSpPr>
         <p:spPr>
           <a:xfrm>
@@ -34624,13 +33158,7 @@
       </p:sp>
       <p:sp>
         <p:nvSpPr>
-          <p:cNvPr id="4" name="Rectangle 3">
-            <a:extLst>
-              <a:ext uri="{FF2B5EF4-FFF2-40B4-BE49-F238E27FC236}">
-                <a16:creationId xmlns="" xmlns:a16="http://schemas.microsoft.com/office/drawing/2014/main" id="{80D55A6F-7190-47FE-A830-5DF140C82A13}"/>
-              </a:ext>
-            </a:extLst>
-          </p:cNvPr>
+          <p:cNvPr id="4" name="Rectangle 3"/>
           <p:cNvSpPr/>
           <p:nvPr/>
         </p:nvSpPr>
@@ -34725,37 +33253,16 @@
             <a:pPr algn="ctr"/>
             <a:r>
               <a:rPr lang="fr-FR" dirty="0"/>
-              <a:t>E</a:t>
+              <a:t>Etapes suivies pour l’ajustement des cibles 2024 et 2025 par zone de santé</a:t>
             </a:r>
-            <a:r>
-              <a:rPr lang="fr-FR" dirty="0" smtClean="0"/>
-              <a:t>tapes </a:t>
-            </a:r>
-            <a:r>
-              <a:rPr lang="fr-FR" dirty="0"/>
-              <a:t>suivies pour l’ajustement des cibles 2024 et 2025 par zone de santé</a:t>
-            </a:r>
-            <a:endParaRPr lang="fr-FR" dirty="0"/>
           </a:p>
         </p:txBody>
       </p:sp>
     </p:spTree>
-    <p:extLst>
-      <p:ext uri="{BB962C8B-B14F-4D97-AF65-F5344CB8AC3E}">
-        <p14:creationId xmlns:p14="http://schemas.microsoft.com/office/powerpoint/2010/main" val="3184641101"/>
-      </p:ext>
-    </p:extLst>
   </p:cSld>
   <p:clrMapOvr>
     <a:masterClrMapping/>
   </p:clrMapOvr>
-  <p:timing>
-    <p:tnLst>
-      <p:par>
-        <p:cTn id="1" dur="indefinite" restart="never" nodeType="tmRoot"/>
-      </p:par>
-    </p:tnLst>
-  </p:timing>
 </p:sld>
 </file>
 
@@ -34786,26 +33293,11 @@
       </p:grpSpPr>
       <p:sp>
         <p:nvSpPr>
-          <p:cNvPr id="8" name="Rectangle 7">
-            <a:extLst>
-              <a:ext uri="{FF2B5EF4-FFF2-40B4-BE49-F238E27FC236}">
-                <a16:creationId xmlns="" xmlns:a16="http://schemas.microsoft.com/office/drawing/2014/main" id="{70120F84-A866-4D9F-8B1C-9120A013D654}"/>
-              </a:ext>
-              <a:ext uri="{C183D7F6-B498-43B3-948B-1728B52AA6E4}">
-                <adec:decorative xmlns="" xmlns:adec="http://schemas.microsoft.com/office/drawing/2017/decorative" val="1"/>
-              </a:ext>
-            </a:extLst>
-          </p:cNvPr>
+          <p:cNvPr id="8" name="Rectangle 7"/>
           <p:cNvSpPr>
             <a:spLocks noGrp="1" noRot="1" noChangeAspect="1" noMove="1" noResize="1" noEditPoints="1" noAdjustHandles="1" noChangeArrowheads="1" noChangeShapeType="1" noTextEdit="1"/>
           </p:cNvSpPr>
-          <p:nvPr>
-            <p:extLst>
-              <p:ext uri="{386F3935-93C4-4BCD-93E2-E3B085C9AB24}">
-                <p16:designElem xmlns="" xmlns:p16="http://schemas.microsoft.com/office/powerpoint/2015/main" val="1"/>
-              </p:ext>
-            </p:extLst>
-          </p:nvPr>
+          <p:nvPr/>
         </p:nvSpPr>
         <p:spPr>
           <a:xfrm>
@@ -34840,9 +33332,6 @@
         </p:style>
         <p:txBody>
           <a:bodyPr rot="0" spcFirstLastPara="0" vert="horz" wrap="square" lIns="91440" tIns="45720" rIns="91440" bIns="45720" numCol="1" spcCol="0" rtlCol="0" fromWordArt="0" anchor="ctr" anchorCtr="0" forceAA="0" compatLnSpc="1">
-            <a:prstTxWarp prst="textNoShape">
-              <a:avLst/>
-            </a:prstTxWarp>
             <a:noAutofit/>
           </a:bodyPr>
           <a:lstStyle>
@@ -34948,26 +33437,11 @@
       </p:sp>
       <p:sp useBgFill="1">
         <p:nvSpPr>
-          <p:cNvPr id="10" name="Rectangle 9">
-            <a:extLst>
-              <a:ext uri="{FF2B5EF4-FFF2-40B4-BE49-F238E27FC236}">
-                <a16:creationId xmlns="" xmlns:a16="http://schemas.microsoft.com/office/drawing/2014/main" id="{252FEFEF-6AC0-46B6-AC09-11FC56196FA4}"/>
-              </a:ext>
-              <a:ext uri="{C183D7F6-B498-43B3-948B-1728B52AA6E4}">
-                <adec:decorative xmlns="" xmlns:adec="http://schemas.microsoft.com/office/drawing/2017/decorative" val="1"/>
-              </a:ext>
-            </a:extLst>
-          </p:cNvPr>
+          <p:cNvPr id="10" name="Rectangle 9"/>
           <p:cNvSpPr>
             <a:spLocks noGrp="1" noRot="1" noChangeAspect="1" noMove="1" noResize="1" noEditPoints="1" noAdjustHandles="1" noChangeArrowheads="1" noChangeShapeType="1" noTextEdit="1"/>
           </p:cNvSpPr>
-          <p:nvPr>
-            <p:extLst>
-              <p:ext uri="{386F3935-93C4-4BCD-93E2-E3B085C9AB24}">
-                <p16:designElem xmlns="" xmlns:p16="http://schemas.microsoft.com/office/powerpoint/2015/main" val="1"/>
-              </p:ext>
-            </p:extLst>
-          </p:nvPr>
+          <p:nvPr/>
         </p:nvSpPr>
         <p:spPr>
           <a:xfrm>
@@ -34995,13 +33469,7 @@
       </p:sp>
       <p:sp>
         <p:nvSpPr>
-          <p:cNvPr id="4" name="Rectangle 3">
-            <a:extLst>
-              <a:ext uri="{FF2B5EF4-FFF2-40B4-BE49-F238E27FC236}">
-                <a16:creationId xmlns="" xmlns:a16="http://schemas.microsoft.com/office/drawing/2014/main" id="{80D55A6F-7190-47FE-A830-5DF140C82A13}"/>
-              </a:ext>
-            </a:extLst>
-          </p:cNvPr>
+          <p:cNvPr id="4" name="Rectangle 3"/>
           <p:cNvSpPr/>
           <p:nvPr/>
         </p:nvSpPr>
@@ -35049,13 +33517,7 @@
       </p:sp>
       <p:sp>
         <p:nvSpPr>
-          <p:cNvPr id="5" name="Rectangle 4">
-            <a:extLst>
-              <a:ext uri="{FF2B5EF4-FFF2-40B4-BE49-F238E27FC236}">
-                <a16:creationId xmlns="" xmlns:a16="http://schemas.microsoft.com/office/drawing/2014/main" id="{683B44C2-FA59-4A22-936C-6C1B0CD162EA}"/>
-              </a:ext>
-            </a:extLst>
-          </p:cNvPr>
+          <p:cNvPr id="5" name="Rectangle 4"/>
           <p:cNvSpPr/>
           <p:nvPr/>
         </p:nvSpPr>
@@ -35126,23 +33588,11 @@
       </p:sp>
       <p:graphicFrame>
         <p:nvGraphicFramePr>
-          <p:cNvPr id="2" name="Object 1">
-            <a:extLst>
-              <a:ext uri="{FF2B5EF4-FFF2-40B4-BE49-F238E27FC236}">
-                <a16:creationId xmlns="" xmlns:a16="http://schemas.microsoft.com/office/drawing/2014/main" id="{5FE0C9C7-7251-A4D3-24FF-13004EF174DD}"/>
-              </a:ext>
-            </a:extLst>
-          </p:cNvPr>
+          <p:cNvPr id="2" name="Object 1"/>
           <p:cNvGraphicFramePr>
             <a:graphicFrameLocks noChangeAspect="1"/>
           </p:cNvGraphicFramePr>
-          <p:nvPr>
-            <p:extLst>
-              <p:ext uri="{D42A27DB-BD31-4B8C-83A1-F6EECF244321}">
-                <p14:modId xmlns:p14="http://schemas.microsoft.com/office/powerpoint/2010/main" val="1475978888"/>
-              </p:ext>
-            </p:extLst>
-          </p:nvPr>
+          <p:nvPr/>
         </p:nvGraphicFramePr>
         <p:xfrm>
           <a:off x="3927475" y="4064000"/>
@@ -35152,27 +33602,21 @@
           <a:graphicData uri="http://schemas.openxmlformats.org/presentationml/2006/ole">
             <mc:AlternateContent xmlns:mc="http://schemas.openxmlformats.org/markup-compatibility/2006">
               <mc:Choice xmlns:v="urn:schemas-microsoft-com:vml" Requires="v">
-                <p:oleObj spid="_x0000_s1077" name="Feuille de calcul" showAsIcon="1" r:id="rId3" imgW="381071" imgH="792417" progId="Excel.Sheet.12">
+                <p:oleObj name="Feuille de calcul" showAsIcon="1" r:id="rId2" imgW="328295" imgH="676275" progId="Excel.Sheet.12">
                   <p:embed/>
                 </p:oleObj>
               </mc:Choice>
               <mc:Fallback>
-                <p:oleObj name="Feuille de calcul" showAsIcon="1" r:id="rId3" imgW="381071" imgH="792417" progId="Excel.Sheet.12">
+                <p:oleObj name="Feuille de calcul" showAsIcon="1" r:id="rId2" imgW="328295" imgH="676275" progId="Excel.Sheet.12">
                   <p:embed/>
                   <p:pic>
                     <p:nvPicPr>
-                      <p:cNvPr id="2" name="Object 1">
-                        <a:extLst>
-                          <a:ext uri="{FF2B5EF4-FFF2-40B4-BE49-F238E27FC236}">
-                            <a16:creationId xmlns="" xmlns:a16="http://schemas.microsoft.com/office/drawing/2014/main" id="{5FE0C9C7-7251-A4D3-24FF-13004EF174DD}"/>
-                          </a:ext>
-                        </a:extLst>
-                      </p:cNvPr>
+                      <p:cNvPr id="2" name="Object 1"/>
                       <p:cNvPicPr/>
                       <p:nvPr/>
                     </p:nvPicPr>
                     <p:blipFill>
-                      <a:blip r:embed="rId4"/>
+                      <a:blip r:embed="rId3"/>
                       <a:stretch>
                         <a:fillRect/>
                       </a:stretch>
@@ -35194,22 +33638,10 @@
         </a:graphic>
       </p:graphicFrame>
     </p:spTree>
-    <p:extLst>
-      <p:ext uri="{BB962C8B-B14F-4D97-AF65-F5344CB8AC3E}">
-        <p14:creationId xmlns:p14="http://schemas.microsoft.com/office/powerpoint/2010/main" val="600383615"/>
-      </p:ext>
-    </p:extLst>
   </p:cSld>
   <p:clrMapOvr>
     <a:masterClrMapping/>
   </p:clrMapOvr>
-  <p:timing>
-    <p:tnLst>
-      <p:par>
-        <p:cTn id="1" dur="indefinite" restart="never" nodeType="tmRoot"/>
-      </p:par>
-    </p:tnLst>
-  </p:timing>
 </p:sld>
 </file>
 
@@ -35232,13 +33664,7 @@
       </p:grpSpPr>
       <p:sp>
         <p:nvSpPr>
-          <p:cNvPr id="4" name="Rectangle 3">
-            <a:extLst>
-              <a:ext uri="{FF2B5EF4-FFF2-40B4-BE49-F238E27FC236}">
-                <a16:creationId xmlns="" xmlns:a16="http://schemas.microsoft.com/office/drawing/2014/main" id="{80D55A6F-7190-47FE-A830-5DF140C82A13}"/>
-              </a:ext>
-            </a:extLst>
-          </p:cNvPr>
+          <p:cNvPr id="4" name="Rectangle 3"/>
           <p:cNvSpPr/>
           <p:nvPr/>
         </p:nvSpPr>
@@ -35286,13 +33712,7 @@
       </p:sp>
       <p:pic>
         <p:nvPicPr>
-          <p:cNvPr id="3" name="Picture 2" descr="A graph of different colored bars&#10;&#10;Description automatically generated">
-            <a:extLst>
-              <a:ext uri="{FF2B5EF4-FFF2-40B4-BE49-F238E27FC236}">
-                <a16:creationId xmlns="" xmlns:a16="http://schemas.microsoft.com/office/drawing/2014/main" id="{B41B2C63-5354-B9C3-2C74-6D9CEAE77156}"/>
-              </a:ext>
-            </a:extLst>
-          </p:cNvPr>
+          <p:cNvPr id="3" name="Picture 2" descr="A graph of different colored bars&#10;&#10;Description automatically generated"/>
           <p:cNvPicPr>
             <a:picLocks noChangeAspect="1"/>
           </p:cNvPicPr>
@@ -35322,13 +33742,7 @@
       </p:pic>
       <p:sp>
         <p:nvSpPr>
-          <p:cNvPr id="7" name="Rectangle 6">
-            <a:extLst>
-              <a:ext uri="{FF2B5EF4-FFF2-40B4-BE49-F238E27FC236}">
-                <a16:creationId xmlns="" xmlns:a16="http://schemas.microsoft.com/office/drawing/2014/main" id="{CD623939-BCC8-1B1A-0E9E-4C537DF8F80C}"/>
-              </a:ext>
-            </a:extLst>
-          </p:cNvPr>
+          <p:cNvPr id="7" name="Rectangle 6"/>
           <p:cNvSpPr/>
           <p:nvPr/>
         </p:nvSpPr>
@@ -35377,13 +33791,7 @@
       </p:sp>
       <p:sp>
         <p:nvSpPr>
-          <p:cNvPr id="9" name="Rectangle 8">
-            <a:extLst>
-              <a:ext uri="{FF2B5EF4-FFF2-40B4-BE49-F238E27FC236}">
-                <a16:creationId xmlns="" xmlns:a16="http://schemas.microsoft.com/office/drawing/2014/main" id="{F6275FA4-0C17-B049-088A-4ECE938C02D6}"/>
-              </a:ext>
-            </a:extLst>
-          </p:cNvPr>
+          <p:cNvPr id="9" name="Rectangle 8"/>
           <p:cNvSpPr/>
           <p:nvPr/>
         </p:nvSpPr>
@@ -35432,13 +33840,7 @@
       </p:sp>
       <p:sp>
         <p:nvSpPr>
-          <p:cNvPr id="11" name="Rectangle 10">
-            <a:extLst>
-              <a:ext uri="{FF2B5EF4-FFF2-40B4-BE49-F238E27FC236}">
-                <a16:creationId xmlns="" xmlns:a16="http://schemas.microsoft.com/office/drawing/2014/main" id="{A158A1A4-768D-2DA7-EF8B-3CB3CC853A66}"/>
-              </a:ext>
-            </a:extLst>
-          </p:cNvPr>
+          <p:cNvPr id="11" name="Rectangle 10"/>
           <p:cNvSpPr/>
           <p:nvPr/>
         </p:nvSpPr>
@@ -35487,13 +33889,7 @@
       </p:sp>
       <p:sp>
         <p:nvSpPr>
-          <p:cNvPr id="12" name="Rectangle 11">
-            <a:extLst>
-              <a:ext uri="{FF2B5EF4-FFF2-40B4-BE49-F238E27FC236}">
-                <a16:creationId xmlns="" xmlns:a16="http://schemas.microsoft.com/office/drawing/2014/main" id="{6723B453-02DD-84C8-C384-48945986783E}"/>
-              </a:ext>
-            </a:extLst>
-          </p:cNvPr>
+          <p:cNvPr id="12" name="Rectangle 11"/>
           <p:cNvSpPr/>
           <p:nvPr/>
         </p:nvSpPr>
@@ -35542,13 +33938,7 @@
       </p:sp>
       <p:sp>
         <p:nvSpPr>
-          <p:cNvPr id="13" name="Rectangle 12">
-            <a:extLst>
-              <a:ext uri="{FF2B5EF4-FFF2-40B4-BE49-F238E27FC236}">
-                <a16:creationId xmlns="" xmlns:a16="http://schemas.microsoft.com/office/drawing/2014/main" id="{FAE38D3B-6AFB-F889-02F1-124ADFB54994}"/>
-              </a:ext>
-            </a:extLst>
-          </p:cNvPr>
+          <p:cNvPr id="13" name="Rectangle 12"/>
           <p:cNvSpPr/>
           <p:nvPr/>
         </p:nvSpPr>
@@ -35597,23 +33987,11 @@
       </p:sp>
       <p:graphicFrame>
         <p:nvGraphicFramePr>
-          <p:cNvPr id="6" name="Table 5">
-            <a:extLst>
-              <a:ext uri="{FF2B5EF4-FFF2-40B4-BE49-F238E27FC236}">
-                <a16:creationId xmlns="" xmlns:a16="http://schemas.microsoft.com/office/drawing/2014/main" id="{7D54BADB-014E-2AB2-12F0-6CC0EFF5C9C2}"/>
-              </a:ext>
-            </a:extLst>
-          </p:cNvPr>
+          <p:cNvPr id="6" name="Table 5"/>
           <p:cNvGraphicFramePr>
             <a:graphicFrameLocks noGrp="1"/>
           </p:cNvGraphicFramePr>
-          <p:nvPr>
-            <p:extLst>
-              <p:ext uri="{D42A27DB-BD31-4B8C-83A1-F6EECF244321}">
-                <p14:modId xmlns:p14="http://schemas.microsoft.com/office/powerpoint/2010/main" val="1044515185"/>
-              </p:ext>
-            </p:extLst>
-          </p:nvPr>
+          <p:nvPr/>
         </p:nvGraphicFramePr>
         <p:xfrm>
           <a:off x="5072241" y="1223070"/>
@@ -35627,28 +34005,28 @@
                 <a:gridCol w="990600">
                   <a:extLst>
                     <a:ext uri="{9D8B030D-6E8A-4147-A177-3AD203B41FA5}">
-                      <a16:colId xmlns="" xmlns:a16="http://schemas.microsoft.com/office/drawing/2014/main" val="3498737656"/>
+                      <a16:colId xmlns:a16="http://schemas.microsoft.com/office/drawing/2014/main" val="20000"/>
                     </a:ext>
                   </a:extLst>
                 </a:gridCol>
                 <a:gridCol w="1169670">
                   <a:extLst>
                     <a:ext uri="{9D8B030D-6E8A-4147-A177-3AD203B41FA5}">
-                      <a16:colId xmlns="" xmlns:a16="http://schemas.microsoft.com/office/drawing/2014/main" val="28740788"/>
+                      <a16:colId xmlns:a16="http://schemas.microsoft.com/office/drawing/2014/main" val="20001"/>
                     </a:ext>
                   </a:extLst>
                 </a:gridCol>
                 <a:gridCol w="797560">
                   <a:extLst>
                     <a:ext uri="{9D8B030D-6E8A-4147-A177-3AD203B41FA5}">
-                      <a16:colId xmlns="" xmlns:a16="http://schemas.microsoft.com/office/drawing/2014/main" val="3562965254"/>
+                      <a16:colId xmlns:a16="http://schemas.microsoft.com/office/drawing/2014/main" val="20002"/>
                     </a:ext>
                   </a:extLst>
                 </a:gridCol>
                 <a:gridCol w="685800">
                   <a:extLst>
                     <a:ext uri="{9D8B030D-6E8A-4147-A177-3AD203B41FA5}">
-                      <a16:colId xmlns="" xmlns:a16="http://schemas.microsoft.com/office/drawing/2014/main" val="3826535450"/>
+                      <a16:colId xmlns:a16="http://schemas.microsoft.com/office/drawing/2014/main" val="20003"/>
                     </a:ext>
                   </a:extLst>
                 </a:gridCol>
@@ -35908,7 +34286,7 @@
                 </a:tc>
                 <a:extLst>
                   <a:ext uri="{0D108BD9-81ED-4DB2-BD59-A6C34878D82A}">
-                    <a16:rowId xmlns="" xmlns:a16="http://schemas.microsoft.com/office/drawing/2014/main" val="990916604"/>
+                    <a16:rowId xmlns:a16="http://schemas.microsoft.com/office/drawing/2014/main" val="10000"/>
                   </a:ext>
                 </a:extLst>
               </a:tr>
@@ -36167,7 +34545,7 @@
                 </a:tc>
                 <a:extLst>
                   <a:ext uri="{0D108BD9-81ED-4DB2-BD59-A6C34878D82A}">
-                    <a16:rowId xmlns="" xmlns:a16="http://schemas.microsoft.com/office/drawing/2014/main" val="953237624"/>
+                    <a16:rowId xmlns:a16="http://schemas.microsoft.com/office/drawing/2014/main" val="10001"/>
                   </a:ext>
                 </a:extLst>
               </a:tr>
@@ -36176,22 +34554,10 @@
         </a:graphic>
       </p:graphicFrame>
     </p:spTree>
-    <p:extLst>
-      <p:ext uri="{BB962C8B-B14F-4D97-AF65-F5344CB8AC3E}">
-        <p14:creationId xmlns:p14="http://schemas.microsoft.com/office/powerpoint/2010/main" val="1358428708"/>
-      </p:ext>
-    </p:extLst>
   </p:cSld>
   <p:clrMapOvr>
     <a:masterClrMapping/>
   </p:clrMapOvr>
-  <p:timing>
-    <p:tnLst>
-      <p:par>
-        <p:cTn id="1" dur="indefinite" restart="never" nodeType="tmRoot"/>
-      </p:par>
-    </p:tnLst>
-  </p:timing>
 </p:sld>
 </file>
 
@@ -36222,26 +34588,11 @@
       </p:grpSpPr>
       <p:sp>
         <p:nvSpPr>
-          <p:cNvPr id="8" name="Rectangle 7">
-            <a:extLst>
-              <a:ext uri="{FF2B5EF4-FFF2-40B4-BE49-F238E27FC236}">
-                <a16:creationId xmlns="" xmlns:a16="http://schemas.microsoft.com/office/drawing/2014/main" id="{70120F84-A866-4D9F-8B1C-9120A013D654}"/>
-              </a:ext>
-              <a:ext uri="{C183D7F6-B498-43B3-948B-1728B52AA6E4}">
-                <adec:decorative xmlns="" xmlns:adec="http://schemas.microsoft.com/office/drawing/2017/decorative" val="1"/>
-              </a:ext>
-            </a:extLst>
-          </p:cNvPr>
+          <p:cNvPr id="8" name="Rectangle 7"/>
           <p:cNvSpPr>
             <a:spLocks noGrp="1" noRot="1" noChangeAspect="1" noMove="1" noResize="1" noEditPoints="1" noAdjustHandles="1" noChangeArrowheads="1" noChangeShapeType="1" noTextEdit="1"/>
           </p:cNvSpPr>
-          <p:nvPr>
-            <p:extLst>
-              <p:ext uri="{386F3935-93C4-4BCD-93E2-E3B085C9AB24}">
-                <p16:designElem xmlns="" xmlns:p16="http://schemas.microsoft.com/office/powerpoint/2015/main" val="1"/>
-              </p:ext>
-            </p:extLst>
-          </p:nvPr>
+          <p:nvPr/>
         </p:nvSpPr>
         <p:spPr>
           <a:xfrm>
@@ -36276,9 +34627,6 @@
         </p:style>
         <p:txBody>
           <a:bodyPr rot="0" spcFirstLastPara="0" vert="horz" wrap="square" lIns="91440" tIns="45720" rIns="91440" bIns="45720" numCol="1" spcCol="0" rtlCol="0" fromWordArt="0" anchor="ctr" anchorCtr="0" forceAA="0" compatLnSpc="1">
-            <a:prstTxWarp prst="textNoShape">
-              <a:avLst/>
-            </a:prstTxWarp>
             <a:noAutofit/>
           </a:bodyPr>
           <a:lstStyle>
@@ -36384,26 +34732,11 @@
       </p:sp>
       <p:sp useBgFill="1">
         <p:nvSpPr>
-          <p:cNvPr id="10" name="Rectangle 9">
-            <a:extLst>
-              <a:ext uri="{FF2B5EF4-FFF2-40B4-BE49-F238E27FC236}">
-                <a16:creationId xmlns="" xmlns:a16="http://schemas.microsoft.com/office/drawing/2014/main" id="{252FEFEF-6AC0-46B6-AC09-11FC56196FA4}"/>
-              </a:ext>
-              <a:ext uri="{C183D7F6-B498-43B3-948B-1728B52AA6E4}">
-                <adec:decorative xmlns="" xmlns:adec="http://schemas.microsoft.com/office/drawing/2017/decorative" val="1"/>
-              </a:ext>
-            </a:extLst>
-          </p:cNvPr>
+          <p:cNvPr id="10" name="Rectangle 9"/>
           <p:cNvSpPr>
             <a:spLocks noGrp="1" noRot="1" noChangeAspect="1" noMove="1" noResize="1" noEditPoints="1" noAdjustHandles="1" noChangeArrowheads="1" noChangeShapeType="1" noTextEdit="1"/>
           </p:cNvSpPr>
-          <p:nvPr>
-            <p:extLst>
-              <p:ext uri="{386F3935-93C4-4BCD-93E2-E3B085C9AB24}">
-                <p16:designElem xmlns="" xmlns:p16="http://schemas.microsoft.com/office/powerpoint/2015/main" val="1"/>
-              </p:ext>
-            </p:extLst>
-          </p:nvPr>
+          <p:nvPr/>
         </p:nvSpPr>
         <p:spPr>
           <a:xfrm>
@@ -36431,13 +34764,7 @@
       </p:sp>
       <p:sp>
         <p:nvSpPr>
-          <p:cNvPr id="4" name="Rectangle 3">
-            <a:extLst>
-              <a:ext uri="{FF2B5EF4-FFF2-40B4-BE49-F238E27FC236}">
-                <a16:creationId xmlns="" xmlns:a16="http://schemas.microsoft.com/office/drawing/2014/main" id="{80D55A6F-7190-47FE-A830-5DF140C82A13}"/>
-              </a:ext>
-            </a:extLst>
-          </p:cNvPr>
+          <p:cNvPr id="4" name="Rectangle 3"/>
           <p:cNvSpPr/>
           <p:nvPr/>
         </p:nvSpPr>
@@ -36485,13 +34812,7 @@
       </p:sp>
       <p:pic>
         <p:nvPicPr>
-          <p:cNvPr id="5" name="Picture 4" descr="A line with red dots&#10;&#10;Description automatically generated with medium confidence">
-            <a:extLst>
-              <a:ext uri="{FF2B5EF4-FFF2-40B4-BE49-F238E27FC236}">
-                <a16:creationId xmlns="" xmlns:a16="http://schemas.microsoft.com/office/drawing/2014/main" id="{E8C9C4A8-D29F-6F07-4DE0-47E7A9A6C636}"/>
-              </a:ext>
-            </a:extLst>
-          </p:cNvPr>
+          <p:cNvPr id="5" name="Picture 4" descr="A line with red dots&#10;&#10;Description automatically generated with medium confidence"/>
           <p:cNvPicPr>
             <a:picLocks noChangeAspect="1"/>
           </p:cNvPicPr>
@@ -36521,23 +34842,11 @@
       </p:pic>
       <p:graphicFrame>
         <p:nvGraphicFramePr>
-          <p:cNvPr id="6" name="Table 5">
-            <a:extLst>
-              <a:ext uri="{FF2B5EF4-FFF2-40B4-BE49-F238E27FC236}">
-                <a16:creationId xmlns="" xmlns:a16="http://schemas.microsoft.com/office/drawing/2014/main" id="{F59AF799-2C88-134C-01E4-0DA52ECCDB45}"/>
-              </a:ext>
-            </a:extLst>
-          </p:cNvPr>
+          <p:cNvPr id="6" name="Table 5"/>
           <p:cNvGraphicFramePr>
             <a:graphicFrameLocks noGrp="1"/>
           </p:cNvGraphicFramePr>
-          <p:nvPr>
-            <p:extLst>
-              <p:ext uri="{D42A27DB-BD31-4B8C-83A1-F6EECF244321}">
-                <p14:modId xmlns:p14="http://schemas.microsoft.com/office/powerpoint/2010/main" val="1325556367"/>
-              </p:ext>
-            </p:extLst>
-          </p:nvPr>
+          <p:nvPr/>
         </p:nvGraphicFramePr>
         <p:xfrm>
           <a:off x="694485" y="5299649"/>
@@ -36551,21 +34860,21 @@
                 <a:gridCol w="1041910">
                   <a:extLst>
                     <a:ext uri="{9D8B030D-6E8A-4147-A177-3AD203B41FA5}">
-                      <a16:colId xmlns="" xmlns:a16="http://schemas.microsoft.com/office/drawing/2014/main" val="2486949696"/>
+                      <a16:colId xmlns:a16="http://schemas.microsoft.com/office/drawing/2014/main" val="20000"/>
                     </a:ext>
                   </a:extLst>
                 </a:gridCol>
                 <a:gridCol w="1300446">
                   <a:extLst>
                     <a:ext uri="{9D8B030D-6E8A-4147-A177-3AD203B41FA5}">
-                      <a16:colId xmlns="" xmlns:a16="http://schemas.microsoft.com/office/drawing/2014/main" val="2918131375"/>
+                      <a16:colId xmlns:a16="http://schemas.microsoft.com/office/drawing/2014/main" val="20001"/>
                     </a:ext>
                   </a:extLst>
                 </a:gridCol>
                 <a:gridCol w="885801">
                   <a:extLst>
                     <a:ext uri="{9D8B030D-6E8A-4147-A177-3AD203B41FA5}">
-                      <a16:colId xmlns="" xmlns:a16="http://schemas.microsoft.com/office/drawing/2014/main" val="149693458"/>
+                      <a16:colId xmlns:a16="http://schemas.microsoft.com/office/drawing/2014/main" val="20002"/>
                     </a:ext>
                   </a:extLst>
                 </a:gridCol>
@@ -36762,7 +35071,7 @@
                 </a:tc>
                 <a:extLst>
                   <a:ext uri="{0D108BD9-81ED-4DB2-BD59-A6C34878D82A}">
-                    <a16:rowId xmlns="" xmlns:a16="http://schemas.microsoft.com/office/drawing/2014/main" val="3138647546"/>
+                    <a16:rowId xmlns:a16="http://schemas.microsoft.com/office/drawing/2014/main" val="10000"/>
                   </a:ext>
                 </a:extLst>
               </a:tr>
@@ -36940,7 +35249,7 @@
                 </a:tc>
                 <a:extLst>
                   <a:ext uri="{0D108BD9-81ED-4DB2-BD59-A6C34878D82A}">
-                    <a16:rowId xmlns="" xmlns:a16="http://schemas.microsoft.com/office/drawing/2014/main" val="2855774630"/>
+                    <a16:rowId xmlns:a16="http://schemas.microsoft.com/office/drawing/2014/main" val="10001"/>
                   </a:ext>
                 </a:extLst>
               </a:tr>
@@ -37100,7 +35409,7 @@
                 </a:tc>
                 <a:extLst>
                   <a:ext uri="{0D108BD9-81ED-4DB2-BD59-A6C34878D82A}">
-                    <a16:rowId xmlns="" xmlns:a16="http://schemas.microsoft.com/office/drawing/2014/main" val="1397175837"/>
+                    <a16:rowId xmlns:a16="http://schemas.microsoft.com/office/drawing/2014/main" val="10002"/>
                   </a:ext>
                 </a:extLst>
               </a:tr>
@@ -37260,7 +35569,7 @@
                 </a:tc>
                 <a:extLst>
                   <a:ext uri="{0D108BD9-81ED-4DB2-BD59-A6C34878D82A}">
-                    <a16:rowId xmlns="" xmlns:a16="http://schemas.microsoft.com/office/drawing/2014/main" val="2276375914"/>
+                    <a16:rowId xmlns:a16="http://schemas.microsoft.com/office/drawing/2014/main" val="10003"/>
                   </a:ext>
                 </a:extLst>
               </a:tr>
@@ -37438,7 +35747,7 @@
                 </a:tc>
                 <a:extLst>
                   <a:ext uri="{0D108BD9-81ED-4DB2-BD59-A6C34878D82A}">
-                    <a16:rowId xmlns="" xmlns:a16="http://schemas.microsoft.com/office/drawing/2014/main" val="4240095010"/>
+                    <a16:rowId xmlns:a16="http://schemas.microsoft.com/office/drawing/2014/main" val="10004"/>
                   </a:ext>
                 </a:extLst>
               </a:tr>
@@ -37448,13 +35757,7 @@
       </p:graphicFrame>
       <p:pic>
         <p:nvPicPr>
-          <p:cNvPr id="2" name="Picture 1" descr="A line of dots on a white background&#10;&#10;Description automatically generated">
-            <a:extLst>
-              <a:ext uri="{FF2B5EF4-FFF2-40B4-BE49-F238E27FC236}">
-                <a16:creationId xmlns="" xmlns:a16="http://schemas.microsoft.com/office/drawing/2014/main" id="{CF4EAE53-2CED-D64C-6822-95A886F843CD}"/>
-              </a:ext>
-            </a:extLst>
-          </p:cNvPr>
+          <p:cNvPr id="2" name="Picture 1" descr="A line of dots on a white background&#10;&#10;Description automatically generated"/>
           <p:cNvPicPr>
             <a:picLocks noChangeAspect="1"/>
           </p:cNvPicPr>
@@ -37484,23 +35787,11 @@
       </p:pic>
       <p:graphicFrame>
         <p:nvGraphicFramePr>
-          <p:cNvPr id="3" name="Table 2">
-            <a:extLst>
-              <a:ext uri="{FF2B5EF4-FFF2-40B4-BE49-F238E27FC236}">
-                <a16:creationId xmlns="" xmlns:a16="http://schemas.microsoft.com/office/drawing/2014/main" id="{74AE5A65-7EC2-CE3B-CF8E-16ABFDF4FB63}"/>
-              </a:ext>
-            </a:extLst>
-          </p:cNvPr>
+          <p:cNvPr id="3" name="Table 2"/>
           <p:cNvGraphicFramePr>
             <a:graphicFrameLocks noGrp="1"/>
           </p:cNvGraphicFramePr>
-          <p:nvPr>
-            <p:extLst>
-              <p:ext uri="{D42A27DB-BD31-4B8C-83A1-F6EECF244321}">
-                <p14:modId xmlns:p14="http://schemas.microsoft.com/office/powerpoint/2010/main" val="226751054"/>
-              </p:ext>
-            </p:extLst>
-          </p:nvPr>
+          <p:nvPr/>
         </p:nvGraphicFramePr>
         <p:xfrm>
           <a:off x="7805530" y="5335788"/>
@@ -37514,21 +35805,21 @@
                 <a:gridCol w="989262">
                   <a:extLst>
                     <a:ext uri="{9D8B030D-6E8A-4147-A177-3AD203B41FA5}">
-                      <a16:colId xmlns="" xmlns:a16="http://schemas.microsoft.com/office/drawing/2014/main" val="2975615269"/>
+                      <a16:colId xmlns:a16="http://schemas.microsoft.com/office/drawing/2014/main" val="20000"/>
                     </a:ext>
                   </a:extLst>
                 </a:gridCol>
                 <a:gridCol w="1234734">
                   <a:extLst>
                     <a:ext uri="{9D8B030D-6E8A-4147-A177-3AD203B41FA5}">
-                      <a16:colId xmlns="" xmlns:a16="http://schemas.microsoft.com/office/drawing/2014/main" val="2451210645"/>
+                      <a16:colId xmlns:a16="http://schemas.microsoft.com/office/drawing/2014/main" val="20001"/>
                     </a:ext>
                   </a:extLst>
                 </a:gridCol>
                 <a:gridCol w="841041">
                   <a:extLst>
                     <a:ext uri="{9D8B030D-6E8A-4147-A177-3AD203B41FA5}">
-                      <a16:colId xmlns="" xmlns:a16="http://schemas.microsoft.com/office/drawing/2014/main" val="633833261"/>
+                      <a16:colId xmlns:a16="http://schemas.microsoft.com/office/drawing/2014/main" val="20002"/>
                     </a:ext>
                   </a:extLst>
                 </a:gridCol>
@@ -37725,7 +36016,7 @@
                 </a:tc>
                 <a:extLst>
                   <a:ext uri="{0D108BD9-81ED-4DB2-BD59-A6C34878D82A}">
-                    <a16:rowId xmlns="" xmlns:a16="http://schemas.microsoft.com/office/drawing/2014/main" val="3864161081"/>
+                    <a16:rowId xmlns:a16="http://schemas.microsoft.com/office/drawing/2014/main" val="10000"/>
                   </a:ext>
                 </a:extLst>
               </a:tr>
@@ -37912,7 +36203,7 @@
                 </a:tc>
                 <a:extLst>
                   <a:ext uri="{0D108BD9-81ED-4DB2-BD59-A6C34878D82A}">
-                    <a16:rowId xmlns="" xmlns:a16="http://schemas.microsoft.com/office/drawing/2014/main" val="355358603"/>
+                    <a16:rowId xmlns:a16="http://schemas.microsoft.com/office/drawing/2014/main" val="10001"/>
                   </a:ext>
                 </a:extLst>
               </a:tr>
@@ -38081,7 +36372,7 @@
                 </a:tc>
                 <a:extLst>
                   <a:ext uri="{0D108BD9-81ED-4DB2-BD59-A6C34878D82A}">
-                    <a16:rowId xmlns="" xmlns:a16="http://schemas.microsoft.com/office/drawing/2014/main" val="3051292862"/>
+                    <a16:rowId xmlns:a16="http://schemas.microsoft.com/office/drawing/2014/main" val="10002"/>
                   </a:ext>
                 </a:extLst>
               </a:tr>
@@ -38241,7 +36532,7 @@
                 </a:tc>
                 <a:extLst>
                   <a:ext uri="{0D108BD9-81ED-4DB2-BD59-A6C34878D82A}">
-                    <a16:rowId xmlns="" xmlns:a16="http://schemas.microsoft.com/office/drawing/2014/main" val="4044865794"/>
+                    <a16:rowId xmlns:a16="http://schemas.microsoft.com/office/drawing/2014/main" val="10003"/>
                   </a:ext>
                 </a:extLst>
               </a:tr>
@@ -38401,7 +36692,7 @@
                 </a:tc>
                 <a:extLst>
                   <a:ext uri="{0D108BD9-81ED-4DB2-BD59-A6C34878D82A}">
-                    <a16:rowId xmlns="" xmlns:a16="http://schemas.microsoft.com/office/drawing/2014/main" val="3718359876"/>
+                    <a16:rowId xmlns:a16="http://schemas.microsoft.com/office/drawing/2014/main" val="10004"/>
                   </a:ext>
                 </a:extLst>
               </a:tr>
@@ -38579,7 +36870,7 @@
                 </a:tc>
                 <a:extLst>
                   <a:ext uri="{0D108BD9-81ED-4DB2-BD59-A6C34878D82A}">
-                    <a16:rowId xmlns="" xmlns:a16="http://schemas.microsoft.com/office/drawing/2014/main" val="4027208207"/>
+                    <a16:rowId xmlns:a16="http://schemas.microsoft.com/office/drawing/2014/main" val="10005"/>
                   </a:ext>
                 </a:extLst>
               </a:tr>
@@ -38589,13 +36880,7 @@
       </p:graphicFrame>
       <p:sp>
         <p:nvSpPr>
-          <p:cNvPr id="9" name="Rectangle 8">
-            <a:extLst>
-              <a:ext uri="{FF2B5EF4-FFF2-40B4-BE49-F238E27FC236}">
-                <a16:creationId xmlns="" xmlns:a16="http://schemas.microsoft.com/office/drawing/2014/main" id="{B8AA214C-FD4C-E04C-0548-5CB16DB87DD1}"/>
-              </a:ext>
-            </a:extLst>
-          </p:cNvPr>
+          <p:cNvPr id="9" name="Rectangle 8"/>
           <p:cNvSpPr/>
           <p:nvPr/>
         </p:nvSpPr>
@@ -38642,22 +36927,10 @@
         </p:txBody>
       </p:sp>
     </p:spTree>
-    <p:extLst>
-      <p:ext uri="{BB962C8B-B14F-4D97-AF65-F5344CB8AC3E}">
-        <p14:creationId xmlns:p14="http://schemas.microsoft.com/office/powerpoint/2010/main" val="156440965"/>
-      </p:ext>
-    </p:extLst>
   </p:cSld>
   <p:clrMapOvr>
     <a:masterClrMapping/>
   </p:clrMapOvr>
-  <p:timing>
-    <p:tnLst>
-      <p:par>
-        <p:cTn id="1" dur="indefinite" restart="never" nodeType="tmRoot"/>
-      </p:par>
-    </p:tnLst>
-  </p:timing>
 </p:sld>
 </file>
 
@@ -38936,7 +37209,7 @@
   <a:extraClrSchemeLst/>
   <a:extLst>
     <a:ext uri="{05A4C25C-085E-4340-85A3-A5531E510DB2}">
-      <thm15:themeFamily xmlns:thm15="http://schemas.microsoft.com/office/thememl/2012/main" name="Savon" id="{1306E473-ED32-493B-A2D0-240A757EDD34}" vid="{C20BADFE-D095-436F-9677-9264042809F0}"/>
+      <thm15:themeFamily xmlns:thm15="http://schemas.microsoft.com/office/thememl/2012/main" name="Office Theme" id="{62F939B6-93AF-4DB8-9C6B-D6C7DFDC589F}" vid="{4A3C46E8-61CC-4603-A589-7422A47A8E4A}"/>
     </a:ext>
   </a:extLst>
 </a:theme>
@@ -39018,23 +37291,6 @@
         <a:font script="Viet" typeface="Times New Roman"/>
         <a:font script="Uigh" typeface="Microsoft Uighur"/>
         <a:font script="Geor" typeface="Sylfaen"/>
-        <a:font script="Armn" typeface="Arial"/>
-        <a:font script="Bugi" typeface="Leelawadee UI"/>
-        <a:font script="Bopo" typeface="Microsoft JhengHei"/>
-        <a:font script="Java" typeface="Javanese Text"/>
-        <a:font script="Lisu" typeface="Segoe UI"/>
-        <a:font script="Mymr" typeface="Myanmar Text"/>
-        <a:font script="Nkoo" typeface="Ebrima"/>
-        <a:font script="Olck" typeface="Nirmala UI"/>
-        <a:font script="Osma" typeface="Ebrima"/>
-        <a:font script="Phag" typeface="Phagspa"/>
-        <a:font script="Syrn" typeface="Estrangelo Edessa"/>
-        <a:font script="Syrj" typeface="Estrangelo Edessa"/>
-        <a:font script="Syre" typeface="Estrangelo Edessa"/>
-        <a:font script="Sora" typeface="Nirmala UI"/>
-        <a:font script="Tale" typeface="Microsoft Tai Le"/>
-        <a:font script="Talu" typeface="Microsoft New Tai Lue"/>
-        <a:font script="Tfng" typeface="Ebrima"/>
       </a:majorFont>
       <a:minorFont>
         <a:latin typeface="Calibri"/>
@@ -39070,23 +37326,6 @@
         <a:font script="Viet" typeface="Arial"/>
         <a:font script="Uigh" typeface="Microsoft Uighur"/>
         <a:font script="Geor" typeface="Sylfaen"/>
-        <a:font script="Armn" typeface="Arial"/>
-        <a:font script="Bugi" typeface="Leelawadee UI"/>
-        <a:font script="Bopo" typeface="Microsoft JhengHei"/>
-        <a:font script="Java" typeface="Javanese Text"/>
-        <a:font script="Lisu" typeface="Segoe UI"/>
-        <a:font script="Mymr" typeface="Myanmar Text"/>
-        <a:font script="Nkoo" typeface="Ebrima"/>
-        <a:font script="Olck" typeface="Nirmala UI"/>
-        <a:font script="Osma" typeface="Ebrima"/>
-        <a:font script="Phag" typeface="Phagspa"/>
-        <a:font script="Syrn" typeface="Estrangelo Edessa"/>
-        <a:font script="Syrj" typeface="Estrangelo Edessa"/>
-        <a:font script="Syre" typeface="Estrangelo Edessa"/>
-        <a:font script="Sora" typeface="Nirmala UI"/>
-        <a:font script="Tale" typeface="Microsoft Tai Le"/>
-        <a:font script="Talu" typeface="Microsoft New Tai Lue"/>
-        <a:font script="Tfng" typeface="Ebrima"/>
       </a:minorFont>
     </a:fontScheme>
     <a:fmtScheme name="Office">
@@ -39313,23 +37552,6 @@
         <a:font script="Viet" typeface="Times New Roman"/>
         <a:font script="Uigh" typeface="Microsoft Uighur"/>
         <a:font script="Geor" typeface="Sylfaen"/>
-        <a:font script="Armn" typeface="Arial"/>
-        <a:font script="Bugi" typeface="Leelawadee UI"/>
-        <a:font script="Bopo" typeface="Microsoft JhengHei"/>
-        <a:font script="Java" typeface="Javanese Text"/>
-        <a:font script="Lisu" typeface="Segoe UI"/>
-        <a:font script="Mymr" typeface="Myanmar Text"/>
-        <a:font script="Nkoo" typeface="Ebrima"/>
-        <a:font script="Olck" typeface="Nirmala UI"/>
-        <a:font script="Osma" typeface="Ebrima"/>
-        <a:font script="Phag" typeface="Phagspa"/>
-        <a:font script="Syrn" typeface="Estrangelo Edessa"/>
-        <a:font script="Syrj" typeface="Estrangelo Edessa"/>
-        <a:font script="Syre" typeface="Estrangelo Edessa"/>
-        <a:font script="Sora" typeface="Nirmala UI"/>
-        <a:font script="Tale" typeface="Microsoft Tai Le"/>
-        <a:font script="Talu" typeface="Microsoft New Tai Lue"/>
-        <a:font script="Tfng" typeface="Ebrima"/>
       </a:majorFont>
       <a:minorFont>
         <a:latin typeface="Calibri"/>
@@ -39365,23 +37587,6 @@
         <a:font script="Viet" typeface="Arial"/>
         <a:font script="Uigh" typeface="Microsoft Uighur"/>
         <a:font script="Geor" typeface="Sylfaen"/>
-        <a:font script="Armn" typeface="Arial"/>
-        <a:font script="Bugi" typeface="Leelawadee UI"/>
-        <a:font script="Bopo" typeface="Microsoft JhengHei"/>
-        <a:font script="Java" typeface="Javanese Text"/>
-        <a:font script="Lisu" typeface="Segoe UI"/>
-        <a:font script="Mymr" typeface="Myanmar Text"/>
-        <a:font script="Nkoo" typeface="Ebrima"/>
-        <a:font script="Olck" typeface="Nirmala UI"/>
-        <a:font script="Osma" typeface="Ebrima"/>
-        <a:font script="Phag" typeface="Phagspa"/>
-        <a:font script="Syrn" typeface="Estrangelo Edessa"/>
-        <a:font script="Syrj" typeface="Estrangelo Edessa"/>
-        <a:font script="Syre" typeface="Estrangelo Edessa"/>
-        <a:font script="Sora" typeface="Nirmala UI"/>
-        <a:font script="Tale" typeface="Microsoft Tai Le"/>
-        <a:font script="Talu" typeface="Microsoft New Tai Lue"/>
-        <a:font script="Tfng" typeface="Ebrima"/>
       </a:minorFont>
     </a:fontScheme>
     <a:fmtScheme name="Office">
